--- a/docs/pptx/auc3/jx-auc3-linsubhr-sens-akikdigo.pptx
+++ b/docs/pptx/auc3/jx-auc3-linsubhr-sens-akikdigo.pptx
@@ -5333,7 +5333,7 @@
           <p:spPr>
             <a:xfrm>
               <a:off x="817517" y="1896563"/>
-              <a:ext cx="6169365" cy="82021"/>
+              <a:ext cx="6833128" cy="82021"/>
             </a:xfrm>
             <a:prstGeom prst="rect">
               <a:avLst/>
@@ -5365,7 +5365,7 @@
                   <a:latin typeface="Helvetica"/>
                   <a:cs typeface="Helvetica"/>
                 </a:rPr>
-                <a:t>subHR per 0.1 ratio decline: 1.24 (1.01-1.52), p = 0.036  |  per IQR decline (Δ = 0.28): 1.83 (1.04-3.21)  |  IQR: [0.70, 0.98]</a:t>
+                <a:t>subHR per 0.1 ratio decline: 1.24 (1.01-1.52), p_Bonf = 0.218 (n = 6)  |  per IQR decline (Δ = 0.28): 1.83 (1.04-3.21)  |  IQR: [0.70, 0.98]</a:t>
               </a:r>
             </a:p>
           </p:txBody>

--- a/docs/pptx/auc3/jx-auc3-linsubhr-sens-akikdigo.pptx
+++ b/docs/pptx/auc3/jx-auc3-linsubhr-sens-akikdigo.pptx
@@ -5056,8 +5056,8 @@
           </p:nvSpPr>
           <p:spPr>
             <a:xfrm>
-              <a:off x="2137719" y="5785772"/>
-              <a:ext cx="155356" cy="80101"/>
+              <a:off x="2134610" y="5785772"/>
+              <a:ext cx="161574" cy="80101"/>
             </a:xfrm>
             <a:prstGeom prst="rect">
               <a:avLst/>
@@ -5089,7 +5089,7 @@
                   <a:latin typeface="Helvetica"/>
                   <a:cs typeface="Helvetica"/>
                 </a:rPr>
-                <a:t>0.6</a:t>
+                <a:t>-40</a:t>
               </a:r>
             </a:p>
           </p:txBody>
@@ -5102,8 +5102,8 @@
           </p:nvSpPr>
           <p:spPr>
             <a:xfrm>
-              <a:off x="3878840" y="5785772"/>
-              <a:ext cx="155356" cy="80101"/>
+              <a:off x="3875731" y="5785772"/>
+              <a:ext cx="161574" cy="80101"/>
             </a:xfrm>
             <a:prstGeom prst="rect">
               <a:avLst/>
@@ -5135,7 +5135,7 @@
                   <a:latin typeface="Helvetica"/>
                   <a:cs typeface="Helvetica"/>
                 </a:rPr>
-                <a:t>0.8</a:t>
+                <a:t>-20</a:t>
               </a:r>
             </a:p>
           </p:txBody>
@@ -5148,8 +5148,8 @@
           </p:nvSpPr>
           <p:spPr>
             <a:xfrm>
-              <a:off x="5619961" y="5785772"/>
-              <a:ext cx="155356" cy="80101"/>
+              <a:off x="5666549" y="5785772"/>
+              <a:ext cx="62179" cy="80101"/>
             </a:xfrm>
             <a:prstGeom prst="rect">
               <a:avLst/>
@@ -5181,7 +5181,7 @@
                   <a:latin typeface="Helvetica"/>
                   <a:cs typeface="Helvetica"/>
                 </a:rPr>
-                <a:t>1.0</a:t>
+                <a:t>0</a:t>
               </a:r>
             </a:p>
           </p:txBody>
@@ -5194,8 +5194,8 @@
           </p:nvSpPr>
           <p:spPr>
             <a:xfrm>
-              <a:off x="7361081" y="5785772"/>
-              <a:ext cx="155356" cy="80101"/>
+              <a:off x="7376580" y="5785772"/>
+              <a:ext cx="124358" cy="80101"/>
             </a:xfrm>
             <a:prstGeom prst="rect">
               <a:avLst/>
@@ -5227,7 +5227,7 @@
                   <a:latin typeface="Helvetica"/>
                   <a:cs typeface="Helvetica"/>
                 </a:rPr>
-                <a:t>1.2</a:t>
+                <a:t>20</a:t>
               </a:r>
             </a:p>
           </p:txBody>
@@ -5240,8 +5240,8 @@
           </p:nvSpPr>
           <p:spPr>
             <a:xfrm>
-              <a:off x="2691419" y="5925448"/>
-              <a:ext cx="4051889" cy="100218"/>
+              <a:off x="1561815" y="5925448"/>
+              <a:ext cx="6311097" cy="100218"/>
             </a:xfrm>
             <a:prstGeom prst="rect">
               <a:avLst/>
@@ -5273,7 +5273,7 @@
                   <a:latin typeface="Helvetica"/>
                   <a:cs typeface="Helvetica"/>
                 </a:rPr>
-                <a:t>Sensitivity eGFR Ratio (CKD-EPI 2012 CysC / CKD-EPI 2021 Cr)</a:t>
+                <a:t>Sensitivity eGFR Difference (%): 100 × (CKD-EPI 2012 CysC − CKD-EPI 2021 Cr) / CKD-EPI 2021 Cr</a:t>
               </a:r>
             </a:p>
           </p:txBody>
@@ -5333,7 +5333,7 @@
           <p:spPr>
             <a:xfrm>
               <a:off x="817517" y="1896563"/>
-              <a:ext cx="6833128" cy="82021"/>
+              <a:ext cx="6959864" cy="82021"/>
             </a:xfrm>
             <a:prstGeom prst="rect">
               <a:avLst/>
@@ -5365,7 +5365,7 @@
                   <a:latin typeface="Helvetica"/>
                   <a:cs typeface="Helvetica"/>
                 </a:rPr>
-                <a:t>subHR per 0.1 ratio decline: 1.24 (1.01-1.52), p_Bonf = 0.218 (n = 6)  |  per IQR decline (Δ = 0.28): 1.83 (1.04-3.21)  |  IQR: [0.70, 0.98]</a:t>
+                <a:t>subHR per 10 % decline: 1.24 (1.01-1.52), p_Bonf = 0.218 (n = 6)  |  per IQR decline (Δ = 28.1 %): 1.83 (1.04-3.21)  |  IQR: [-30.1, -2.1] %</a:t>
               </a:r>
             </a:p>
           </p:txBody>

--- a/docs/pptx/auc3/jx-auc3-linsubhr-sens-akikdigo.pptx
+++ b/docs/pptx/auc3/jx-auc3-linsubhr-sens-akikdigo.pptx
@@ -2265,34 +2265,26 @@
         </p:sp>
         <p:sp>
           <p:nvSpPr>
-            <p:cNvPr id="4" name="pl4"/>
+            <p:cNvPr id="4" name="rc4"/>
             <p:cNvSpPr/>
             <p:nvPr/>
           </p:nvSpPr>
           <p:spPr>
             <a:xfrm>
-              <a:off x="817517" y="5142518"/>
-              <a:ext cx="7799693" cy="0"/>
+              <a:off x="457200" y="1600200"/>
+              <a:ext cx="8229600" cy="4525962"/>
             </a:xfrm>
-            <a:custGeom>
+            <a:prstGeom prst="rect">
               <a:avLst/>
-              <a:pathLst>
-                <a:path w="7799693" h="0">
-                  <a:moveTo>
-                    <a:pt x="0" y="0"/>
-                  </a:moveTo>
-                  <a:lnTo>
-                    <a:pt x="7799693" y="0"/>
-                  </a:lnTo>
-                  <a:lnTo>
-                    <a:pt x="7799693" y="0"/>
-                  </a:lnTo>
-                </a:path>
-              </a:pathLst>
-            </a:custGeom>
-            <a:ln w="6775" cap="flat">
+            </a:prstGeom>
+            <a:solidFill>
+              <a:srgbClr val="FFFFFF">
+                <a:alpha val="100000"/>
+              </a:srgbClr>
+            </a:solidFill>
+            <a:ln w="13550" cap="rnd">
               <a:solidFill>
-                <a:srgbClr val="EBEBEB">
+                <a:srgbClr val="FFFFFF">
                   <a:alpha val="100000"/>
                 </a:srgbClr>
               </a:solidFill>
@@ -2314,21 +2306,21 @@
           </p:nvSpPr>
           <p:spPr>
             <a:xfrm>
-              <a:off x="817517" y="4313054"/>
-              <a:ext cx="7799693" cy="0"/>
+              <a:off x="887106" y="3250627"/>
+              <a:ext cx="7660515" cy="0"/>
             </a:xfrm>
             <a:custGeom>
               <a:avLst/>
               <a:pathLst>
-                <a:path w="7799693" h="0">
+                <a:path w="7660515" h="0">
                   <a:moveTo>
                     <a:pt x="0" y="0"/>
                   </a:moveTo>
                   <a:lnTo>
-                    <a:pt x="7799693" y="0"/>
-                  </a:lnTo>
-                  <a:lnTo>
-                    <a:pt x="7799693" y="0"/>
+                    <a:pt x="7660515" y="0"/>
+                  </a:lnTo>
+                  <a:lnTo>
+                    <a:pt x="7660515" y="0"/>
                   </a:lnTo>
                 </a:path>
               </a:pathLst>
@@ -2357,21 +2349,21 @@
           </p:nvSpPr>
           <p:spPr>
             <a:xfrm>
-              <a:off x="817517" y="3483591"/>
-              <a:ext cx="7799693" cy="0"/>
+              <a:off x="887106" y="2951293"/>
+              <a:ext cx="7660515" cy="0"/>
             </a:xfrm>
             <a:custGeom>
               <a:avLst/>
               <a:pathLst>
-                <a:path w="7799693" h="0">
+                <a:path w="7660515" h="0">
                   <a:moveTo>
                     <a:pt x="0" y="0"/>
                   </a:moveTo>
                   <a:lnTo>
-                    <a:pt x="7799693" y="0"/>
-                  </a:lnTo>
-                  <a:lnTo>
-                    <a:pt x="7799693" y="0"/>
+                    <a:pt x="7660515" y="0"/>
+                  </a:lnTo>
+                  <a:lnTo>
+                    <a:pt x="7660515" y="0"/>
                   </a:lnTo>
                 </a:path>
               </a:pathLst>
@@ -2400,21 +2392,21 @@
           </p:nvSpPr>
           <p:spPr>
             <a:xfrm>
-              <a:off x="817517" y="2654127"/>
-              <a:ext cx="7799693" cy="0"/>
+              <a:off x="887106" y="2651959"/>
+              <a:ext cx="7660515" cy="0"/>
             </a:xfrm>
             <a:custGeom>
               <a:avLst/>
               <a:pathLst>
-                <a:path w="7799693" h="0">
+                <a:path w="7660515" h="0">
                   <a:moveTo>
                     <a:pt x="0" y="0"/>
                   </a:moveTo>
                   <a:lnTo>
-                    <a:pt x="7799693" y="0"/>
-                  </a:lnTo>
-                  <a:lnTo>
-                    <a:pt x="7799693" y="0"/>
+                    <a:pt x="7660515" y="0"/>
+                  </a:lnTo>
+                  <a:lnTo>
+                    <a:pt x="7660515" y="0"/>
                   </a:lnTo>
                 </a:path>
               </a:pathLst>
@@ -2443,21 +2435,21 @@
           </p:nvSpPr>
           <p:spPr>
             <a:xfrm>
-              <a:off x="1344837" y="2073503"/>
-              <a:ext cx="0" cy="3649639"/>
+              <a:off x="887106" y="2352625"/>
+              <a:ext cx="7660515" cy="0"/>
             </a:xfrm>
             <a:custGeom>
               <a:avLst/>
               <a:pathLst>
-                <a:path w="0" h="3649639">
+                <a:path w="7660515" h="0">
                   <a:moveTo>
-                    <a:pt x="0" y="3649639"/>
+                    <a:pt x="0" y="0"/>
                   </a:moveTo>
                   <a:lnTo>
-                    <a:pt x="0" y="0"/>
-                  </a:lnTo>
-                  <a:lnTo>
-                    <a:pt x="0" y="0"/>
+                    <a:pt x="7660515" y="0"/>
+                  </a:lnTo>
+                  <a:lnTo>
+                    <a:pt x="7660515" y="0"/>
                   </a:lnTo>
                 </a:path>
               </a:pathLst>
@@ -2486,15 +2478,15 @@
           </p:nvSpPr>
           <p:spPr>
             <a:xfrm>
-              <a:off x="3085958" y="2073503"/>
-              <a:ext cx="0" cy="3649639"/>
+              <a:off x="1405017" y="2143092"/>
+              <a:ext cx="0" cy="1317069"/>
             </a:xfrm>
             <a:custGeom>
               <a:avLst/>
               <a:pathLst>
-                <a:path w="0" h="3649639">
+                <a:path w="0" h="1317069">
                   <a:moveTo>
-                    <a:pt x="0" y="3649639"/>
+                    <a:pt x="0" y="1317069"/>
                   </a:moveTo>
                   <a:lnTo>
                     <a:pt x="0" y="0"/>
@@ -2529,15 +2521,15 @@
           </p:nvSpPr>
           <p:spPr>
             <a:xfrm>
-              <a:off x="4827079" y="2073503"/>
-              <a:ext cx="0" cy="3649639"/>
+              <a:off x="3115069" y="2143092"/>
+              <a:ext cx="0" cy="1317069"/>
             </a:xfrm>
             <a:custGeom>
               <a:avLst/>
               <a:pathLst>
-                <a:path w="0" h="3649639">
+                <a:path w="0" h="1317069">
                   <a:moveTo>
-                    <a:pt x="0" y="3649639"/>
+                    <a:pt x="0" y="1317069"/>
                   </a:moveTo>
                   <a:lnTo>
                     <a:pt x="0" y="0"/>
@@ -2572,15 +2564,15 @@
           </p:nvSpPr>
           <p:spPr>
             <a:xfrm>
-              <a:off x="6568199" y="2073503"/>
-              <a:ext cx="0" cy="3649639"/>
+              <a:off x="4825121" y="2143092"/>
+              <a:ext cx="0" cy="1317069"/>
             </a:xfrm>
             <a:custGeom>
               <a:avLst/>
               <a:pathLst>
-                <a:path w="0" h="3649639">
+                <a:path w="0" h="1317069">
                   <a:moveTo>
-                    <a:pt x="0" y="3649639"/>
+                    <a:pt x="0" y="1317069"/>
                   </a:moveTo>
                   <a:lnTo>
                     <a:pt x="0" y="0"/>
@@ -2615,15 +2607,15 @@
           </p:nvSpPr>
           <p:spPr>
             <a:xfrm>
-              <a:off x="8309320" y="2073503"/>
-              <a:ext cx="0" cy="3649639"/>
+              <a:off x="6535173" y="2143092"/>
+              <a:ext cx="0" cy="1317069"/>
             </a:xfrm>
             <a:custGeom>
               <a:avLst/>
               <a:pathLst>
-                <a:path w="0" h="3649639">
+                <a:path w="0" h="1317069">
                   <a:moveTo>
-                    <a:pt x="0" y="3649639"/>
+                    <a:pt x="0" y="1317069"/>
                   </a:moveTo>
                   <a:lnTo>
                     <a:pt x="0" y="0"/>
@@ -2658,26 +2650,26 @@
           </p:nvSpPr>
           <p:spPr>
             <a:xfrm>
-              <a:off x="817517" y="5557249"/>
-              <a:ext cx="7799693" cy="0"/>
+              <a:off x="8245225" y="2143092"/>
+              <a:ext cx="0" cy="1317069"/>
             </a:xfrm>
             <a:custGeom>
               <a:avLst/>
               <a:pathLst>
-                <a:path w="7799693" h="0">
+                <a:path w="0" h="1317069">
                   <a:moveTo>
+                    <a:pt x="0" y="1317069"/>
+                  </a:moveTo>
+                  <a:lnTo>
                     <a:pt x="0" y="0"/>
-                  </a:moveTo>
-                  <a:lnTo>
-                    <a:pt x="7799693" y="0"/>
-                  </a:lnTo>
-                  <a:lnTo>
-                    <a:pt x="7799693" y="0"/>
+                  </a:lnTo>
+                  <a:lnTo>
+                    <a:pt x="0" y="0"/>
                   </a:lnTo>
                 </a:path>
               </a:pathLst>
             </a:custGeom>
-            <a:ln w="13550" cap="flat">
+            <a:ln w="6775" cap="flat">
               <a:solidFill>
                 <a:srgbClr val="EBEBEB">
                   <a:alpha val="100000"/>
@@ -2701,21 +2693,21 @@
           </p:nvSpPr>
           <p:spPr>
             <a:xfrm>
-              <a:off x="817517" y="4727786"/>
-              <a:ext cx="7799693" cy="0"/>
+              <a:off x="887106" y="3400294"/>
+              <a:ext cx="7660515" cy="0"/>
             </a:xfrm>
             <a:custGeom>
               <a:avLst/>
               <a:pathLst>
-                <a:path w="7799693" h="0">
+                <a:path w="7660515" h="0">
                   <a:moveTo>
                     <a:pt x="0" y="0"/>
                   </a:moveTo>
                   <a:lnTo>
-                    <a:pt x="7799693" y="0"/>
-                  </a:lnTo>
-                  <a:lnTo>
-                    <a:pt x="7799693" y="0"/>
+                    <a:pt x="7660515" y="0"/>
+                  </a:lnTo>
+                  <a:lnTo>
+                    <a:pt x="7660515" y="0"/>
                   </a:lnTo>
                 </a:path>
               </a:pathLst>
@@ -2744,21 +2736,21 @@
           </p:nvSpPr>
           <p:spPr>
             <a:xfrm>
-              <a:off x="817517" y="3898322"/>
-              <a:ext cx="7799693" cy="0"/>
+              <a:off x="887106" y="3100960"/>
+              <a:ext cx="7660515" cy="0"/>
             </a:xfrm>
             <a:custGeom>
               <a:avLst/>
               <a:pathLst>
-                <a:path w="7799693" h="0">
+                <a:path w="7660515" h="0">
                   <a:moveTo>
                     <a:pt x="0" y="0"/>
                   </a:moveTo>
                   <a:lnTo>
-                    <a:pt x="7799693" y="0"/>
-                  </a:lnTo>
-                  <a:lnTo>
-                    <a:pt x="7799693" y="0"/>
+                    <a:pt x="7660515" y="0"/>
+                  </a:lnTo>
+                  <a:lnTo>
+                    <a:pt x="7660515" y="0"/>
                   </a:lnTo>
                 </a:path>
               </a:pathLst>
@@ -2787,21 +2779,21 @@
           </p:nvSpPr>
           <p:spPr>
             <a:xfrm>
-              <a:off x="817517" y="3068859"/>
-              <a:ext cx="7799693" cy="0"/>
+              <a:off x="887106" y="2801626"/>
+              <a:ext cx="7660515" cy="0"/>
             </a:xfrm>
             <a:custGeom>
               <a:avLst/>
               <a:pathLst>
-                <a:path w="7799693" h="0">
+                <a:path w="7660515" h="0">
                   <a:moveTo>
                     <a:pt x="0" y="0"/>
                   </a:moveTo>
                   <a:lnTo>
-                    <a:pt x="7799693" y="0"/>
-                  </a:lnTo>
-                  <a:lnTo>
-                    <a:pt x="7799693" y="0"/>
+                    <a:pt x="7660515" y="0"/>
+                  </a:lnTo>
+                  <a:lnTo>
+                    <a:pt x="7660515" y="0"/>
                   </a:lnTo>
                 </a:path>
               </a:pathLst>
@@ -2830,21 +2822,21 @@
           </p:nvSpPr>
           <p:spPr>
             <a:xfrm>
-              <a:off x="817517" y="2239395"/>
-              <a:ext cx="7799693" cy="0"/>
+              <a:off x="887106" y="2502292"/>
+              <a:ext cx="7660515" cy="0"/>
             </a:xfrm>
             <a:custGeom>
               <a:avLst/>
               <a:pathLst>
-                <a:path w="7799693" h="0">
+                <a:path w="7660515" h="0">
                   <a:moveTo>
                     <a:pt x="0" y="0"/>
                   </a:moveTo>
                   <a:lnTo>
-                    <a:pt x="7799693" y="0"/>
-                  </a:lnTo>
-                  <a:lnTo>
-                    <a:pt x="7799693" y="0"/>
+                    <a:pt x="7660515" y="0"/>
+                  </a:lnTo>
+                  <a:lnTo>
+                    <a:pt x="7660515" y="0"/>
                   </a:lnTo>
                 </a:path>
               </a:pathLst>
@@ -2873,21 +2865,21 @@
           </p:nvSpPr>
           <p:spPr>
             <a:xfrm>
-              <a:off x="2215398" y="2073503"/>
-              <a:ext cx="0" cy="3649639"/>
+              <a:off x="887106" y="2202958"/>
+              <a:ext cx="7660515" cy="0"/>
             </a:xfrm>
             <a:custGeom>
               <a:avLst/>
               <a:pathLst>
-                <a:path w="0" h="3649639">
+                <a:path w="7660515" h="0">
                   <a:moveTo>
-                    <a:pt x="0" y="3649639"/>
+                    <a:pt x="0" y="0"/>
                   </a:moveTo>
                   <a:lnTo>
-                    <a:pt x="0" y="0"/>
-                  </a:lnTo>
-                  <a:lnTo>
-                    <a:pt x="0" y="0"/>
+                    <a:pt x="7660515" y="0"/>
+                  </a:lnTo>
+                  <a:lnTo>
+                    <a:pt x="7660515" y="0"/>
                   </a:lnTo>
                 </a:path>
               </a:pathLst>
@@ -2916,15 +2908,15 @@
           </p:nvSpPr>
           <p:spPr>
             <a:xfrm>
-              <a:off x="3956518" y="2073503"/>
-              <a:ext cx="0" cy="3649639"/>
+              <a:off x="2260043" y="2143092"/>
+              <a:ext cx="0" cy="1317069"/>
             </a:xfrm>
             <a:custGeom>
               <a:avLst/>
               <a:pathLst>
-                <a:path w="0" h="3649639">
+                <a:path w="0" h="1317069">
                   <a:moveTo>
-                    <a:pt x="0" y="3649639"/>
+                    <a:pt x="0" y="1317069"/>
                   </a:moveTo>
                   <a:lnTo>
                     <a:pt x="0" y="0"/>
@@ -2959,15 +2951,15 @@
           </p:nvSpPr>
           <p:spPr>
             <a:xfrm>
-              <a:off x="5697639" y="2073503"/>
-              <a:ext cx="0" cy="3649639"/>
+              <a:off x="3970095" y="2143092"/>
+              <a:ext cx="0" cy="1317069"/>
             </a:xfrm>
             <a:custGeom>
               <a:avLst/>
               <a:pathLst>
-                <a:path w="0" h="3649639">
+                <a:path w="0" h="1317069">
                   <a:moveTo>
-                    <a:pt x="0" y="3649639"/>
+                    <a:pt x="0" y="1317069"/>
                   </a:moveTo>
                   <a:lnTo>
                     <a:pt x="0" y="0"/>
@@ -3002,15 +2994,15 @@
           </p:nvSpPr>
           <p:spPr>
             <a:xfrm>
-              <a:off x="7438760" y="2073503"/>
-              <a:ext cx="0" cy="3649639"/>
+              <a:off x="5680147" y="2143092"/>
+              <a:ext cx="0" cy="1317069"/>
             </a:xfrm>
             <a:custGeom>
               <a:avLst/>
               <a:pathLst>
-                <a:path w="0" h="3649639">
+                <a:path w="0" h="1317069">
                   <a:moveTo>
-                    <a:pt x="0" y="3649639"/>
+                    <a:pt x="0" y="1317069"/>
                   </a:moveTo>
                   <a:lnTo>
                     <a:pt x="0" y="0"/>
@@ -3039,615 +3031,658 @@
         </p:sp>
         <p:sp>
           <p:nvSpPr>
-            <p:cNvPr id="22" name="pg22"/>
+            <p:cNvPr id="22" name="pl22"/>
             <p:cNvSpPr/>
             <p:nvPr/>
           </p:nvSpPr>
           <p:spPr>
             <a:xfrm>
-              <a:off x="1172049" y="2073503"/>
-              <a:ext cx="7090630" cy="3359018"/>
+              <a:off x="7390199" y="2143092"/>
+              <a:ext cx="0" cy="1317069"/>
             </a:xfrm>
             <a:custGeom>
               <a:avLst/>
               <a:pathLst>
-                <a:path w="7090630" h="3359018">
+                <a:path w="0" h="1317069">
                   <a:moveTo>
-                    <a:pt x="114681" y="0"/>
+                    <a:pt x="0" y="1317069"/>
                   </a:moveTo>
                   <a:lnTo>
-                    <a:pt x="143245" y="47654"/>
-                  </a:lnTo>
-                  <a:lnTo>
-                    <a:pt x="214867" y="163132"/>
-                  </a:lnTo>
-                  <a:lnTo>
-                    <a:pt x="286490" y="274729"/>
-                  </a:lnTo>
-                  <a:lnTo>
-                    <a:pt x="358112" y="382575"/>
-                  </a:lnTo>
-                  <a:lnTo>
-                    <a:pt x="429735" y="486797"/>
-                  </a:lnTo>
-                  <a:lnTo>
-                    <a:pt x="501357" y="587517"/>
-                  </a:lnTo>
-                  <a:lnTo>
-                    <a:pt x="572980" y="684851"/>
-                  </a:lnTo>
-                  <a:lnTo>
-                    <a:pt x="644602" y="778915"/>
-                  </a:lnTo>
-                  <a:lnTo>
-                    <a:pt x="716225" y="869817"/>
-                  </a:lnTo>
-                  <a:lnTo>
-                    <a:pt x="787847" y="957664"/>
-                  </a:lnTo>
-                  <a:lnTo>
-                    <a:pt x="859470" y="1042559"/>
-                  </a:lnTo>
-                  <a:lnTo>
-                    <a:pt x="931092" y="1124601"/>
-                  </a:lnTo>
-                  <a:lnTo>
-                    <a:pt x="1002715" y="1203885"/>
-                  </a:lnTo>
-                  <a:lnTo>
-                    <a:pt x="1074337" y="1280505"/>
-                  </a:lnTo>
-                  <a:lnTo>
-                    <a:pt x="1145960" y="1354550"/>
-                  </a:lnTo>
-                  <a:lnTo>
-                    <a:pt x="1217582" y="1426107"/>
-                  </a:lnTo>
-                  <a:lnTo>
-                    <a:pt x="1289205" y="1495259"/>
-                  </a:lnTo>
-                  <a:lnTo>
-                    <a:pt x="1360827" y="1562086"/>
-                  </a:lnTo>
-                  <a:lnTo>
-                    <a:pt x="1432450" y="1626668"/>
-                  </a:lnTo>
-                  <a:lnTo>
-                    <a:pt x="1504073" y="1689080"/>
-                  </a:lnTo>
-                  <a:lnTo>
-                    <a:pt x="1575695" y="1749394"/>
-                  </a:lnTo>
-                  <a:lnTo>
-                    <a:pt x="1647318" y="1807681"/>
-                  </a:lnTo>
-                  <a:lnTo>
-                    <a:pt x="1718940" y="1864009"/>
-                  </a:lnTo>
-                  <a:lnTo>
-                    <a:pt x="1790563" y="1918444"/>
-                  </a:lnTo>
-                  <a:lnTo>
-                    <a:pt x="1862185" y="1971049"/>
-                  </a:lnTo>
-                  <a:lnTo>
-                    <a:pt x="1933808" y="2021887"/>
-                  </a:lnTo>
-                  <a:lnTo>
-                    <a:pt x="2005430" y="2071016"/>
-                  </a:lnTo>
-                  <a:lnTo>
-                    <a:pt x="2077053" y="2118494"/>
-                  </a:lnTo>
-                  <a:lnTo>
-                    <a:pt x="2148675" y="2164377"/>
-                  </a:lnTo>
-                  <a:lnTo>
-                    <a:pt x="2220298" y="2208717"/>
-                  </a:lnTo>
-                  <a:lnTo>
-                    <a:pt x="2291920" y="2251568"/>
-                  </a:lnTo>
-                  <a:lnTo>
-                    <a:pt x="2363543" y="2292978"/>
-                  </a:lnTo>
-                  <a:lnTo>
-                    <a:pt x="2435165" y="2332996"/>
-                  </a:lnTo>
-                  <a:lnTo>
-                    <a:pt x="2506788" y="2371670"/>
-                  </a:lnTo>
-                  <a:lnTo>
-                    <a:pt x="2578410" y="2409044"/>
-                  </a:lnTo>
-                  <a:lnTo>
-                    <a:pt x="2650033" y="2445162"/>
-                  </a:lnTo>
-                  <a:lnTo>
-                    <a:pt x="2721655" y="2480066"/>
-                  </a:lnTo>
-                  <a:lnTo>
-                    <a:pt x="2793278" y="2513797"/>
-                  </a:lnTo>
-                  <a:lnTo>
-                    <a:pt x="2864901" y="2546394"/>
-                  </a:lnTo>
-                  <a:lnTo>
-                    <a:pt x="2936523" y="2577896"/>
-                  </a:lnTo>
-                  <a:lnTo>
-                    <a:pt x="3008146" y="2608339"/>
-                  </a:lnTo>
-                  <a:lnTo>
-                    <a:pt x="3079768" y="2637760"/>
-                  </a:lnTo>
-                  <a:lnTo>
-                    <a:pt x="3151391" y="2654678"/>
-                  </a:lnTo>
-                  <a:lnTo>
-                    <a:pt x="3223013" y="2655611"/>
-                  </a:lnTo>
-                  <a:lnTo>
-                    <a:pt x="3294636" y="2656544"/>
-                  </a:lnTo>
-                  <a:lnTo>
-                    <a:pt x="3366258" y="2657475"/>
-                  </a:lnTo>
-                  <a:lnTo>
-                    <a:pt x="3437881" y="2658405"/>
-                  </a:lnTo>
-                  <a:lnTo>
-                    <a:pt x="3509503" y="2659335"/>
-                  </a:lnTo>
-                  <a:lnTo>
-                    <a:pt x="3581126" y="2660263"/>
-                  </a:lnTo>
-                  <a:lnTo>
-                    <a:pt x="3652748" y="2661190"/>
-                  </a:lnTo>
-                  <a:lnTo>
-                    <a:pt x="3724371" y="2662116"/>
-                  </a:lnTo>
-                  <a:lnTo>
-                    <a:pt x="3795993" y="2663041"/>
-                  </a:lnTo>
-                  <a:lnTo>
-                    <a:pt x="3867616" y="2663965"/>
-                  </a:lnTo>
-                  <a:lnTo>
-                    <a:pt x="3939238" y="2664888"/>
-                  </a:lnTo>
-                  <a:lnTo>
-                    <a:pt x="4010861" y="2665810"/>
-                  </a:lnTo>
-                  <a:lnTo>
-                    <a:pt x="4082483" y="2666731"/>
-                  </a:lnTo>
-                  <a:lnTo>
-                    <a:pt x="4154106" y="2667651"/>
-                  </a:lnTo>
-                  <a:lnTo>
-                    <a:pt x="4225729" y="2668570"/>
-                  </a:lnTo>
-                  <a:lnTo>
-                    <a:pt x="4297351" y="2669487"/>
-                  </a:lnTo>
-                  <a:lnTo>
-                    <a:pt x="4368974" y="2670404"/>
-                  </a:lnTo>
-                  <a:lnTo>
-                    <a:pt x="4440596" y="2671320"/>
-                  </a:lnTo>
-                  <a:lnTo>
-                    <a:pt x="4512219" y="2672234"/>
-                  </a:lnTo>
-                  <a:lnTo>
-                    <a:pt x="4583841" y="2673148"/>
-                  </a:lnTo>
-                  <a:lnTo>
-                    <a:pt x="4655464" y="2674061"/>
-                  </a:lnTo>
-                  <a:lnTo>
-                    <a:pt x="4727086" y="2674972"/>
-                  </a:lnTo>
-                  <a:lnTo>
-                    <a:pt x="4798709" y="2675883"/>
-                  </a:lnTo>
-                  <a:lnTo>
-                    <a:pt x="4870331" y="2676792"/>
-                  </a:lnTo>
-                  <a:lnTo>
-                    <a:pt x="4941954" y="2677701"/>
-                  </a:lnTo>
-                  <a:lnTo>
-                    <a:pt x="5013576" y="2678608"/>
-                  </a:lnTo>
-                  <a:lnTo>
-                    <a:pt x="5085199" y="2679515"/>
-                  </a:lnTo>
-                  <a:lnTo>
-                    <a:pt x="5156821" y="2680420"/>
-                  </a:lnTo>
-                  <a:lnTo>
-                    <a:pt x="5228444" y="2681325"/>
-                  </a:lnTo>
-                  <a:lnTo>
-                    <a:pt x="5300066" y="2682228"/>
-                  </a:lnTo>
-                  <a:lnTo>
-                    <a:pt x="5371689" y="2683131"/>
-                  </a:lnTo>
-                  <a:lnTo>
-                    <a:pt x="5443311" y="2684032"/>
-                  </a:lnTo>
-                  <a:lnTo>
-                    <a:pt x="5514934" y="2684932"/>
-                  </a:lnTo>
-                  <a:lnTo>
-                    <a:pt x="5586557" y="2685832"/>
-                  </a:lnTo>
-                  <a:lnTo>
-                    <a:pt x="5658179" y="2686730"/>
-                  </a:lnTo>
-                  <a:lnTo>
-                    <a:pt x="5729802" y="2687628"/>
-                  </a:lnTo>
-                  <a:lnTo>
-                    <a:pt x="5801424" y="2688524"/>
-                  </a:lnTo>
-                  <a:lnTo>
-                    <a:pt x="5873047" y="2689419"/>
-                  </a:lnTo>
-                  <a:lnTo>
-                    <a:pt x="5944669" y="2690313"/>
-                  </a:lnTo>
-                  <a:lnTo>
-                    <a:pt x="6016292" y="2691207"/>
-                  </a:lnTo>
-                  <a:lnTo>
-                    <a:pt x="6087914" y="2692099"/>
-                  </a:lnTo>
-                  <a:lnTo>
-                    <a:pt x="6159537" y="2692990"/>
-                  </a:lnTo>
-                  <a:lnTo>
-                    <a:pt x="6231159" y="2693881"/>
-                  </a:lnTo>
-                  <a:lnTo>
-                    <a:pt x="6302782" y="2694770"/>
-                  </a:lnTo>
-                  <a:lnTo>
-                    <a:pt x="6374404" y="2695658"/>
-                  </a:lnTo>
-                  <a:lnTo>
-                    <a:pt x="6446027" y="2696545"/>
-                  </a:lnTo>
-                  <a:lnTo>
-                    <a:pt x="6517649" y="2697432"/>
-                  </a:lnTo>
-                  <a:lnTo>
-                    <a:pt x="6589272" y="2698317"/>
-                  </a:lnTo>
-                  <a:lnTo>
-                    <a:pt x="6660894" y="2699201"/>
-                  </a:lnTo>
-                  <a:lnTo>
-                    <a:pt x="6732517" y="2700085"/>
-                  </a:lnTo>
-                  <a:lnTo>
-                    <a:pt x="6804139" y="2700967"/>
-                  </a:lnTo>
-                  <a:lnTo>
-                    <a:pt x="6875762" y="2701848"/>
-                  </a:lnTo>
-                  <a:lnTo>
-                    <a:pt x="6947385" y="2702729"/>
-                  </a:lnTo>
-                  <a:lnTo>
-                    <a:pt x="7019007" y="2703608"/>
-                  </a:lnTo>
-                  <a:lnTo>
-                    <a:pt x="7090630" y="2704486"/>
-                  </a:lnTo>
-                  <a:lnTo>
-                    <a:pt x="7090630" y="3359018"/>
-                  </a:lnTo>
-                  <a:lnTo>
-                    <a:pt x="7019007" y="3354680"/>
-                  </a:lnTo>
-                  <a:lnTo>
-                    <a:pt x="6947385" y="3350192"/>
-                  </a:lnTo>
-                  <a:lnTo>
-                    <a:pt x="6875762" y="3345547"/>
-                  </a:lnTo>
-                  <a:lnTo>
-                    <a:pt x="6804139" y="3340741"/>
-                  </a:lnTo>
-                  <a:lnTo>
-                    <a:pt x="6732517" y="3335768"/>
-                  </a:lnTo>
-                  <a:lnTo>
-                    <a:pt x="6660894" y="3330622"/>
-                  </a:lnTo>
-                  <a:lnTo>
-                    <a:pt x="6589272" y="3325297"/>
-                  </a:lnTo>
-                  <a:lnTo>
-                    <a:pt x="6517649" y="3319786"/>
-                  </a:lnTo>
-                  <a:lnTo>
-                    <a:pt x="6446027" y="3314085"/>
-                  </a:lnTo>
-                  <a:lnTo>
-                    <a:pt x="6374404" y="3308184"/>
-                  </a:lnTo>
-                  <a:lnTo>
-                    <a:pt x="6302782" y="3302079"/>
-                  </a:lnTo>
-                  <a:lnTo>
-                    <a:pt x="6231159" y="3295761"/>
-                  </a:lnTo>
-                  <a:lnTo>
-                    <a:pt x="6159537" y="3289224"/>
-                  </a:lnTo>
-                  <a:lnTo>
-                    <a:pt x="6087914" y="3282459"/>
-                  </a:lnTo>
-                  <a:lnTo>
-                    <a:pt x="6016292" y="3275459"/>
-                  </a:lnTo>
-                  <a:lnTo>
-                    <a:pt x="5944669" y="3268216"/>
-                  </a:lnTo>
-                  <a:lnTo>
-                    <a:pt x="5873047" y="3260721"/>
-                  </a:lnTo>
-                  <a:lnTo>
-                    <a:pt x="5801424" y="3252965"/>
-                  </a:lnTo>
-                  <a:lnTo>
-                    <a:pt x="5729802" y="3244939"/>
-                  </a:lnTo>
-                  <a:lnTo>
-                    <a:pt x="5658179" y="3236634"/>
-                  </a:lnTo>
-                  <a:lnTo>
-                    <a:pt x="5586557" y="3228041"/>
-                  </a:lnTo>
-                  <a:lnTo>
-                    <a:pt x="5514934" y="3219148"/>
-                  </a:lnTo>
-                  <a:lnTo>
-                    <a:pt x="5443311" y="3209946"/>
-                  </a:lnTo>
-                  <a:lnTo>
-                    <a:pt x="5371689" y="3200425"/>
-                  </a:lnTo>
-                  <a:lnTo>
-                    <a:pt x="5300066" y="3190572"/>
-                  </a:lnTo>
-                  <a:lnTo>
-                    <a:pt x="5228444" y="3180376"/>
-                  </a:lnTo>
-                  <a:lnTo>
-                    <a:pt x="5156821" y="3169826"/>
-                  </a:lnTo>
-                  <a:lnTo>
-                    <a:pt x="5085199" y="3158910"/>
-                  </a:lnTo>
-                  <a:lnTo>
-                    <a:pt x="5013576" y="3147613"/>
-                  </a:lnTo>
-                  <a:lnTo>
-                    <a:pt x="4941954" y="3135924"/>
-                  </a:lnTo>
-                  <a:lnTo>
-                    <a:pt x="4870331" y="3123828"/>
-                  </a:lnTo>
-                  <a:lnTo>
-                    <a:pt x="4798709" y="3111311"/>
-                  </a:lnTo>
-                  <a:lnTo>
-                    <a:pt x="4727086" y="3098359"/>
-                  </a:lnTo>
-                  <a:lnTo>
-                    <a:pt x="4655464" y="3084957"/>
-                  </a:lnTo>
-                  <a:lnTo>
-                    <a:pt x="4583841" y="3071089"/>
-                  </a:lnTo>
-                  <a:lnTo>
-                    <a:pt x="4512219" y="3056738"/>
-                  </a:lnTo>
-                  <a:lnTo>
-                    <a:pt x="4440596" y="3041889"/>
-                  </a:lnTo>
-                  <a:lnTo>
-                    <a:pt x="4368974" y="3026522"/>
-                  </a:lnTo>
-                  <a:lnTo>
-                    <a:pt x="4297351" y="3010622"/>
-                  </a:lnTo>
-                  <a:lnTo>
-                    <a:pt x="4225729" y="2994169"/>
-                  </a:lnTo>
-                  <a:lnTo>
-                    <a:pt x="4154106" y="2977143"/>
-                  </a:lnTo>
-                  <a:lnTo>
-                    <a:pt x="4082483" y="2959525"/>
-                  </a:lnTo>
-                  <a:lnTo>
-                    <a:pt x="4010861" y="2941295"/>
-                  </a:lnTo>
-                  <a:lnTo>
-                    <a:pt x="3939238" y="2922431"/>
-                  </a:lnTo>
-                  <a:lnTo>
-                    <a:pt x="3867616" y="2902910"/>
-                  </a:lnTo>
-                  <a:lnTo>
-                    <a:pt x="3795993" y="2882711"/>
-                  </a:lnTo>
-                  <a:lnTo>
-                    <a:pt x="3724371" y="2861810"/>
-                  </a:lnTo>
-                  <a:lnTo>
-                    <a:pt x="3652748" y="2840181"/>
-                  </a:lnTo>
-                  <a:lnTo>
-                    <a:pt x="3581126" y="2817800"/>
-                  </a:lnTo>
-                  <a:lnTo>
-                    <a:pt x="3509503" y="2794641"/>
-                  </a:lnTo>
-                  <a:lnTo>
-                    <a:pt x="3437881" y="2770677"/>
-                  </a:lnTo>
-                  <a:lnTo>
-                    <a:pt x="3366258" y="2745879"/>
-                  </a:lnTo>
-                  <a:lnTo>
-                    <a:pt x="3294636" y="2720219"/>
-                  </a:lnTo>
-                  <a:lnTo>
-                    <a:pt x="3223013" y="2693667"/>
-                  </a:lnTo>
-                  <a:lnTo>
-                    <a:pt x="3151391" y="2666191"/>
-                  </a:lnTo>
-                  <a:lnTo>
-                    <a:pt x="3079768" y="2653744"/>
-                  </a:lnTo>
-                  <a:lnTo>
-                    <a:pt x="3008146" y="2652808"/>
-                  </a:lnTo>
-                  <a:lnTo>
-                    <a:pt x="2936523" y="2651871"/>
-                  </a:lnTo>
-                  <a:lnTo>
-                    <a:pt x="2864901" y="2650934"/>
-                  </a:lnTo>
-                  <a:lnTo>
-                    <a:pt x="2793278" y="2649995"/>
-                  </a:lnTo>
-                  <a:lnTo>
-                    <a:pt x="2721655" y="2649055"/>
-                  </a:lnTo>
-                  <a:lnTo>
-                    <a:pt x="2650033" y="2648115"/>
-                  </a:lnTo>
-                  <a:lnTo>
-                    <a:pt x="2578410" y="2647173"/>
-                  </a:lnTo>
-                  <a:lnTo>
-                    <a:pt x="2506788" y="2646230"/>
-                  </a:lnTo>
-                  <a:lnTo>
-                    <a:pt x="2435165" y="2645286"/>
-                  </a:lnTo>
-                  <a:lnTo>
-                    <a:pt x="2363543" y="2644341"/>
-                  </a:lnTo>
-                  <a:lnTo>
-                    <a:pt x="2291920" y="2643395"/>
-                  </a:lnTo>
-                  <a:lnTo>
-                    <a:pt x="2220298" y="2642447"/>
-                  </a:lnTo>
-                  <a:lnTo>
-                    <a:pt x="2148675" y="2641499"/>
-                  </a:lnTo>
-                  <a:lnTo>
-                    <a:pt x="2077053" y="2640550"/>
-                  </a:lnTo>
-                  <a:lnTo>
-                    <a:pt x="2005430" y="2639599"/>
-                  </a:lnTo>
-                  <a:lnTo>
-                    <a:pt x="1933808" y="2638648"/>
-                  </a:lnTo>
-                  <a:lnTo>
-                    <a:pt x="1862185" y="2637695"/>
-                  </a:lnTo>
-                  <a:lnTo>
-                    <a:pt x="1790563" y="2636742"/>
-                  </a:lnTo>
-                  <a:lnTo>
-                    <a:pt x="1718940" y="2635787"/>
-                  </a:lnTo>
-                  <a:lnTo>
-                    <a:pt x="1647318" y="2634831"/>
-                  </a:lnTo>
-                  <a:lnTo>
-                    <a:pt x="1575695" y="2633874"/>
-                  </a:lnTo>
-                  <a:lnTo>
-                    <a:pt x="1504073" y="2632917"/>
-                  </a:lnTo>
-                  <a:lnTo>
-                    <a:pt x="1432450" y="2631958"/>
-                  </a:lnTo>
-                  <a:lnTo>
-                    <a:pt x="1360827" y="2630997"/>
-                  </a:lnTo>
-                  <a:lnTo>
-                    <a:pt x="1289205" y="2630036"/>
-                  </a:lnTo>
-                  <a:lnTo>
-                    <a:pt x="1217582" y="2629074"/>
-                  </a:lnTo>
-                  <a:lnTo>
-                    <a:pt x="1145960" y="2628111"/>
-                  </a:lnTo>
-                  <a:lnTo>
-                    <a:pt x="1074337" y="2627146"/>
-                  </a:lnTo>
-                  <a:lnTo>
-                    <a:pt x="1002715" y="2626181"/>
-                  </a:lnTo>
-                  <a:lnTo>
-                    <a:pt x="931092" y="2625214"/>
-                  </a:lnTo>
-                  <a:lnTo>
-                    <a:pt x="859470" y="2624246"/>
-                  </a:lnTo>
-                  <a:lnTo>
-                    <a:pt x="787847" y="2623278"/>
-                  </a:lnTo>
-                  <a:lnTo>
-                    <a:pt x="716225" y="2622308"/>
-                  </a:lnTo>
-                  <a:lnTo>
-                    <a:pt x="644602" y="2621337"/>
-                  </a:lnTo>
-                  <a:lnTo>
-                    <a:pt x="572980" y="2620365"/>
-                  </a:lnTo>
-                  <a:lnTo>
-                    <a:pt x="501357" y="2619392"/>
-                  </a:lnTo>
-                  <a:lnTo>
-                    <a:pt x="429735" y="2618417"/>
-                  </a:lnTo>
-                  <a:lnTo>
-                    <a:pt x="358112" y="2617442"/>
-                  </a:lnTo>
-                  <a:lnTo>
-                    <a:pt x="286490" y="2616466"/>
-                  </a:lnTo>
-                  <a:lnTo>
-                    <a:pt x="214867" y="2615488"/>
-                  </a:lnTo>
-                  <a:lnTo>
-                    <a:pt x="143245" y="2614509"/>
-                  </a:lnTo>
-                  <a:lnTo>
-                    <a:pt x="71622" y="2613530"/>
-                  </a:lnTo>
-                  <a:lnTo>
-                    <a:pt x="0" y="2612549"/>
+                    <a:pt x="0" y="0"/>
+                  </a:lnTo>
+                  <a:lnTo>
+                    <a:pt x="0" y="0"/>
+                  </a:lnTo>
+                </a:path>
+              </a:pathLst>
+            </a:custGeom>
+            <a:ln w="13550" cap="flat">
+              <a:solidFill>
+                <a:srgbClr val="EBEBEB">
+                  <a:alpha val="100000"/>
+                </a:srgbClr>
+              </a:solidFill>
+              <a:prstDash val="solid"/>
+              <a:round/>
+            </a:ln>
+          </p:spPr>
+          <p:txBody>
+            <a:bodyPr/>
+            <a:lstStyle/>
+            <a:p/>
+          </p:txBody>
+        </p:sp>
+        <p:sp>
+          <p:nvSpPr>
+            <p:cNvPr id="23" name="pg23"/>
+            <p:cNvSpPr/>
+            <p:nvPr/>
+          </p:nvSpPr>
+          <p:spPr>
+            <a:xfrm>
+              <a:off x="1235312" y="2143092"/>
+              <a:ext cx="6964104" cy="1212190"/>
+            </a:xfrm>
+            <a:custGeom>
+              <a:avLst/>
+              <a:pathLst>
+                <a:path w="6964104" h="1212190">
+                  <a:moveTo>
+                    <a:pt x="112635" y="0"/>
+                  </a:moveTo>
+                  <a:lnTo>
+                    <a:pt x="140688" y="17197"/>
+                  </a:lnTo>
+                  <a:lnTo>
+                    <a:pt x="211033" y="58870"/>
+                  </a:lnTo>
+                  <a:lnTo>
+                    <a:pt x="281377" y="99143"/>
+                  </a:lnTo>
+                  <a:lnTo>
+                    <a:pt x="351722" y="138062"/>
+                  </a:lnTo>
+                  <a:lnTo>
+                    <a:pt x="422066" y="175673"/>
+                  </a:lnTo>
+                  <a:lnTo>
+                    <a:pt x="492411" y="212021"/>
+                  </a:lnTo>
+                  <a:lnTo>
+                    <a:pt x="562755" y="247146"/>
+                  </a:lnTo>
+                  <a:lnTo>
+                    <a:pt x="633100" y="281092"/>
+                  </a:lnTo>
+                  <a:lnTo>
+                    <a:pt x="703444" y="313896"/>
+                  </a:lnTo>
+                  <a:lnTo>
+                    <a:pt x="773789" y="345598"/>
+                  </a:lnTo>
+                  <a:lnTo>
+                    <a:pt x="844133" y="376235"/>
+                  </a:lnTo>
+                  <a:lnTo>
+                    <a:pt x="914478" y="405842"/>
+                  </a:lnTo>
+                  <a:lnTo>
+                    <a:pt x="984822" y="434454"/>
+                  </a:lnTo>
+                  <a:lnTo>
+                    <a:pt x="1055167" y="462104"/>
+                  </a:lnTo>
+                  <a:lnTo>
+                    <a:pt x="1125511" y="488825"/>
+                  </a:lnTo>
+                  <a:lnTo>
+                    <a:pt x="1195856" y="514648"/>
+                  </a:lnTo>
+                  <a:lnTo>
+                    <a:pt x="1266200" y="539603"/>
+                  </a:lnTo>
+                  <a:lnTo>
+                    <a:pt x="1336545" y="563720"/>
+                  </a:lnTo>
+                  <a:lnTo>
+                    <a:pt x="1406889" y="587026"/>
+                  </a:lnTo>
+                  <a:lnTo>
+                    <a:pt x="1477234" y="609549"/>
+                  </a:lnTo>
+                  <a:lnTo>
+                    <a:pt x="1547578" y="631315"/>
+                  </a:lnTo>
+                  <a:lnTo>
+                    <a:pt x="1617923" y="652349"/>
+                  </a:lnTo>
+                  <a:lnTo>
+                    <a:pt x="1688267" y="672677"/>
+                  </a:lnTo>
+                  <a:lnTo>
+                    <a:pt x="1758612" y="692321"/>
+                  </a:lnTo>
+                  <a:lnTo>
+                    <a:pt x="1828956" y="711305"/>
+                  </a:lnTo>
+                  <a:lnTo>
+                    <a:pt x="1899301" y="729651"/>
+                  </a:lnTo>
+                  <a:lnTo>
+                    <a:pt x="1969645" y="747381"/>
+                  </a:lnTo>
+                  <a:lnTo>
+                    <a:pt x="2039990" y="764514"/>
+                  </a:lnTo>
+                  <a:lnTo>
+                    <a:pt x="2110334" y="781072"/>
+                  </a:lnTo>
+                  <a:lnTo>
+                    <a:pt x="2180679" y="797074"/>
+                  </a:lnTo>
+                  <a:lnTo>
+                    <a:pt x="2251023" y="812537"/>
+                  </a:lnTo>
+                  <a:lnTo>
+                    <a:pt x="2321368" y="827481"/>
+                  </a:lnTo>
+                  <a:lnTo>
+                    <a:pt x="2391712" y="841923"/>
+                  </a:lnTo>
+                  <a:lnTo>
+                    <a:pt x="2462057" y="855880"/>
+                  </a:lnTo>
+                  <a:lnTo>
+                    <a:pt x="2532401" y="869367"/>
+                  </a:lnTo>
+                  <a:lnTo>
+                    <a:pt x="2602746" y="882401"/>
+                  </a:lnTo>
+                  <a:lnTo>
+                    <a:pt x="2673090" y="894997"/>
+                  </a:lnTo>
+                  <a:lnTo>
+                    <a:pt x="2743435" y="907170"/>
+                  </a:lnTo>
+                  <a:lnTo>
+                    <a:pt x="2813779" y="918933"/>
+                  </a:lnTo>
+                  <a:lnTo>
+                    <a:pt x="2884124" y="930302"/>
+                  </a:lnTo>
+                  <a:lnTo>
+                    <a:pt x="2954468" y="941288"/>
+                  </a:lnTo>
+                  <a:lnTo>
+                    <a:pt x="3024813" y="951905"/>
+                  </a:lnTo>
+                  <a:lnTo>
+                    <a:pt x="3095157" y="958011"/>
+                  </a:lnTo>
+                  <a:lnTo>
+                    <a:pt x="3165502" y="958347"/>
+                  </a:lnTo>
+                  <a:lnTo>
+                    <a:pt x="3235846" y="958684"/>
+                  </a:lnTo>
+                  <a:lnTo>
+                    <a:pt x="3306191" y="959020"/>
+                  </a:lnTo>
+                  <a:lnTo>
+                    <a:pt x="3376535" y="959356"/>
+                  </a:lnTo>
+                  <a:lnTo>
+                    <a:pt x="3446880" y="959691"/>
+                  </a:lnTo>
+                  <a:lnTo>
+                    <a:pt x="3517224" y="960026"/>
+                  </a:lnTo>
+                  <a:lnTo>
+                    <a:pt x="3587569" y="960361"/>
+                  </a:lnTo>
+                  <a:lnTo>
+                    <a:pt x="3657913" y="960695"/>
+                  </a:lnTo>
+                  <a:lnTo>
+                    <a:pt x="3728257" y="961029"/>
+                  </a:lnTo>
+                  <a:lnTo>
+                    <a:pt x="3798602" y="961362"/>
+                  </a:lnTo>
+                  <a:lnTo>
+                    <a:pt x="3868946" y="961695"/>
+                  </a:lnTo>
+                  <a:lnTo>
+                    <a:pt x="3939291" y="962028"/>
+                  </a:lnTo>
+                  <a:lnTo>
+                    <a:pt x="4009635" y="962360"/>
+                  </a:lnTo>
+                  <a:lnTo>
+                    <a:pt x="4079980" y="962692"/>
+                  </a:lnTo>
+                  <a:lnTo>
+                    <a:pt x="4150324" y="963024"/>
+                  </a:lnTo>
+                  <a:lnTo>
+                    <a:pt x="4220669" y="963355"/>
+                  </a:lnTo>
+                  <a:lnTo>
+                    <a:pt x="4291013" y="963686"/>
+                  </a:lnTo>
+                  <a:lnTo>
+                    <a:pt x="4361358" y="964016"/>
+                  </a:lnTo>
+                  <a:lnTo>
+                    <a:pt x="4431702" y="964346"/>
+                  </a:lnTo>
+                  <a:lnTo>
+                    <a:pt x="4502047" y="964676"/>
+                  </a:lnTo>
+                  <a:lnTo>
+                    <a:pt x="4572391" y="965005"/>
+                  </a:lnTo>
+                  <a:lnTo>
+                    <a:pt x="4642736" y="965334"/>
+                  </a:lnTo>
+                  <a:lnTo>
+                    <a:pt x="4713080" y="965663"/>
+                  </a:lnTo>
+                  <a:lnTo>
+                    <a:pt x="4783425" y="965991"/>
+                  </a:lnTo>
+                  <a:lnTo>
+                    <a:pt x="4853769" y="966319"/>
+                  </a:lnTo>
+                  <a:lnTo>
+                    <a:pt x="4924114" y="966646"/>
+                  </a:lnTo>
+                  <a:lnTo>
+                    <a:pt x="4994458" y="966974"/>
+                  </a:lnTo>
+                  <a:lnTo>
+                    <a:pt x="5064803" y="967300"/>
+                  </a:lnTo>
+                  <a:lnTo>
+                    <a:pt x="5135147" y="967627"/>
+                  </a:lnTo>
+                  <a:lnTo>
+                    <a:pt x="5205492" y="967953"/>
+                  </a:lnTo>
+                  <a:lnTo>
+                    <a:pt x="5275836" y="968278"/>
+                  </a:lnTo>
+                  <a:lnTo>
+                    <a:pt x="5346181" y="968604"/>
+                  </a:lnTo>
+                  <a:lnTo>
+                    <a:pt x="5416525" y="968929"/>
+                  </a:lnTo>
+                  <a:lnTo>
+                    <a:pt x="5486870" y="969253"/>
+                  </a:lnTo>
+                  <a:lnTo>
+                    <a:pt x="5557214" y="969577"/>
+                  </a:lnTo>
+                  <a:lnTo>
+                    <a:pt x="5627559" y="969901"/>
+                  </a:lnTo>
+                  <a:lnTo>
+                    <a:pt x="5697903" y="970225"/>
+                  </a:lnTo>
+                  <a:lnTo>
+                    <a:pt x="5768248" y="970548"/>
+                  </a:lnTo>
+                  <a:lnTo>
+                    <a:pt x="5838592" y="970871"/>
+                  </a:lnTo>
+                  <a:lnTo>
+                    <a:pt x="5908937" y="971193"/>
+                  </a:lnTo>
+                  <a:lnTo>
+                    <a:pt x="5979281" y="971515"/>
+                  </a:lnTo>
+                  <a:lnTo>
+                    <a:pt x="6049626" y="971837"/>
+                  </a:lnTo>
+                  <a:lnTo>
+                    <a:pt x="6119970" y="972158"/>
+                  </a:lnTo>
+                  <a:lnTo>
+                    <a:pt x="6190315" y="972479"/>
+                  </a:lnTo>
+                  <a:lnTo>
+                    <a:pt x="6260659" y="972799"/>
+                  </a:lnTo>
+                  <a:lnTo>
+                    <a:pt x="6331004" y="973120"/>
+                  </a:lnTo>
+                  <a:lnTo>
+                    <a:pt x="6401348" y="973439"/>
+                  </a:lnTo>
+                  <a:lnTo>
+                    <a:pt x="6471693" y="973759"/>
+                  </a:lnTo>
+                  <a:lnTo>
+                    <a:pt x="6542037" y="974078"/>
+                  </a:lnTo>
+                  <a:lnTo>
+                    <a:pt x="6612382" y="974397"/>
+                  </a:lnTo>
+                  <a:lnTo>
+                    <a:pt x="6682726" y="974715"/>
+                  </a:lnTo>
+                  <a:lnTo>
+                    <a:pt x="6753071" y="975033"/>
+                  </a:lnTo>
+                  <a:lnTo>
+                    <a:pt x="6823415" y="975351"/>
+                  </a:lnTo>
+                  <a:lnTo>
+                    <a:pt x="6893760" y="975668"/>
+                  </a:lnTo>
+                  <a:lnTo>
+                    <a:pt x="6964104" y="975985"/>
+                  </a:lnTo>
+                  <a:lnTo>
+                    <a:pt x="6964104" y="1212190"/>
+                  </a:lnTo>
+                  <a:lnTo>
+                    <a:pt x="6893760" y="1210625"/>
+                  </a:lnTo>
+                  <a:lnTo>
+                    <a:pt x="6823415" y="1209005"/>
+                  </a:lnTo>
+                  <a:lnTo>
+                    <a:pt x="6753071" y="1207329"/>
+                  </a:lnTo>
+                  <a:lnTo>
+                    <a:pt x="6682726" y="1205595"/>
+                  </a:lnTo>
+                  <a:lnTo>
+                    <a:pt x="6612382" y="1203800"/>
+                  </a:lnTo>
+                  <a:lnTo>
+                    <a:pt x="6542037" y="1201943"/>
+                  </a:lnTo>
+                  <a:lnTo>
+                    <a:pt x="6471693" y="1200021"/>
+                  </a:lnTo>
+                  <a:lnTo>
+                    <a:pt x="6401348" y="1198033"/>
+                  </a:lnTo>
+                  <a:lnTo>
+                    <a:pt x="6331004" y="1195975"/>
+                  </a:lnTo>
+                  <a:lnTo>
+                    <a:pt x="6260659" y="1193846"/>
+                  </a:lnTo>
+                  <a:lnTo>
+                    <a:pt x="6190315" y="1191642"/>
+                  </a:lnTo>
+                  <a:lnTo>
+                    <a:pt x="6119970" y="1189362"/>
+                  </a:lnTo>
+                  <a:lnTo>
+                    <a:pt x="6049626" y="1187003"/>
+                  </a:lnTo>
+                  <a:lnTo>
+                    <a:pt x="5979281" y="1184562"/>
+                  </a:lnTo>
+                  <a:lnTo>
+                    <a:pt x="5908937" y="1182036"/>
+                  </a:lnTo>
+                  <a:lnTo>
+                    <a:pt x="5838592" y="1179422"/>
+                  </a:lnTo>
+                  <a:lnTo>
+                    <a:pt x="5768248" y="1176717"/>
+                  </a:lnTo>
+                  <a:lnTo>
+                    <a:pt x="5697903" y="1173918"/>
+                  </a:lnTo>
+                  <a:lnTo>
+                    <a:pt x="5627559" y="1171022"/>
+                  </a:lnTo>
+                  <a:lnTo>
+                    <a:pt x="5557214" y="1168025"/>
+                  </a:lnTo>
+                  <a:lnTo>
+                    <a:pt x="5486870" y="1164924"/>
+                  </a:lnTo>
+                  <a:lnTo>
+                    <a:pt x="5416525" y="1161715"/>
+                  </a:lnTo>
+                  <a:lnTo>
+                    <a:pt x="5346181" y="1158394"/>
+                  </a:lnTo>
+                  <a:lnTo>
+                    <a:pt x="5275836" y="1154958"/>
+                  </a:lnTo>
+                  <a:lnTo>
+                    <a:pt x="5205492" y="1151402"/>
+                  </a:lnTo>
+                  <a:lnTo>
+                    <a:pt x="5135147" y="1147723"/>
+                  </a:lnTo>
+                  <a:lnTo>
+                    <a:pt x="5064803" y="1143915"/>
+                  </a:lnTo>
+                  <a:lnTo>
+                    <a:pt x="4994458" y="1139976"/>
+                  </a:lnTo>
+                  <a:lnTo>
+                    <a:pt x="4924114" y="1135899"/>
+                  </a:lnTo>
+                  <a:lnTo>
+                    <a:pt x="4853769" y="1131681"/>
+                  </a:lnTo>
+                  <a:lnTo>
+                    <a:pt x="4783425" y="1127316"/>
+                  </a:lnTo>
+                  <a:lnTo>
+                    <a:pt x="4713080" y="1122799"/>
+                  </a:lnTo>
+                  <a:lnTo>
+                    <a:pt x="4642736" y="1118125"/>
+                  </a:lnTo>
+                  <a:lnTo>
+                    <a:pt x="4572391" y="1113288"/>
+                  </a:lnTo>
+                  <a:lnTo>
+                    <a:pt x="4502047" y="1108283"/>
+                  </a:lnTo>
+                  <a:lnTo>
+                    <a:pt x="4431702" y="1103105"/>
+                  </a:lnTo>
+                  <a:lnTo>
+                    <a:pt x="4361358" y="1097746"/>
+                  </a:lnTo>
+                  <a:lnTo>
+                    <a:pt x="4291013" y="1092200"/>
+                  </a:lnTo>
+                  <a:lnTo>
+                    <a:pt x="4220669" y="1086462"/>
+                  </a:lnTo>
+                  <a:lnTo>
+                    <a:pt x="4150324" y="1080525"/>
+                  </a:lnTo>
+                  <a:lnTo>
+                    <a:pt x="4079980" y="1074381"/>
+                  </a:lnTo>
+                  <a:lnTo>
+                    <a:pt x="4009635" y="1068023"/>
+                  </a:lnTo>
+                  <a:lnTo>
+                    <a:pt x="3939291" y="1061444"/>
+                  </a:lnTo>
+                  <a:lnTo>
+                    <a:pt x="3868946" y="1054636"/>
+                  </a:lnTo>
+                  <a:lnTo>
+                    <a:pt x="3798602" y="1047592"/>
+                  </a:lnTo>
+                  <a:lnTo>
+                    <a:pt x="3728257" y="1040302"/>
+                  </a:lnTo>
+                  <a:lnTo>
+                    <a:pt x="3657913" y="1032759"/>
+                  </a:lnTo>
+                  <a:lnTo>
+                    <a:pt x="3587569" y="1024954"/>
+                  </a:lnTo>
+                  <a:lnTo>
+                    <a:pt x="3517224" y="1016878"/>
+                  </a:lnTo>
+                  <a:lnTo>
+                    <a:pt x="3446880" y="1008520"/>
+                  </a:lnTo>
+                  <a:lnTo>
+                    <a:pt x="3376535" y="999872"/>
+                  </a:lnTo>
+                  <a:lnTo>
+                    <a:pt x="3306191" y="990923"/>
+                  </a:lnTo>
+                  <a:lnTo>
+                    <a:pt x="3235846" y="981663"/>
+                  </a:lnTo>
+                  <a:lnTo>
+                    <a:pt x="3165502" y="972081"/>
+                  </a:lnTo>
+                  <a:lnTo>
+                    <a:pt x="3095157" y="962165"/>
+                  </a:lnTo>
+                  <a:lnTo>
+                    <a:pt x="3024813" y="957673"/>
+                  </a:lnTo>
+                  <a:lnTo>
+                    <a:pt x="2954468" y="957336"/>
+                  </a:lnTo>
+                  <a:lnTo>
+                    <a:pt x="2884124" y="956998"/>
+                  </a:lnTo>
+                  <a:lnTo>
+                    <a:pt x="2813779" y="956659"/>
+                  </a:lnTo>
+                  <a:lnTo>
+                    <a:pt x="2743435" y="956321"/>
+                  </a:lnTo>
+                  <a:lnTo>
+                    <a:pt x="2673090" y="955981"/>
+                  </a:lnTo>
+                  <a:lnTo>
+                    <a:pt x="2602746" y="955642"/>
+                  </a:lnTo>
+                  <a:lnTo>
+                    <a:pt x="2532401" y="955302"/>
+                  </a:lnTo>
+                  <a:lnTo>
+                    <a:pt x="2462057" y="954962"/>
+                  </a:lnTo>
+                  <a:lnTo>
+                    <a:pt x="2391712" y="954621"/>
+                  </a:lnTo>
+                  <a:lnTo>
+                    <a:pt x="2321368" y="954280"/>
+                  </a:lnTo>
+                  <a:lnTo>
+                    <a:pt x="2251023" y="953939"/>
+                  </a:lnTo>
+                  <a:lnTo>
+                    <a:pt x="2180679" y="953597"/>
+                  </a:lnTo>
+                  <a:lnTo>
+                    <a:pt x="2110334" y="953255"/>
+                  </a:lnTo>
+                  <a:lnTo>
+                    <a:pt x="2039990" y="952912"/>
+                  </a:lnTo>
+                  <a:lnTo>
+                    <a:pt x="1969645" y="952569"/>
+                  </a:lnTo>
+                  <a:lnTo>
+                    <a:pt x="1899301" y="952226"/>
+                  </a:lnTo>
+                  <a:lnTo>
+                    <a:pt x="1828956" y="951882"/>
+                  </a:lnTo>
+                  <a:lnTo>
+                    <a:pt x="1758612" y="951538"/>
+                  </a:lnTo>
+                  <a:lnTo>
+                    <a:pt x="1688267" y="951193"/>
+                  </a:lnTo>
+                  <a:lnTo>
+                    <a:pt x="1617923" y="950848"/>
+                  </a:lnTo>
+                  <a:lnTo>
+                    <a:pt x="1547578" y="950503"/>
+                  </a:lnTo>
+                  <a:lnTo>
+                    <a:pt x="1477234" y="950157"/>
+                  </a:lnTo>
+                  <a:lnTo>
+                    <a:pt x="1406889" y="949811"/>
+                  </a:lnTo>
+                  <a:lnTo>
+                    <a:pt x="1336545" y="949465"/>
+                  </a:lnTo>
+                  <a:lnTo>
+                    <a:pt x="1266200" y="949118"/>
+                  </a:lnTo>
+                  <a:lnTo>
+                    <a:pt x="1195856" y="948771"/>
+                  </a:lnTo>
+                  <a:lnTo>
+                    <a:pt x="1125511" y="948423"/>
+                  </a:lnTo>
+                  <a:lnTo>
+                    <a:pt x="1055167" y="948075"/>
+                  </a:lnTo>
+                  <a:lnTo>
+                    <a:pt x="984822" y="947727"/>
+                  </a:lnTo>
+                  <a:lnTo>
+                    <a:pt x="914478" y="947378"/>
+                  </a:lnTo>
+                  <a:lnTo>
+                    <a:pt x="844133" y="947028"/>
+                  </a:lnTo>
+                  <a:lnTo>
+                    <a:pt x="773789" y="946679"/>
+                  </a:lnTo>
+                  <a:lnTo>
+                    <a:pt x="703444" y="946329"/>
+                  </a:lnTo>
+                  <a:lnTo>
+                    <a:pt x="633100" y="945978"/>
+                  </a:lnTo>
+                  <a:lnTo>
+                    <a:pt x="562755" y="945628"/>
+                  </a:lnTo>
+                  <a:lnTo>
+                    <a:pt x="492411" y="945277"/>
+                  </a:lnTo>
+                  <a:lnTo>
+                    <a:pt x="422066" y="944925"/>
+                  </a:lnTo>
+                  <a:lnTo>
+                    <a:pt x="351722" y="944573"/>
+                  </a:lnTo>
+                  <a:lnTo>
+                    <a:pt x="281377" y="944221"/>
+                  </a:lnTo>
+                  <a:lnTo>
+                    <a:pt x="211033" y="943868"/>
+                  </a:lnTo>
+                  <a:lnTo>
+                    <a:pt x="140688" y="943515"/>
+                  </a:lnTo>
+                  <a:lnTo>
+                    <a:pt x="70344" y="943161"/>
+                  </a:lnTo>
+                  <a:lnTo>
+                    <a:pt x="0" y="942807"/>
                   </a:lnTo>
                   <a:close/>
                 </a:path>
@@ -3667,640 +3702,315 @@
         </p:sp>
         <p:sp>
           <p:nvSpPr>
-            <p:cNvPr id="23" name="pl23"/>
-            <p:cNvSpPr/>
-            <p:nvPr/>
-          </p:nvSpPr>
-          <p:spPr>
-            <a:xfrm>
-              <a:off x="1286731" y="2073503"/>
-              <a:ext cx="6975948" cy="2704486"/>
-            </a:xfrm>
-            <a:custGeom>
-              <a:avLst/>
-              <a:pathLst>
-                <a:path w="6975948" h="2704486">
-                  <a:moveTo>
-                    <a:pt x="0" y="0"/>
-                  </a:moveTo>
-                  <a:lnTo>
-                    <a:pt x="28563" y="47654"/>
-                  </a:lnTo>
-                  <a:lnTo>
-                    <a:pt x="100185" y="163132"/>
-                  </a:lnTo>
-                  <a:lnTo>
-                    <a:pt x="171808" y="274729"/>
-                  </a:lnTo>
-                  <a:lnTo>
-                    <a:pt x="243430" y="382575"/>
-                  </a:lnTo>
-                  <a:lnTo>
-                    <a:pt x="315053" y="486797"/>
-                  </a:lnTo>
-                  <a:lnTo>
-                    <a:pt x="386675" y="587517"/>
-                  </a:lnTo>
-                  <a:lnTo>
-                    <a:pt x="458298" y="684851"/>
-                  </a:lnTo>
-                  <a:lnTo>
-                    <a:pt x="529921" y="778915"/>
-                  </a:lnTo>
-                  <a:lnTo>
-                    <a:pt x="601543" y="869817"/>
-                  </a:lnTo>
-                  <a:lnTo>
-                    <a:pt x="673166" y="957664"/>
-                  </a:lnTo>
-                  <a:lnTo>
-                    <a:pt x="744788" y="1042559"/>
-                  </a:lnTo>
-                  <a:lnTo>
-                    <a:pt x="816411" y="1124601"/>
-                  </a:lnTo>
-                  <a:lnTo>
-                    <a:pt x="888033" y="1203885"/>
-                  </a:lnTo>
-                  <a:lnTo>
-                    <a:pt x="959656" y="1280505"/>
-                  </a:lnTo>
-                  <a:lnTo>
-                    <a:pt x="1031278" y="1354550"/>
-                  </a:lnTo>
-                  <a:lnTo>
-                    <a:pt x="1102901" y="1426107"/>
-                  </a:lnTo>
-                  <a:lnTo>
-                    <a:pt x="1174523" y="1495259"/>
-                  </a:lnTo>
-                  <a:lnTo>
-                    <a:pt x="1246146" y="1562086"/>
-                  </a:lnTo>
-                  <a:lnTo>
-                    <a:pt x="1317768" y="1626668"/>
-                  </a:lnTo>
-                  <a:lnTo>
-                    <a:pt x="1389391" y="1689080"/>
-                  </a:lnTo>
-                  <a:lnTo>
-                    <a:pt x="1461013" y="1749394"/>
-                  </a:lnTo>
-                  <a:lnTo>
-                    <a:pt x="1532636" y="1807681"/>
-                  </a:lnTo>
-                  <a:lnTo>
-                    <a:pt x="1604258" y="1864009"/>
-                  </a:lnTo>
-                  <a:lnTo>
-                    <a:pt x="1675881" y="1918444"/>
-                  </a:lnTo>
-                  <a:lnTo>
-                    <a:pt x="1747503" y="1971049"/>
-                  </a:lnTo>
-                  <a:lnTo>
-                    <a:pt x="1819126" y="2021887"/>
-                  </a:lnTo>
-                  <a:lnTo>
-                    <a:pt x="1890749" y="2071016"/>
-                  </a:lnTo>
-                  <a:lnTo>
-                    <a:pt x="1962371" y="2118494"/>
-                  </a:lnTo>
-                  <a:lnTo>
-                    <a:pt x="2033994" y="2164377"/>
-                  </a:lnTo>
-                  <a:lnTo>
-                    <a:pt x="2105616" y="2208717"/>
-                  </a:lnTo>
-                  <a:lnTo>
-                    <a:pt x="2177239" y="2251568"/>
-                  </a:lnTo>
-                  <a:lnTo>
-                    <a:pt x="2248861" y="2292978"/>
-                  </a:lnTo>
-                  <a:lnTo>
-                    <a:pt x="2320484" y="2332996"/>
-                  </a:lnTo>
-                  <a:lnTo>
-                    <a:pt x="2392106" y="2371670"/>
-                  </a:lnTo>
-                  <a:lnTo>
-                    <a:pt x="2463729" y="2409044"/>
-                  </a:lnTo>
-                  <a:lnTo>
-                    <a:pt x="2535351" y="2445162"/>
-                  </a:lnTo>
-                  <a:lnTo>
-                    <a:pt x="2606974" y="2480066"/>
-                  </a:lnTo>
-                  <a:lnTo>
-                    <a:pt x="2678596" y="2513797"/>
-                  </a:lnTo>
-                  <a:lnTo>
-                    <a:pt x="2750219" y="2546394"/>
-                  </a:lnTo>
-                  <a:lnTo>
-                    <a:pt x="2821841" y="2577896"/>
-                  </a:lnTo>
-                  <a:lnTo>
-                    <a:pt x="2893464" y="2608339"/>
-                  </a:lnTo>
-                  <a:lnTo>
-                    <a:pt x="2965086" y="2637760"/>
-                  </a:lnTo>
-                  <a:lnTo>
-                    <a:pt x="3036709" y="2654678"/>
-                  </a:lnTo>
-                  <a:lnTo>
-                    <a:pt x="3108331" y="2655611"/>
-                  </a:lnTo>
-                  <a:lnTo>
-                    <a:pt x="3179954" y="2656544"/>
-                  </a:lnTo>
-                  <a:lnTo>
-                    <a:pt x="3251577" y="2657475"/>
-                  </a:lnTo>
-                  <a:lnTo>
-                    <a:pt x="3323199" y="2658405"/>
-                  </a:lnTo>
-                  <a:lnTo>
-                    <a:pt x="3394822" y="2659335"/>
-                  </a:lnTo>
-                  <a:lnTo>
-                    <a:pt x="3466444" y="2660263"/>
-                  </a:lnTo>
-                  <a:lnTo>
-                    <a:pt x="3538067" y="2661190"/>
-                  </a:lnTo>
-                  <a:lnTo>
-                    <a:pt x="3609689" y="2662116"/>
-                  </a:lnTo>
-                  <a:lnTo>
-                    <a:pt x="3681312" y="2663041"/>
-                  </a:lnTo>
-                  <a:lnTo>
-                    <a:pt x="3752934" y="2663965"/>
-                  </a:lnTo>
-                  <a:lnTo>
-                    <a:pt x="3824557" y="2664888"/>
-                  </a:lnTo>
-                  <a:lnTo>
-                    <a:pt x="3896179" y="2665810"/>
-                  </a:lnTo>
-                  <a:lnTo>
-                    <a:pt x="3967802" y="2666731"/>
-                  </a:lnTo>
-                  <a:lnTo>
-                    <a:pt x="4039424" y="2667651"/>
-                  </a:lnTo>
-                  <a:lnTo>
-                    <a:pt x="4111047" y="2668570"/>
-                  </a:lnTo>
-                  <a:lnTo>
-                    <a:pt x="4182669" y="2669487"/>
-                  </a:lnTo>
-                  <a:lnTo>
-                    <a:pt x="4254292" y="2670404"/>
-                  </a:lnTo>
-                  <a:lnTo>
-                    <a:pt x="4325914" y="2671320"/>
-                  </a:lnTo>
-                  <a:lnTo>
-                    <a:pt x="4397537" y="2672234"/>
-                  </a:lnTo>
-                  <a:lnTo>
-                    <a:pt x="4469159" y="2673148"/>
-                  </a:lnTo>
-                  <a:lnTo>
-                    <a:pt x="4540782" y="2674061"/>
-                  </a:lnTo>
-                  <a:lnTo>
-                    <a:pt x="4612405" y="2674972"/>
-                  </a:lnTo>
-                  <a:lnTo>
-                    <a:pt x="4684027" y="2675883"/>
-                  </a:lnTo>
-                  <a:lnTo>
-                    <a:pt x="4755650" y="2676792"/>
-                  </a:lnTo>
-                  <a:lnTo>
-                    <a:pt x="4827272" y="2677701"/>
-                  </a:lnTo>
-                  <a:lnTo>
-                    <a:pt x="4898895" y="2678608"/>
-                  </a:lnTo>
-                  <a:lnTo>
-                    <a:pt x="4970517" y="2679515"/>
-                  </a:lnTo>
-                  <a:lnTo>
-                    <a:pt x="5042140" y="2680420"/>
-                  </a:lnTo>
-                  <a:lnTo>
-                    <a:pt x="5113762" y="2681325"/>
-                  </a:lnTo>
-                  <a:lnTo>
-                    <a:pt x="5185385" y="2682228"/>
-                  </a:lnTo>
-                  <a:lnTo>
-                    <a:pt x="5257007" y="2683131"/>
-                  </a:lnTo>
-                  <a:lnTo>
-                    <a:pt x="5328630" y="2684032"/>
-                  </a:lnTo>
-                  <a:lnTo>
-                    <a:pt x="5400252" y="2684932"/>
-                  </a:lnTo>
-                  <a:lnTo>
-                    <a:pt x="5471875" y="2685832"/>
-                  </a:lnTo>
-                  <a:lnTo>
-                    <a:pt x="5543497" y="2686730"/>
-                  </a:lnTo>
-                  <a:lnTo>
-                    <a:pt x="5615120" y="2687628"/>
-                  </a:lnTo>
-                  <a:lnTo>
-                    <a:pt x="5686742" y="2688524"/>
-                  </a:lnTo>
-                  <a:lnTo>
-                    <a:pt x="5758365" y="2689419"/>
-                  </a:lnTo>
-                  <a:lnTo>
-                    <a:pt x="5829987" y="2690313"/>
-                  </a:lnTo>
-                  <a:lnTo>
-                    <a:pt x="5901610" y="2691207"/>
-                  </a:lnTo>
-                  <a:lnTo>
-                    <a:pt x="5973233" y="2692099"/>
-                  </a:lnTo>
-                  <a:lnTo>
-                    <a:pt x="6044855" y="2692990"/>
-                  </a:lnTo>
-                  <a:lnTo>
-                    <a:pt x="6116478" y="2693881"/>
-                  </a:lnTo>
-                  <a:lnTo>
-                    <a:pt x="6188100" y="2694770"/>
-                  </a:lnTo>
-                  <a:lnTo>
-                    <a:pt x="6259723" y="2695658"/>
-                  </a:lnTo>
-                  <a:lnTo>
-                    <a:pt x="6331345" y="2696545"/>
-                  </a:lnTo>
-                  <a:lnTo>
-                    <a:pt x="6402968" y="2697432"/>
-                  </a:lnTo>
-                  <a:lnTo>
-                    <a:pt x="6474590" y="2698317"/>
-                  </a:lnTo>
-                  <a:lnTo>
-                    <a:pt x="6546213" y="2699201"/>
-                  </a:lnTo>
-                  <a:lnTo>
-                    <a:pt x="6617835" y="2700085"/>
-                  </a:lnTo>
-                  <a:lnTo>
-                    <a:pt x="6689458" y="2700967"/>
-                  </a:lnTo>
-                  <a:lnTo>
-                    <a:pt x="6761080" y="2701848"/>
-                  </a:lnTo>
-                  <a:lnTo>
-                    <a:pt x="6832703" y="2702729"/>
-                  </a:lnTo>
-                  <a:lnTo>
-                    <a:pt x="6904325" y="2703608"/>
-                  </a:lnTo>
-                  <a:lnTo>
-                    <a:pt x="6975948" y="2704486"/>
-                  </a:lnTo>
-                </a:path>
-              </a:pathLst>
-            </a:custGeom>
-          </p:spPr>
-          <p:txBody>
-            <a:bodyPr/>
-            <a:lstStyle/>
-            <a:p/>
-          </p:txBody>
-        </p:sp>
-        <p:sp>
-          <p:nvSpPr>
             <p:cNvPr id="24" name="pl24"/>
             <p:cNvSpPr/>
             <p:nvPr/>
           </p:nvSpPr>
           <p:spPr>
             <a:xfrm>
-              <a:off x="1172049" y="4686052"/>
-              <a:ext cx="7090630" cy="746468"/>
+              <a:off x="1347947" y="2143092"/>
+              <a:ext cx="6851469" cy="975985"/>
             </a:xfrm>
             <a:custGeom>
               <a:avLst/>
               <a:pathLst>
-                <a:path w="7090630" h="746468">
+                <a:path w="6851469" h="975985">
                   <a:moveTo>
-                    <a:pt x="7090630" y="746468"/>
+                    <a:pt x="0" y="0"/>
                   </a:moveTo>
                   <a:lnTo>
-                    <a:pt x="7019007" y="742131"/>
-                  </a:lnTo>
-                  <a:lnTo>
-                    <a:pt x="6947385" y="737642"/>
-                  </a:lnTo>
-                  <a:lnTo>
-                    <a:pt x="6875762" y="732998"/>
-                  </a:lnTo>
-                  <a:lnTo>
-                    <a:pt x="6804139" y="728192"/>
-                  </a:lnTo>
-                  <a:lnTo>
-                    <a:pt x="6732517" y="723219"/>
-                  </a:lnTo>
-                  <a:lnTo>
-                    <a:pt x="6660894" y="718072"/>
-                  </a:lnTo>
-                  <a:lnTo>
-                    <a:pt x="6589272" y="712747"/>
-                  </a:lnTo>
-                  <a:lnTo>
-                    <a:pt x="6517649" y="707237"/>
-                  </a:lnTo>
-                  <a:lnTo>
-                    <a:pt x="6446027" y="701535"/>
-                  </a:lnTo>
-                  <a:lnTo>
-                    <a:pt x="6374404" y="695635"/>
-                  </a:lnTo>
-                  <a:lnTo>
-                    <a:pt x="6302782" y="689530"/>
-                  </a:lnTo>
-                  <a:lnTo>
-                    <a:pt x="6231159" y="683212"/>
-                  </a:lnTo>
-                  <a:lnTo>
-                    <a:pt x="6159537" y="676675"/>
-                  </a:lnTo>
-                  <a:lnTo>
-                    <a:pt x="6087914" y="669910"/>
-                  </a:lnTo>
-                  <a:lnTo>
-                    <a:pt x="6016292" y="662910"/>
-                  </a:lnTo>
-                  <a:lnTo>
-                    <a:pt x="5944669" y="655667"/>
-                  </a:lnTo>
-                  <a:lnTo>
-                    <a:pt x="5873047" y="648171"/>
-                  </a:lnTo>
-                  <a:lnTo>
-                    <a:pt x="5801424" y="640415"/>
-                  </a:lnTo>
-                  <a:lnTo>
-                    <a:pt x="5729802" y="632390"/>
-                  </a:lnTo>
-                  <a:lnTo>
-                    <a:pt x="5658179" y="624085"/>
-                  </a:lnTo>
-                  <a:lnTo>
-                    <a:pt x="5586557" y="615491"/>
-                  </a:lnTo>
-                  <a:lnTo>
-                    <a:pt x="5514934" y="606599"/>
-                  </a:lnTo>
-                  <a:lnTo>
-                    <a:pt x="5443311" y="597397"/>
-                  </a:lnTo>
-                  <a:lnTo>
-                    <a:pt x="5371689" y="587875"/>
-                  </a:lnTo>
-                  <a:lnTo>
-                    <a:pt x="5300066" y="578023"/>
-                  </a:lnTo>
-                  <a:lnTo>
-                    <a:pt x="5228444" y="567827"/>
-                  </a:lnTo>
-                  <a:lnTo>
-                    <a:pt x="5156821" y="557277"/>
-                  </a:lnTo>
-                  <a:lnTo>
-                    <a:pt x="5085199" y="546360"/>
-                  </a:lnTo>
-                  <a:lnTo>
-                    <a:pt x="5013576" y="535064"/>
-                  </a:lnTo>
-                  <a:lnTo>
-                    <a:pt x="4941954" y="523374"/>
-                  </a:lnTo>
-                  <a:lnTo>
-                    <a:pt x="4870331" y="511278"/>
-                  </a:lnTo>
-                  <a:lnTo>
-                    <a:pt x="4798709" y="498762"/>
-                  </a:lnTo>
-                  <a:lnTo>
-                    <a:pt x="4727086" y="485810"/>
-                  </a:lnTo>
-                  <a:lnTo>
-                    <a:pt x="4655464" y="472408"/>
-                  </a:lnTo>
-                  <a:lnTo>
-                    <a:pt x="4583841" y="458539"/>
-                  </a:lnTo>
-                  <a:lnTo>
-                    <a:pt x="4512219" y="444189"/>
-                  </a:lnTo>
-                  <a:lnTo>
-                    <a:pt x="4440596" y="429339"/>
-                  </a:lnTo>
-                  <a:lnTo>
-                    <a:pt x="4368974" y="413973"/>
-                  </a:lnTo>
-                  <a:lnTo>
-                    <a:pt x="4297351" y="398073"/>
-                  </a:lnTo>
-                  <a:lnTo>
-                    <a:pt x="4225729" y="381619"/>
-                  </a:lnTo>
-                  <a:lnTo>
-                    <a:pt x="4154106" y="364594"/>
-                  </a:lnTo>
-                  <a:lnTo>
-                    <a:pt x="4082483" y="346976"/>
-                  </a:lnTo>
-                  <a:lnTo>
-                    <a:pt x="4010861" y="328746"/>
-                  </a:lnTo>
-                  <a:lnTo>
-                    <a:pt x="3939238" y="309881"/>
-                  </a:lnTo>
-                  <a:lnTo>
-                    <a:pt x="3867616" y="290361"/>
-                  </a:lnTo>
-                  <a:lnTo>
-                    <a:pt x="3795993" y="270162"/>
-                  </a:lnTo>
-                  <a:lnTo>
-                    <a:pt x="3724371" y="249260"/>
-                  </a:lnTo>
-                  <a:lnTo>
-                    <a:pt x="3652748" y="227632"/>
-                  </a:lnTo>
-                  <a:lnTo>
-                    <a:pt x="3581126" y="205251"/>
-                  </a:lnTo>
-                  <a:lnTo>
-                    <a:pt x="3509503" y="182092"/>
-                  </a:lnTo>
-                  <a:lnTo>
-                    <a:pt x="3437881" y="158128"/>
-                  </a:lnTo>
-                  <a:lnTo>
-                    <a:pt x="3366258" y="133330"/>
-                  </a:lnTo>
-                  <a:lnTo>
-                    <a:pt x="3294636" y="107670"/>
-                  </a:lnTo>
-                  <a:lnTo>
-                    <a:pt x="3223013" y="81117"/>
-                  </a:lnTo>
-                  <a:lnTo>
-                    <a:pt x="3151391" y="53642"/>
-                  </a:lnTo>
-                  <a:lnTo>
-                    <a:pt x="3079768" y="41194"/>
-                  </a:lnTo>
-                  <a:lnTo>
-                    <a:pt x="3008146" y="40259"/>
-                  </a:lnTo>
-                  <a:lnTo>
-                    <a:pt x="2936523" y="39322"/>
-                  </a:lnTo>
-                  <a:lnTo>
-                    <a:pt x="2864901" y="38384"/>
-                  </a:lnTo>
-                  <a:lnTo>
-                    <a:pt x="2793278" y="37446"/>
-                  </a:lnTo>
-                  <a:lnTo>
-                    <a:pt x="2721655" y="36506"/>
-                  </a:lnTo>
-                  <a:lnTo>
-                    <a:pt x="2650033" y="35565"/>
-                  </a:lnTo>
-                  <a:lnTo>
-                    <a:pt x="2578410" y="34623"/>
-                  </a:lnTo>
-                  <a:lnTo>
-                    <a:pt x="2506788" y="33680"/>
-                  </a:lnTo>
-                  <a:lnTo>
-                    <a:pt x="2435165" y="32736"/>
-                  </a:lnTo>
-                  <a:lnTo>
-                    <a:pt x="2363543" y="31791"/>
-                  </a:lnTo>
-                  <a:lnTo>
-                    <a:pt x="2291920" y="30845"/>
-                  </a:lnTo>
-                  <a:lnTo>
-                    <a:pt x="2220298" y="29898"/>
-                  </a:lnTo>
-                  <a:lnTo>
-                    <a:pt x="2148675" y="28950"/>
-                  </a:lnTo>
-                  <a:lnTo>
-                    <a:pt x="2077053" y="28000"/>
-                  </a:lnTo>
-                  <a:lnTo>
-                    <a:pt x="2005430" y="27050"/>
-                  </a:lnTo>
-                  <a:lnTo>
-                    <a:pt x="1933808" y="26099"/>
-                  </a:lnTo>
-                  <a:lnTo>
-                    <a:pt x="1862185" y="25146"/>
-                  </a:lnTo>
-                  <a:lnTo>
-                    <a:pt x="1790563" y="24192"/>
-                  </a:lnTo>
-                  <a:lnTo>
-                    <a:pt x="1718940" y="23238"/>
-                  </a:lnTo>
-                  <a:lnTo>
-                    <a:pt x="1647318" y="22282"/>
-                  </a:lnTo>
-                  <a:lnTo>
-                    <a:pt x="1575695" y="21325"/>
-                  </a:lnTo>
-                  <a:lnTo>
-                    <a:pt x="1504073" y="20367"/>
-                  </a:lnTo>
-                  <a:lnTo>
-                    <a:pt x="1432450" y="19408"/>
-                  </a:lnTo>
-                  <a:lnTo>
-                    <a:pt x="1360827" y="18448"/>
-                  </a:lnTo>
-                  <a:lnTo>
-                    <a:pt x="1289205" y="17487"/>
-                  </a:lnTo>
-                  <a:lnTo>
-                    <a:pt x="1217582" y="16525"/>
-                  </a:lnTo>
-                  <a:lnTo>
-                    <a:pt x="1145960" y="15561"/>
-                  </a:lnTo>
-                  <a:lnTo>
-                    <a:pt x="1074337" y="14597"/>
-                  </a:lnTo>
-                  <a:lnTo>
-                    <a:pt x="1002715" y="13631"/>
-                  </a:lnTo>
-                  <a:lnTo>
-                    <a:pt x="931092" y="12665"/>
-                  </a:lnTo>
-                  <a:lnTo>
-                    <a:pt x="859470" y="11697"/>
-                  </a:lnTo>
-                  <a:lnTo>
-                    <a:pt x="787847" y="10728"/>
-                  </a:lnTo>
-                  <a:lnTo>
-                    <a:pt x="716225" y="9758"/>
-                  </a:lnTo>
-                  <a:lnTo>
-                    <a:pt x="644602" y="8788"/>
-                  </a:lnTo>
-                  <a:lnTo>
-                    <a:pt x="572980" y="7815"/>
-                  </a:lnTo>
-                  <a:lnTo>
-                    <a:pt x="501357" y="6842"/>
-                  </a:lnTo>
-                  <a:lnTo>
-                    <a:pt x="429735" y="5868"/>
-                  </a:lnTo>
-                  <a:lnTo>
-                    <a:pt x="358112" y="4893"/>
-                  </a:lnTo>
-                  <a:lnTo>
-                    <a:pt x="286490" y="3916"/>
-                  </a:lnTo>
-                  <a:lnTo>
-                    <a:pt x="214867" y="2939"/>
-                  </a:lnTo>
-                  <a:lnTo>
-                    <a:pt x="143245" y="1960"/>
-                  </a:lnTo>
-                  <a:lnTo>
-                    <a:pt x="71622" y="980"/>
-                  </a:lnTo>
-                  <a:lnTo>
-                    <a:pt x="0" y="0"/>
+                    <a:pt x="28053" y="17197"/>
+                  </a:lnTo>
+                  <a:lnTo>
+                    <a:pt x="98398" y="58870"/>
+                  </a:lnTo>
+                  <a:lnTo>
+                    <a:pt x="168742" y="99143"/>
+                  </a:lnTo>
+                  <a:lnTo>
+                    <a:pt x="239087" y="138062"/>
+                  </a:lnTo>
+                  <a:lnTo>
+                    <a:pt x="309431" y="175673"/>
+                  </a:lnTo>
+                  <a:lnTo>
+                    <a:pt x="379776" y="212021"/>
+                  </a:lnTo>
+                  <a:lnTo>
+                    <a:pt x="450120" y="247146"/>
+                  </a:lnTo>
+                  <a:lnTo>
+                    <a:pt x="520465" y="281092"/>
+                  </a:lnTo>
+                  <a:lnTo>
+                    <a:pt x="590809" y="313896"/>
+                  </a:lnTo>
+                  <a:lnTo>
+                    <a:pt x="661154" y="345598"/>
+                  </a:lnTo>
+                  <a:lnTo>
+                    <a:pt x="731498" y="376235"/>
+                  </a:lnTo>
+                  <a:lnTo>
+                    <a:pt x="801843" y="405842"/>
+                  </a:lnTo>
+                  <a:lnTo>
+                    <a:pt x="872187" y="434454"/>
+                  </a:lnTo>
+                  <a:lnTo>
+                    <a:pt x="942532" y="462104"/>
+                  </a:lnTo>
+                  <a:lnTo>
+                    <a:pt x="1012876" y="488825"/>
+                  </a:lnTo>
+                  <a:lnTo>
+                    <a:pt x="1083221" y="514648"/>
+                  </a:lnTo>
+                  <a:lnTo>
+                    <a:pt x="1153565" y="539603"/>
+                  </a:lnTo>
+                  <a:lnTo>
+                    <a:pt x="1223909" y="563720"/>
+                  </a:lnTo>
+                  <a:lnTo>
+                    <a:pt x="1294254" y="587026"/>
+                  </a:lnTo>
+                  <a:lnTo>
+                    <a:pt x="1364598" y="609549"/>
+                  </a:lnTo>
+                  <a:lnTo>
+                    <a:pt x="1434943" y="631315"/>
+                  </a:lnTo>
+                  <a:lnTo>
+                    <a:pt x="1505287" y="652349"/>
+                  </a:lnTo>
+                  <a:lnTo>
+                    <a:pt x="1575632" y="672677"/>
+                  </a:lnTo>
+                  <a:lnTo>
+                    <a:pt x="1645976" y="692321"/>
+                  </a:lnTo>
+                  <a:lnTo>
+                    <a:pt x="1716321" y="711305"/>
+                  </a:lnTo>
+                  <a:lnTo>
+                    <a:pt x="1786665" y="729651"/>
+                  </a:lnTo>
+                  <a:lnTo>
+                    <a:pt x="1857010" y="747381"/>
+                  </a:lnTo>
+                  <a:lnTo>
+                    <a:pt x="1927354" y="764514"/>
+                  </a:lnTo>
+                  <a:lnTo>
+                    <a:pt x="1997699" y="781072"/>
+                  </a:lnTo>
+                  <a:lnTo>
+                    <a:pt x="2068043" y="797074"/>
+                  </a:lnTo>
+                  <a:lnTo>
+                    <a:pt x="2138388" y="812537"/>
+                  </a:lnTo>
+                  <a:lnTo>
+                    <a:pt x="2208732" y="827481"/>
+                  </a:lnTo>
+                  <a:lnTo>
+                    <a:pt x="2279077" y="841923"/>
+                  </a:lnTo>
+                  <a:lnTo>
+                    <a:pt x="2349421" y="855880"/>
+                  </a:lnTo>
+                  <a:lnTo>
+                    <a:pt x="2419766" y="869367"/>
+                  </a:lnTo>
+                  <a:lnTo>
+                    <a:pt x="2490110" y="882401"/>
+                  </a:lnTo>
+                  <a:lnTo>
+                    <a:pt x="2560455" y="894997"/>
+                  </a:lnTo>
+                  <a:lnTo>
+                    <a:pt x="2630799" y="907170"/>
+                  </a:lnTo>
+                  <a:lnTo>
+                    <a:pt x="2701144" y="918933"/>
+                  </a:lnTo>
+                  <a:lnTo>
+                    <a:pt x="2771488" y="930302"/>
+                  </a:lnTo>
+                  <a:lnTo>
+                    <a:pt x="2841833" y="941288"/>
+                  </a:lnTo>
+                  <a:lnTo>
+                    <a:pt x="2912177" y="951905"/>
+                  </a:lnTo>
+                  <a:lnTo>
+                    <a:pt x="2982522" y="958011"/>
+                  </a:lnTo>
+                  <a:lnTo>
+                    <a:pt x="3052866" y="958347"/>
+                  </a:lnTo>
+                  <a:lnTo>
+                    <a:pt x="3123211" y="958684"/>
+                  </a:lnTo>
+                  <a:lnTo>
+                    <a:pt x="3193555" y="959020"/>
+                  </a:lnTo>
+                  <a:lnTo>
+                    <a:pt x="3263900" y="959356"/>
+                  </a:lnTo>
+                  <a:lnTo>
+                    <a:pt x="3334244" y="959691"/>
+                  </a:lnTo>
+                  <a:lnTo>
+                    <a:pt x="3404589" y="960026"/>
+                  </a:lnTo>
+                  <a:lnTo>
+                    <a:pt x="3474933" y="960361"/>
+                  </a:lnTo>
+                  <a:lnTo>
+                    <a:pt x="3545278" y="960695"/>
+                  </a:lnTo>
+                  <a:lnTo>
+                    <a:pt x="3615622" y="961029"/>
+                  </a:lnTo>
+                  <a:lnTo>
+                    <a:pt x="3685967" y="961362"/>
+                  </a:lnTo>
+                  <a:lnTo>
+                    <a:pt x="3756311" y="961695"/>
+                  </a:lnTo>
+                  <a:lnTo>
+                    <a:pt x="3826656" y="962028"/>
+                  </a:lnTo>
+                  <a:lnTo>
+                    <a:pt x="3897000" y="962360"/>
+                  </a:lnTo>
+                  <a:lnTo>
+                    <a:pt x="3967345" y="962692"/>
+                  </a:lnTo>
+                  <a:lnTo>
+                    <a:pt x="4037689" y="963024"/>
+                  </a:lnTo>
+                  <a:lnTo>
+                    <a:pt x="4108034" y="963355"/>
+                  </a:lnTo>
+                  <a:lnTo>
+                    <a:pt x="4178378" y="963686"/>
+                  </a:lnTo>
+                  <a:lnTo>
+                    <a:pt x="4248723" y="964016"/>
+                  </a:lnTo>
+                  <a:lnTo>
+                    <a:pt x="4319067" y="964346"/>
+                  </a:lnTo>
+                  <a:lnTo>
+                    <a:pt x="4389412" y="964676"/>
+                  </a:lnTo>
+                  <a:lnTo>
+                    <a:pt x="4459756" y="965005"/>
+                  </a:lnTo>
+                  <a:lnTo>
+                    <a:pt x="4530101" y="965334"/>
+                  </a:lnTo>
+                  <a:lnTo>
+                    <a:pt x="4600445" y="965663"/>
+                  </a:lnTo>
+                  <a:lnTo>
+                    <a:pt x="4670790" y="965991"/>
+                  </a:lnTo>
+                  <a:lnTo>
+                    <a:pt x="4741134" y="966319"/>
+                  </a:lnTo>
+                  <a:lnTo>
+                    <a:pt x="4811479" y="966646"/>
+                  </a:lnTo>
+                  <a:lnTo>
+                    <a:pt x="4881823" y="966974"/>
+                  </a:lnTo>
+                  <a:lnTo>
+                    <a:pt x="4952167" y="967300"/>
+                  </a:lnTo>
+                  <a:lnTo>
+                    <a:pt x="5022512" y="967627"/>
+                  </a:lnTo>
+                  <a:lnTo>
+                    <a:pt x="5092856" y="967953"/>
+                  </a:lnTo>
+                  <a:lnTo>
+                    <a:pt x="5163201" y="968278"/>
+                  </a:lnTo>
+                  <a:lnTo>
+                    <a:pt x="5233545" y="968604"/>
+                  </a:lnTo>
+                  <a:lnTo>
+                    <a:pt x="5303890" y="968929"/>
+                  </a:lnTo>
+                  <a:lnTo>
+                    <a:pt x="5374234" y="969253"/>
+                  </a:lnTo>
+                  <a:lnTo>
+                    <a:pt x="5444579" y="969577"/>
+                  </a:lnTo>
+                  <a:lnTo>
+                    <a:pt x="5514923" y="969901"/>
+                  </a:lnTo>
+                  <a:lnTo>
+                    <a:pt x="5585268" y="970225"/>
+                  </a:lnTo>
+                  <a:lnTo>
+                    <a:pt x="5655612" y="970548"/>
+                  </a:lnTo>
+                  <a:lnTo>
+                    <a:pt x="5725957" y="970871"/>
+                  </a:lnTo>
+                  <a:lnTo>
+                    <a:pt x="5796301" y="971193"/>
+                  </a:lnTo>
+                  <a:lnTo>
+                    <a:pt x="5866646" y="971515"/>
+                  </a:lnTo>
+                  <a:lnTo>
+                    <a:pt x="5936990" y="971837"/>
+                  </a:lnTo>
+                  <a:lnTo>
+                    <a:pt x="6007335" y="972158"/>
+                  </a:lnTo>
+                  <a:lnTo>
+                    <a:pt x="6077679" y="972479"/>
+                  </a:lnTo>
+                  <a:lnTo>
+                    <a:pt x="6148024" y="972799"/>
+                  </a:lnTo>
+                  <a:lnTo>
+                    <a:pt x="6218368" y="973120"/>
+                  </a:lnTo>
+                  <a:lnTo>
+                    <a:pt x="6288713" y="973439"/>
+                  </a:lnTo>
+                  <a:lnTo>
+                    <a:pt x="6359057" y="973759"/>
+                  </a:lnTo>
+                  <a:lnTo>
+                    <a:pt x="6429402" y="974078"/>
+                  </a:lnTo>
+                  <a:lnTo>
+                    <a:pt x="6499746" y="974397"/>
+                  </a:lnTo>
+                  <a:lnTo>
+                    <a:pt x="6570091" y="974715"/>
+                  </a:lnTo>
+                  <a:lnTo>
+                    <a:pt x="6640435" y="975033"/>
+                  </a:lnTo>
+                  <a:lnTo>
+                    <a:pt x="6710780" y="975351"/>
+                  </a:lnTo>
+                  <a:lnTo>
+                    <a:pt x="6781124" y="975668"/>
+                  </a:lnTo>
+                  <a:lnTo>
+                    <a:pt x="6851469" y="975985"/>
                   </a:lnTo>
                 </a:path>
               </a:pathLst>
@@ -4320,312 +4030,637 @@
           </p:nvSpPr>
           <p:spPr>
             <a:xfrm>
-              <a:off x="1172049" y="3766903"/>
-              <a:ext cx="7090630" cy="1478583"/>
+              <a:off x="1235312" y="3085899"/>
+              <a:ext cx="6964104" cy="269382"/>
             </a:xfrm>
             <a:custGeom>
               <a:avLst/>
               <a:pathLst>
-                <a:path w="7090630" h="1478583">
+                <a:path w="6964104" h="269382">
+                  <a:moveTo>
+                    <a:pt x="6964104" y="269382"/>
+                  </a:moveTo>
+                  <a:lnTo>
+                    <a:pt x="6893760" y="267817"/>
+                  </a:lnTo>
+                  <a:lnTo>
+                    <a:pt x="6823415" y="266197"/>
+                  </a:lnTo>
+                  <a:lnTo>
+                    <a:pt x="6753071" y="264521"/>
+                  </a:lnTo>
+                  <a:lnTo>
+                    <a:pt x="6682726" y="262787"/>
+                  </a:lnTo>
+                  <a:lnTo>
+                    <a:pt x="6612382" y="260992"/>
+                  </a:lnTo>
+                  <a:lnTo>
+                    <a:pt x="6542037" y="259135"/>
+                  </a:lnTo>
+                  <a:lnTo>
+                    <a:pt x="6471693" y="257213"/>
+                  </a:lnTo>
+                  <a:lnTo>
+                    <a:pt x="6401348" y="255225"/>
+                  </a:lnTo>
+                  <a:lnTo>
+                    <a:pt x="6331004" y="253167"/>
+                  </a:lnTo>
+                  <a:lnTo>
+                    <a:pt x="6260659" y="251038"/>
+                  </a:lnTo>
+                  <a:lnTo>
+                    <a:pt x="6190315" y="248835"/>
+                  </a:lnTo>
+                  <a:lnTo>
+                    <a:pt x="6119970" y="246555"/>
+                  </a:lnTo>
+                  <a:lnTo>
+                    <a:pt x="6049626" y="244196"/>
+                  </a:lnTo>
+                  <a:lnTo>
+                    <a:pt x="5979281" y="241754"/>
+                  </a:lnTo>
+                  <a:lnTo>
+                    <a:pt x="5908937" y="239228"/>
+                  </a:lnTo>
+                  <a:lnTo>
+                    <a:pt x="5838592" y="236614"/>
+                  </a:lnTo>
+                  <a:lnTo>
+                    <a:pt x="5768248" y="233909"/>
+                  </a:lnTo>
+                  <a:lnTo>
+                    <a:pt x="5697903" y="231110"/>
+                  </a:lnTo>
+                  <a:lnTo>
+                    <a:pt x="5627559" y="228214"/>
+                  </a:lnTo>
+                  <a:lnTo>
+                    <a:pt x="5557214" y="225217"/>
+                  </a:lnTo>
+                  <a:lnTo>
+                    <a:pt x="5486870" y="222116"/>
+                  </a:lnTo>
+                  <a:lnTo>
+                    <a:pt x="5416525" y="218907"/>
+                  </a:lnTo>
+                  <a:lnTo>
+                    <a:pt x="5346181" y="215586"/>
+                  </a:lnTo>
+                  <a:lnTo>
+                    <a:pt x="5275836" y="212150"/>
+                  </a:lnTo>
+                  <a:lnTo>
+                    <a:pt x="5205492" y="208594"/>
+                  </a:lnTo>
+                  <a:lnTo>
+                    <a:pt x="5135147" y="204915"/>
+                  </a:lnTo>
+                  <a:lnTo>
+                    <a:pt x="5064803" y="201108"/>
+                  </a:lnTo>
+                  <a:lnTo>
+                    <a:pt x="4994458" y="197168"/>
+                  </a:lnTo>
+                  <a:lnTo>
+                    <a:pt x="4924114" y="193092"/>
+                  </a:lnTo>
+                  <a:lnTo>
+                    <a:pt x="4853769" y="188873"/>
+                  </a:lnTo>
+                  <a:lnTo>
+                    <a:pt x="4783425" y="184508"/>
+                  </a:lnTo>
+                  <a:lnTo>
+                    <a:pt x="4713080" y="179991"/>
+                  </a:lnTo>
+                  <a:lnTo>
+                    <a:pt x="4642736" y="175317"/>
+                  </a:lnTo>
+                  <a:lnTo>
+                    <a:pt x="4572391" y="170481"/>
+                  </a:lnTo>
+                  <a:lnTo>
+                    <a:pt x="4502047" y="165476"/>
+                  </a:lnTo>
+                  <a:lnTo>
+                    <a:pt x="4431702" y="160297"/>
+                  </a:lnTo>
+                  <a:lnTo>
+                    <a:pt x="4361358" y="154938"/>
+                  </a:lnTo>
+                  <a:lnTo>
+                    <a:pt x="4291013" y="149393"/>
+                  </a:lnTo>
+                  <a:lnTo>
+                    <a:pt x="4220669" y="143655"/>
+                  </a:lnTo>
+                  <a:lnTo>
+                    <a:pt x="4150324" y="137717"/>
+                  </a:lnTo>
+                  <a:lnTo>
+                    <a:pt x="4079980" y="131573"/>
+                  </a:lnTo>
+                  <a:lnTo>
+                    <a:pt x="4009635" y="125215"/>
+                  </a:lnTo>
+                  <a:lnTo>
+                    <a:pt x="3939291" y="118636"/>
+                  </a:lnTo>
+                  <a:lnTo>
+                    <a:pt x="3868946" y="111829"/>
+                  </a:lnTo>
+                  <a:lnTo>
+                    <a:pt x="3798602" y="104784"/>
+                  </a:lnTo>
+                  <a:lnTo>
+                    <a:pt x="3728257" y="97495"/>
+                  </a:lnTo>
+                  <a:lnTo>
+                    <a:pt x="3657913" y="89952"/>
+                  </a:lnTo>
+                  <a:lnTo>
+                    <a:pt x="3587569" y="82147"/>
+                  </a:lnTo>
+                  <a:lnTo>
+                    <a:pt x="3517224" y="74070"/>
+                  </a:lnTo>
+                  <a:lnTo>
+                    <a:pt x="3446880" y="65712"/>
+                  </a:lnTo>
+                  <a:lnTo>
+                    <a:pt x="3376535" y="57064"/>
+                  </a:lnTo>
+                  <a:lnTo>
+                    <a:pt x="3306191" y="48115"/>
+                  </a:lnTo>
+                  <a:lnTo>
+                    <a:pt x="3235846" y="38855"/>
+                  </a:lnTo>
+                  <a:lnTo>
+                    <a:pt x="3165502" y="29273"/>
+                  </a:lnTo>
+                  <a:lnTo>
+                    <a:pt x="3095157" y="19358"/>
+                  </a:lnTo>
+                  <a:lnTo>
+                    <a:pt x="3024813" y="14866"/>
+                  </a:lnTo>
+                  <a:lnTo>
+                    <a:pt x="2954468" y="14528"/>
+                  </a:lnTo>
+                  <a:lnTo>
+                    <a:pt x="2884124" y="14190"/>
+                  </a:lnTo>
+                  <a:lnTo>
+                    <a:pt x="2813779" y="13852"/>
+                  </a:lnTo>
+                  <a:lnTo>
+                    <a:pt x="2743435" y="13513"/>
+                  </a:lnTo>
+                  <a:lnTo>
+                    <a:pt x="2673090" y="13174"/>
+                  </a:lnTo>
+                  <a:lnTo>
+                    <a:pt x="2602746" y="12834"/>
+                  </a:lnTo>
+                  <a:lnTo>
+                    <a:pt x="2532401" y="12494"/>
+                  </a:lnTo>
+                  <a:lnTo>
+                    <a:pt x="2462057" y="12154"/>
+                  </a:lnTo>
+                  <a:lnTo>
+                    <a:pt x="2391712" y="11813"/>
+                  </a:lnTo>
+                  <a:lnTo>
+                    <a:pt x="2321368" y="11472"/>
+                  </a:lnTo>
+                  <a:lnTo>
+                    <a:pt x="2251023" y="11131"/>
+                  </a:lnTo>
+                  <a:lnTo>
+                    <a:pt x="2180679" y="10789"/>
+                  </a:lnTo>
+                  <a:lnTo>
+                    <a:pt x="2110334" y="10447"/>
+                  </a:lnTo>
+                  <a:lnTo>
+                    <a:pt x="2039990" y="10104"/>
+                  </a:lnTo>
+                  <a:lnTo>
+                    <a:pt x="1969645" y="9761"/>
+                  </a:lnTo>
+                  <a:lnTo>
+                    <a:pt x="1899301" y="9418"/>
+                  </a:lnTo>
+                  <a:lnTo>
+                    <a:pt x="1828956" y="9074"/>
+                  </a:lnTo>
+                  <a:lnTo>
+                    <a:pt x="1758612" y="8730"/>
+                  </a:lnTo>
+                  <a:lnTo>
+                    <a:pt x="1688267" y="8386"/>
+                  </a:lnTo>
+                  <a:lnTo>
+                    <a:pt x="1617923" y="8041"/>
+                  </a:lnTo>
+                  <a:lnTo>
+                    <a:pt x="1547578" y="7695"/>
+                  </a:lnTo>
+                  <a:lnTo>
+                    <a:pt x="1477234" y="7350"/>
+                  </a:lnTo>
+                  <a:lnTo>
+                    <a:pt x="1406889" y="7004"/>
+                  </a:lnTo>
+                  <a:lnTo>
+                    <a:pt x="1336545" y="6657"/>
+                  </a:lnTo>
+                  <a:lnTo>
+                    <a:pt x="1266200" y="6310"/>
+                  </a:lnTo>
+                  <a:lnTo>
+                    <a:pt x="1195856" y="5963"/>
+                  </a:lnTo>
+                  <a:lnTo>
+                    <a:pt x="1125511" y="5615"/>
+                  </a:lnTo>
+                  <a:lnTo>
+                    <a:pt x="1055167" y="5267"/>
+                  </a:lnTo>
+                  <a:lnTo>
+                    <a:pt x="984822" y="4919"/>
+                  </a:lnTo>
+                  <a:lnTo>
+                    <a:pt x="914478" y="4570"/>
+                  </a:lnTo>
+                  <a:lnTo>
+                    <a:pt x="844133" y="4221"/>
+                  </a:lnTo>
+                  <a:lnTo>
+                    <a:pt x="773789" y="3871"/>
+                  </a:lnTo>
+                  <a:lnTo>
+                    <a:pt x="703444" y="3521"/>
+                  </a:lnTo>
+                  <a:lnTo>
+                    <a:pt x="633100" y="3171"/>
+                  </a:lnTo>
+                  <a:lnTo>
+                    <a:pt x="562755" y="2820"/>
+                  </a:lnTo>
+                  <a:lnTo>
+                    <a:pt x="492411" y="2469"/>
+                  </a:lnTo>
+                  <a:lnTo>
+                    <a:pt x="422066" y="2117"/>
+                  </a:lnTo>
+                  <a:lnTo>
+                    <a:pt x="351722" y="1765"/>
+                  </a:lnTo>
+                  <a:lnTo>
+                    <a:pt x="281377" y="1413"/>
+                  </a:lnTo>
+                  <a:lnTo>
+                    <a:pt x="211033" y="1060"/>
+                  </a:lnTo>
+                  <a:lnTo>
+                    <a:pt x="140688" y="707"/>
+                  </a:lnTo>
+                  <a:lnTo>
+                    <a:pt x="70344" y="353"/>
+                  </a:lnTo>
+                  <a:lnTo>
+                    <a:pt x="0" y="0"/>
+                  </a:lnTo>
+                </a:path>
+              </a:pathLst>
+            </a:custGeom>
+          </p:spPr>
+          <p:txBody>
+            <a:bodyPr/>
+            <a:lstStyle/>
+            <a:p/>
+          </p:txBody>
+        </p:sp>
+        <p:sp>
+          <p:nvSpPr>
+            <p:cNvPr id="26" name="pl26"/>
+            <p:cNvSpPr/>
+            <p:nvPr/>
+          </p:nvSpPr>
+          <p:spPr>
+            <a:xfrm>
+              <a:off x="1235312" y="2754200"/>
+              <a:ext cx="6964104" cy="533585"/>
+            </a:xfrm>
+            <a:custGeom>
+              <a:avLst/>
+              <a:pathLst>
+                <a:path w="6964104" h="533585">
                   <a:moveTo>
                     <a:pt x="0" y="0"/>
                   </a:moveTo>
                   <a:lnTo>
-                    <a:pt x="71622" y="31332"/>
-                  </a:lnTo>
-                  <a:lnTo>
-                    <a:pt x="143245" y="62116"/>
-                  </a:lnTo>
-                  <a:lnTo>
-                    <a:pt x="214867" y="92362"/>
-                  </a:lnTo>
-                  <a:lnTo>
-                    <a:pt x="286490" y="122078"/>
-                  </a:lnTo>
-                  <a:lnTo>
-                    <a:pt x="358112" y="151274"/>
-                  </a:lnTo>
-                  <a:lnTo>
-                    <a:pt x="429735" y="179959"/>
-                  </a:lnTo>
-                  <a:lnTo>
-                    <a:pt x="501357" y="208142"/>
-                  </a:lnTo>
-                  <a:lnTo>
-                    <a:pt x="572980" y="235832"/>
-                  </a:lnTo>
-                  <a:lnTo>
-                    <a:pt x="644602" y="263037"/>
-                  </a:lnTo>
-                  <a:lnTo>
-                    <a:pt x="716225" y="289766"/>
-                  </a:lnTo>
-                  <a:lnTo>
-                    <a:pt x="787847" y="316028"/>
-                  </a:lnTo>
-                  <a:lnTo>
-                    <a:pt x="859470" y="341829"/>
-                  </a:lnTo>
-                  <a:lnTo>
-                    <a:pt x="931092" y="367180"/>
-                  </a:lnTo>
-                  <a:lnTo>
-                    <a:pt x="1002715" y="392086"/>
-                  </a:lnTo>
-                  <a:lnTo>
-                    <a:pt x="1074337" y="416557"/>
-                  </a:lnTo>
-                  <a:lnTo>
-                    <a:pt x="1145960" y="440599"/>
-                  </a:lnTo>
-                  <a:lnTo>
-                    <a:pt x="1217582" y="464221"/>
-                  </a:lnTo>
-                  <a:lnTo>
-                    <a:pt x="1289205" y="487429"/>
-                  </a:lnTo>
-                  <a:lnTo>
-                    <a:pt x="1360827" y="510231"/>
-                  </a:lnTo>
-                  <a:lnTo>
-                    <a:pt x="1432450" y="532634"/>
-                  </a:lnTo>
-                  <a:lnTo>
-                    <a:pt x="1504073" y="554645"/>
-                  </a:lnTo>
-                  <a:lnTo>
-                    <a:pt x="1575695" y="576271"/>
-                  </a:lnTo>
-                  <a:lnTo>
-                    <a:pt x="1647318" y="597519"/>
-                  </a:lnTo>
-                  <a:lnTo>
-                    <a:pt x="1718940" y="618394"/>
-                  </a:lnTo>
-                  <a:lnTo>
-                    <a:pt x="1790563" y="638904"/>
-                  </a:lnTo>
-                  <a:lnTo>
-                    <a:pt x="1862185" y="659055"/>
-                  </a:lnTo>
-                  <a:lnTo>
-                    <a:pt x="1933808" y="678854"/>
-                  </a:lnTo>
-                  <a:lnTo>
-                    <a:pt x="2005430" y="698306"/>
-                  </a:lnTo>
-                  <a:lnTo>
-                    <a:pt x="2077053" y="717417"/>
-                  </a:lnTo>
-                  <a:lnTo>
-                    <a:pt x="2148675" y="736195"/>
-                  </a:lnTo>
-                  <a:lnTo>
-                    <a:pt x="2220298" y="754643"/>
-                  </a:lnTo>
-                  <a:lnTo>
-                    <a:pt x="2291920" y="772769"/>
-                  </a:lnTo>
-                  <a:lnTo>
-                    <a:pt x="2363543" y="790577"/>
-                  </a:lnTo>
-                  <a:lnTo>
-                    <a:pt x="2435165" y="808074"/>
-                  </a:lnTo>
-                  <a:lnTo>
-                    <a:pt x="2506788" y="825264"/>
-                  </a:lnTo>
-                  <a:lnTo>
-                    <a:pt x="2578410" y="842154"/>
-                  </a:lnTo>
-                  <a:lnTo>
-                    <a:pt x="2650033" y="858748"/>
-                  </a:lnTo>
-                  <a:lnTo>
-                    <a:pt x="2721655" y="875052"/>
-                  </a:lnTo>
-                  <a:lnTo>
-                    <a:pt x="2793278" y="891070"/>
-                  </a:lnTo>
-                  <a:lnTo>
-                    <a:pt x="2864901" y="906809"/>
-                  </a:lnTo>
-                  <a:lnTo>
-                    <a:pt x="2936523" y="922271"/>
-                  </a:lnTo>
-                  <a:lnTo>
-                    <a:pt x="3008146" y="937463"/>
-                  </a:lnTo>
-                  <a:lnTo>
-                    <a:pt x="3079768" y="952389"/>
-                  </a:lnTo>
-                  <a:lnTo>
-                    <a:pt x="3151391" y="967054"/>
-                  </a:lnTo>
-                  <a:lnTo>
-                    <a:pt x="3223013" y="981463"/>
-                  </a:lnTo>
-                  <a:lnTo>
-                    <a:pt x="3294636" y="995619"/>
-                  </a:lnTo>
-                  <a:lnTo>
-                    <a:pt x="3366258" y="1009527"/>
-                  </a:lnTo>
-                  <a:lnTo>
-                    <a:pt x="3437881" y="1023192"/>
-                  </a:lnTo>
-                  <a:lnTo>
-                    <a:pt x="3509503" y="1036618"/>
-                  </a:lnTo>
-                  <a:lnTo>
-                    <a:pt x="3581126" y="1049809"/>
-                  </a:lnTo>
-                  <a:lnTo>
-                    <a:pt x="3652748" y="1062769"/>
-                  </a:lnTo>
-                  <a:lnTo>
-                    <a:pt x="3724371" y="1075502"/>
-                  </a:lnTo>
-                  <a:lnTo>
-                    <a:pt x="3795993" y="1088012"/>
-                  </a:lnTo>
-                  <a:lnTo>
-                    <a:pt x="3867616" y="1100304"/>
-                  </a:lnTo>
-                  <a:lnTo>
-                    <a:pt x="3939238" y="1112380"/>
-                  </a:lnTo>
-                  <a:lnTo>
-                    <a:pt x="4010861" y="1124245"/>
-                  </a:lnTo>
-                  <a:lnTo>
-                    <a:pt x="4082483" y="1135902"/>
-                  </a:lnTo>
-                  <a:lnTo>
-                    <a:pt x="4154106" y="1147356"/>
-                  </a:lnTo>
-                  <a:lnTo>
-                    <a:pt x="4225729" y="1158608"/>
-                  </a:lnTo>
-                  <a:lnTo>
-                    <a:pt x="4297351" y="1169664"/>
-                  </a:lnTo>
-                  <a:lnTo>
-                    <a:pt x="4368974" y="1180527"/>
-                  </a:lnTo>
-                  <a:lnTo>
-                    <a:pt x="4440596" y="1191199"/>
-                  </a:lnTo>
-                  <a:lnTo>
-                    <a:pt x="4512219" y="1201685"/>
-                  </a:lnTo>
-                  <a:lnTo>
-                    <a:pt x="4583841" y="1211987"/>
-                  </a:lnTo>
-                  <a:lnTo>
-                    <a:pt x="4655464" y="1222108"/>
-                  </a:lnTo>
-                  <a:lnTo>
-                    <a:pt x="4727086" y="1232053"/>
-                  </a:lnTo>
-                  <a:lnTo>
-                    <a:pt x="4798709" y="1241824"/>
-                  </a:lnTo>
-                  <a:lnTo>
-                    <a:pt x="4870331" y="1251423"/>
-                  </a:lnTo>
-                  <a:lnTo>
-                    <a:pt x="4941954" y="1260855"/>
-                  </a:lnTo>
-                  <a:lnTo>
-                    <a:pt x="5013576" y="1270121"/>
-                  </a:lnTo>
-                  <a:lnTo>
-                    <a:pt x="5085199" y="1279226"/>
-                  </a:lnTo>
-                  <a:lnTo>
-                    <a:pt x="5156821" y="1288171"/>
-                  </a:lnTo>
-                  <a:lnTo>
-                    <a:pt x="5228444" y="1296959"/>
-                  </a:lnTo>
-                  <a:lnTo>
-                    <a:pt x="5300066" y="1305594"/>
-                  </a:lnTo>
-                  <a:lnTo>
-                    <a:pt x="5371689" y="1314077"/>
-                  </a:lnTo>
-                  <a:lnTo>
-                    <a:pt x="5443311" y="1322413"/>
-                  </a:lnTo>
-                  <a:lnTo>
-                    <a:pt x="5514934" y="1330602"/>
-                  </a:lnTo>
-                  <a:lnTo>
-                    <a:pt x="5586557" y="1338648"/>
-                  </a:lnTo>
-                  <a:lnTo>
-                    <a:pt x="5658179" y="1346553"/>
-                  </a:lnTo>
-                  <a:lnTo>
-                    <a:pt x="5729802" y="1354320"/>
-                  </a:lnTo>
-                  <a:lnTo>
-                    <a:pt x="5801424" y="1361950"/>
-                  </a:lnTo>
-                  <a:lnTo>
-                    <a:pt x="5873047" y="1369448"/>
-                  </a:lnTo>
-                  <a:lnTo>
-                    <a:pt x="5944669" y="1376814"/>
-                  </a:lnTo>
-                  <a:lnTo>
-                    <a:pt x="6016292" y="1384051"/>
-                  </a:lnTo>
-                  <a:lnTo>
-                    <a:pt x="6087914" y="1391161"/>
-                  </a:lnTo>
-                  <a:lnTo>
-                    <a:pt x="6159537" y="1398147"/>
-                  </a:lnTo>
-                  <a:lnTo>
-                    <a:pt x="6231159" y="1405011"/>
-                  </a:lnTo>
-                  <a:lnTo>
-                    <a:pt x="6302782" y="1411755"/>
-                  </a:lnTo>
-                  <a:lnTo>
-                    <a:pt x="6374404" y="1418381"/>
-                  </a:lnTo>
-                  <a:lnTo>
-                    <a:pt x="6446027" y="1424890"/>
-                  </a:lnTo>
-                  <a:lnTo>
-                    <a:pt x="6517649" y="1431286"/>
-                  </a:lnTo>
-                  <a:lnTo>
-                    <a:pt x="6589272" y="1437570"/>
-                  </a:lnTo>
-                  <a:lnTo>
-                    <a:pt x="6660894" y="1443744"/>
-                  </a:lnTo>
-                  <a:lnTo>
-                    <a:pt x="6732517" y="1449810"/>
-                  </a:lnTo>
-                  <a:lnTo>
-                    <a:pt x="6804139" y="1455769"/>
-                  </a:lnTo>
-                  <a:lnTo>
-                    <a:pt x="6875762" y="1461625"/>
-                  </a:lnTo>
-                  <a:lnTo>
-                    <a:pt x="6947385" y="1467377"/>
-                  </a:lnTo>
-                  <a:lnTo>
-                    <a:pt x="7019007" y="1473030"/>
-                  </a:lnTo>
-                  <a:lnTo>
-                    <a:pt x="7090630" y="1478583"/>
+                    <a:pt x="70344" y="11307"/>
+                  </a:lnTo>
+                  <a:lnTo>
+                    <a:pt x="140688" y="22416"/>
+                  </a:lnTo>
+                  <a:lnTo>
+                    <a:pt x="211033" y="33331"/>
+                  </a:lnTo>
+                  <a:lnTo>
+                    <a:pt x="281377" y="44055"/>
+                  </a:lnTo>
+                  <a:lnTo>
+                    <a:pt x="351722" y="54591"/>
+                  </a:lnTo>
+                  <a:lnTo>
+                    <a:pt x="422066" y="64943"/>
+                  </a:lnTo>
+                  <a:lnTo>
+                    <a:pt x="492411" y="75113"/>
+                  </a:lnTo>
+                  <a:lnTo>
+                    <a:pt x="562755" y="85106"/>
+                  </a:lnTo>
+                  <a:lnTo>
+                    <a:pt x="633100" y="94924"/>
+                  </a:lnTo>
+                  <a:lnTo>
+                    <a:pt x="703444" y="104570"/>
+                  </a:lnTo>
+                  <a:lnTo>
+                    <a:pt x="773789" y="114047"/>
+                  </a:lnTo>
+                  <a:lnTo>
+                    <a:pt x="844133" y="123358"/>
+                  </a:lnTo>
+                  <a:lnTo>
+                    <a:pt x="914478" y="132506"/>
+                  </a:lnTo>
+                  <a:lnTo>
+                    <a:pt x="984822" y="141494"/>
+                  </a:lnTo>
+                  <a:lnTo>
+                    <a:pt x="1055167" y="150325"/>
+                  </a:lnTo>
+                  <a:lnTo>
+                    <a:pt x="1125511" y="159002"/>
+                  </a:lnTo>
+                  <a:lnTo>
+                    <a:pt x="1195856" y="167526"/>
+                  </a:lnTo>
+                  <a:lnTo>
+                    <a:pt x="1266200" y="175901"/>
+                  </a:lnTo>
+                  <a:lnTo>
+                    <a:pt x="1336545" y="184130"/>
+                  </a:lnTo>
+                  <a:lnTo>
+                    <a:pt x="1406889" y="192215"/>
+                  </a:lnTo>
+                  <a:lnTo>
+                    <a:pt x="1477234" y="200158"/>
+                  </a:lnTo>
+                  <a:lnTo>
+                    <a:pt x="1547578" y="207962"/>
+                  </a:lnTo>
+                  <a:lnTo>
+                    <a:pt x="1617923" y="215630"/>
+                  </a:lnTo>
+                  <a:lnTo>
+                    <a:pt x="1688267" y="223164"/>
+                  </a:lnTo>
+                  <a:lnTo>
+                    <a:pt x="1758612" y="230565"/>
+                  </a:lnTo>
+                  <a:lnTo>
+                    <a:pt x="1828956" y="237837"/>
+                  </a:lnTo>
+                  <a:lnTo>
+                    <a:pt x="1899301" y="244982"/>
+                  </a:lnTo>
+                  <a:lnTo>
+                    <a:pt x="1969645" y="252002"/>
+                  </a:lnTo>
+                  <a:lnTo>
+                    <a:pt x="2039990" y="258899"/>
+                  </a:lnTo>
+                  <a:lnTo>
+                    <a:pt x="2110334" y="265675"/>
+                  </a:lnTo>
+                  <a:lnTo>
+                    <a:pt x="2180679" y="272333"/>
+                  </a:lnTo>
+                  <a:lnTo>
+                    <a:pt x="2251023" y="278874"/>
+                  </a:lnTo>
+                  <a:lnTo>
+                    <a:pt x="2321368" y="285300"/>
+                  </a:lnTo>
+                  <a:lnTo>
+                    <a:pt x="2391712" y="291615"/>
+                  </a:lnTo>
+                  <a:lnTo>
+                    <a:pt x="2462057" y="297818"/>
+                  </a:lnTo>
+                  <a:lnTo>
+                    <a:pt x="2532401" y="303913"/>
+                  </a:lnTo>
+                  <a:lnTo>
+                    <a:pt x="2602746" y="309902"/>
+                  </a:lnTo>
+                  <a:lnTo>
+                    <a:pt x="2673090" y="315785"/>
+                  </a:lnTo>
+                  <a:lnTo>
+                    <a:pt x="2743435" y="321566"/>
+                  </a:lnTo>
+                  <a:lnTo>
+                    <a:pt x="2813779" y="327246"/>
+                  </a:lnTo>
+                  <a:lnTo>
+                    <a:pt x="2884124" y="332826"/>
+                  </a:lnTo>
+                  <a:lnTo>
+                    <a:pt x="2954468" y="338308"/>
+                  </a:lnTo>
+                  <a:lnTo>
+                    <a:pt x="3024813" y="343695"/>
+                  </a:lnTo>
+                  <a:lnTo>
+                    <a:pt x="3095157" y="348987"/>
+                  </a:lnTo>
+                  <a:lnTo>
+                    <a:pt x="3165502" y="354186"/>
+                  </a:lnTo>
+                  <a:lnTo>
+                    <a:pt x="3235846" y="359295"/>
+                  </a:lnTo>
+                  <a:lnTo>
+                    <a:pt x="3306191" y="364314"/>
+                  </a:lnTo>
+                  <a:lnTo>
+                    <a:pt x="3376535" y="369246"/>
+                  </a:lnTo>
+                  <a:lnTo>
+                    <a:pt x="3446880" y="374091"/>
+                  </a:lnTo>
+                  <a:lnTo>
+                    <a:pt x="3517224" y="378851"/>
+                  </a:lnTo>
+                  <a:lnTo>
+                    <a:pt x="3587569" y="383528"/>
+                  </a:lnTo>
+                  <a:lnTo>
+                    <a:pt x="3657913" y="388123"/>
+                  </a:lnTo>
+                  <a:lnTo>
+                    <a:pt x="3728257" y="392638"/>
+                  </a:lnTo>
+                  <a:lnTo>
+                    <a:pt x="3798602" y="397073"/>
+                  </a:lnTo>
+                  <a:lnTo>
+                    <a:pt x="3868946" y="401431"/>
+                  </a:lnTo>
+                  <a:lnTo>
+                    <a:pt x="3939291" y="405713"/>
+                  </a:lnTo>
+                  <a:lnTo>
+                    <a:pt x="4009635" y="409920"/>
+                  </a:lnTo>
+                  <a:lnTo>
+                    <a:pt x="4079980" y="414053"/>
+                  </a:lnTo>
+                  <a:lnTo>
+                    <a:pt x="4150324" y="418114"/>
+                  </a:lnTo>
+                  <a:lnTo>
+                    <a:pt x="4220669" y="422104"/>
+                  </a:lnTo>
+                  <a:lnTo>
+                    <a:pt x="4291013" y="426024"/>
+                  </a:lnTo>
+                  <a:lnTo>
+                    <a:pt x="4361358" y="429875"/>
+                  </a:lnTo>
+                  <a:lnTo>
+                    <a:pt x="4431702" y="433659"/>
+                  </a:lnTo>
+                  <a:lnTo>
+                    <a:pt x="4502047" y="437377"/>
+                  </a:lnTo>
+                  <a:lnTo>
+                    <a:pt x="4572391" y="441030"/>
+                  </a:lnTo>
+                  <a:lnTo>
+                    <a:pt x="4642736" y="444619"/>
+                  </a:lnTo>
+                  <a:lnTo>
+                    <a:pt x="4713080" y="448145"/>
+                  </a:lnTo>
+                  <a:lnTo>
+                    <a:pt x="4783425" y="451609"/>
+                  </a:lnTo>
+                  <a:lnTo>
+                    <a:pt x="4853769" y="455013"/>
+                  </a:lnTo>
+                  <a:lnTo>
+                    <a:pt x="4924114" y="458357"/>
+                  </a:lnTo>
+                  <a:lnTo>
+                    <a:pt x="4994458" y="461642"/>
+                  </a:lnTo>
+                  <a:lnTo>
+                    <a:pt x="5064803" y="464870"/>
+                  </a:lnTo>
+                  <a:lnTo>
+                    <a:pt x="5135147" y="468042"/>
+                  </a:lnTo>
+                  <a:lnTo>
+                    <a:pt x="5205492" y="471158"/>
+                  </a:lnTo>
+                  <a:lnTo>
+                    <a:pt x="5275836" y="474219"/>
+                  </a:lnTo>
+                  <a:lnTo>
+                    <a:pt x="5346181" y="477227"/>
+                  </a:lnTo>
+                  <a:lnTo>
+                    <a:pt x="5416525" y="480183"/>
+                  </a:lnTo>
+                  <a:lnTo>
+                    <a:pt x="5486870" y="483086"/>
+                  </a:lnTo>
+                  <a:lnTo>
+                    <a:pt x="5557214" y="485939"/>
+                  </a:lnTo>
+                  <a:lnTo>
+                    <a:pt x="5627559" y="488742"/>
+                  </a:lnTo>
+                  <a:lnTo>
+                    <a:pt x="5697903" y="491496"/>
+                  </a:lnTo>
+                  <a:lnTo>
+                    <a:pt x="5768248" y="494201"/>
+                  </a:lnTo>
+                  <a:lnTo>
+                    <a:pt x="5838592" y="496859"/>
+                  </a:lnTo>
+                  <a:lnTo>
+                    <a:pt x="5908937" y="499471"/>
+                  </a:lnTo>
+                  <a:lnTo>
+                    <a:pt x="5979281" y="502037"/>
+                  </a:lnTo>
+                  <a:lnTo>
+                    <a:pt x="6049626" y="504558"/>
+                  </a:lnTo>
+                  <a:lnTo>
+                    <a:pt x="6119970" y="507035"/>
+                  </a:lnTo>
+                  <a:lnTo>
+                    <a:pt x="6190315" y="509469"/>
+                  </a:lnTo>
+                  <a:lnTo>
+                    <a:pt x="6260659" y="511860"/>
+                  </a:lnTo>
+                  <a:lnTo>
+                    <a:pt x="6331004" y="514209"/>
+                  </a:lnTo>
+                  <a:lnTo>
+                    <a:pt x="6401348" y="516517"/>
+                  </a:lnTo>
+                  <a:lnTo>
+                    <a:pt x="6471693" y="518785"/>
+                  </a:lnTo>
+                  <a:lnTo>
+                    <a:pt x="6542037" y="521013"/>
+                  </a:lnTo>
+                  <a:lnTo>
+                    <a:pt x="6612382" y="523202"/>
+                  </a:lnTo>
+                  <a:lnTo>
+                    <a:pt x="6682726" y="525353"/>
+                  </a:lnTo>
+                  <a:lnTo>
+                    <a:pt x="6753071" y="527466"/>
+                  </a:lnTo>
+                  <a:lnTo>
+                    <a:pt x="6823415" y="529542"/>
+                  </a:lnTo>
+                  <a:lnTo>
+                    <a:pt x="6893760" y="531581"/>
+                  </a:lnTo>
+                  <a:lnTo>
+                    <a:pt x="6964104" y="533585"/>
                   </a:lnTo>
                 </a:path>
               </a:pathLst>
@@ -4648,27 +4683,27 @@
         </p:sp>
         <p:sp>
           <p:nvSpPr>
-            <p:cNvPr id="26" name="pl26"/>
+            <p:cNvPr id="27" name="pl27"/>
             <p:cNvSpPr/>
             <p:nvPr/>
           </p:nvSpPr>
           <p:spPr>
             <a:xfrm>
-              <a:off x="817517" y="4727786"/>
-              <a:ext cx="7799693" cy="0"/>
+              <a:off x="887106" y="3100960"/>
+              <a:ext cx="7660515" cy="0"/>
             </a:xfrm>
             <a:custGeom>
               <a:avLst/>
               <a:pathLst>
-                <a:path w="7799693" h="0">
+                <a:path w="7660515" h="0">
                   <a:moveTo>
                     <a:pt x="0" y="0"/>
                   </a:moveTo>
                   <a:lnTo>
-                    <a:pt x="7799693" y="0"/>
-                  </a:lnTo>
-                  <a:lnTo>
-                    <a:pt x="7799693" y="0"/>
+                    <a:pt x="7660515" y="0"/>
+                  </a:lnTo>
+                  <a:lnTo>
+                    <a:pt x="7660515" y="0"/>
                   </a:lnTo>
                 </a:path>
               </a:pathLst>
@@ -4691,21 +4726,21 @@
         </p:sp>
         <p:sp>
           <p:nvSpPr>
-            <p:cNvPr id="27" name="pl27"/>
+            <p:cNvPr id="28" name="pl28"/>
             <p:cNvSpPr/>
             <p:nvPr/>
           </p:nvSpPr>
           <p:spPr>
             <a:xfrm>
-              <a:off x="4293144" y="2073503"/>
-              <a:ext cx="0" cy="3649639"/>
+              <a:off x="4300713" y="2143092"/>
+              <a:ext cx="0" cy="1317069"/>
             </a:xfrm>
             <a:custGeom>
               <a:avLst/>
               <a:pathLst>
-                <a:path w="0" h="3649639">
+                <a:path w="0" h="1317069">
                   <a:moveTo>
-                    <a:pt x="0" y="3649639"/>
+                    <a:pt x="0" y="1317069"/>
                   </a:moveTo>
                   <a:lnTo>
                     <a:pt x="0" y="0"/>
@@ -4734,21 +4769,21 @@
         </p:sp>
         <p:sp>
           <p:nvSpPr>
-            <p:cNvPr id="28" name="pl28"/>
+            <p:cNvPr id="29" name="pl29"/>
             <p:cNvSpPr/>
             <p:nvPr/>
           </p:nvSpPr>
           <p:spPr>
             <a:xfrm>
-              <a:off x="3074393" y="2073503"/>
-              <a:ext cx="0" cy="3649639"/>
+              <a:off x="3103710" y="2143092"/>
+              <a:ext cx="0" cy="1317069"/>
             </a:xfrm>
             <a:custGeom>
               <a:avLst/>
               <a:pathLst>
-                <a:path w="0" h="3649639">
+                <a:path w="0" h="1317069">
                   <a:moveTo>
-                    <a:pt x="0" y="3649639"/>
+                    <a:pt x="0" y="1317069"/>
                   </a:moveTo>
                   <a:lnTo>
                     <a:pt x="0" y="0"/>
@@ -4777,21 +4812,21 @@
         </p:sp>
         <p:sp>
           <p:nvSpPr>
-            <p:cNvPr id="29" name="pl29"/>
+            <p:cNvPr id="30" name="pl30"/>
             <p:cNvSpPr/>
             <p:nvPr/>
           </p:nvSpPr>
           <p:spPr>
             <a:xfrm>
-              <a:off x="5518580" y="2073503"/>
-              <a:ext cx="0" cy="3649639"/>
+              <a:off x="5504283" y="2143092"/>
+              <a:ext cx="0" cy="1317069"/>
             </a:xfrm>
             <a:custGeom>
               <a:avLst/>
               <a:pathLst>
-                <a:path w="0" h="3649639">
+                <a:path w="0" h="1317069">
                   <a:moveTo>
-                    <a:pt x="0" y="3649639"/>
+                    <a:pt x="0" y="1317069"/>
                   </a:moveTo>
                   <a:lnTo>
                     <a:pt x="0" y="0"/>
@@ -4820,13 +4855,13 @@
         </p:sp>
         <p:sp>
           <p:nvSpPr>
-            <p:cNvPr id="30" name="tx30"/>
+            <p:cNvPr id="31" name="tx31"/>
             <p:cNvSpPr/>
             <p:nvPr/>
           </p:nvSpPr>
           <p:spPr>
             <a:xfrm>
-              <a:off x="692708" y="5517199"/>
+              <a:off x="762297" y="3360243"/>
               <a:ext cx="62179" cy="80101"/>
             </a:xfrm>
             <a:prstGeom prst="rect">
@@ -4866,13 +4901,13 @@
         </p:sp>
         <p:sp>
           <p:nvSpPr>
-            <p:cNvPr id="31" name="tx31"/>
+            <p:cNvPr id="32" name="tx32"/>
             <p:cNvSpPr/>
             <p:nvPr/>
           </p:nvSpPr>
           <p:spPr>
             <a:xfrm>
-              <a:off x="692708" y="4687735"/>
+              <a:off x="762297" y="3060909"/>
               <a:ext cx="62179" cy="80101"/>
             </a:xfrm>
             <a:prstGeom prst="rect">
@@ -4912,13 +4947,13 @@
         </p:sp>
         <p:sp>
           <p:nvSpPr>
-            <p:cNvPr id="32" name="tx32"/>
+            <p:cNvPr id="33" name="tx33"/>
             <p:cNvSpPr/>
             <p:nvPr/>
           </p:nvSpPr>
           <p:spPr>
             <a:xfrm>
-              <a:off x="692708" y="3858272"/>
+              <a:off x="762297" y="2761575"/>
               <a:ext cx="62179" cy="80101"/>
             </a:xfrm>
             <a:prstGeom prst="rect">
@@ -4958,13 +4993,13 @@
         </p:sp>
         <p:sp>
           <p:nvSpPr>
-            <p:cNvPr id="33" name="tx33"/>
+            <p:cNvPr id="34" name="tx34"/>
             <p:cNvSpPr/>
             <p:nvPr/>
           </p:nvSpPr>
           <p:spPr>
             <a:xfrm>
-              <a:off x="692708" y="3028808"/>
+              <a:off x="762297" y="2462242"/>
               <a:ext cx="62179" cy="80101"/>
             </a:xfrm>
             <a:prstGeom prst="rect">
@@ -5004,13 +5039,13 @@
         </p:sp>
         <p:sp>
           <p:nvSpPr>
-            <p:cNvPr id="34" name="tx34"/>
+            <p:cNvPr id="35" name="tx35"/>
             <p:cNvSpPr/>
             <p:nvPr/>
           </p:nvSpPr>
           <p:spPr>
             <a:xfrm>
-              <a:off x="692708" y="2199345"/>
+              <a:off x="762297" y="2162908"/>
               <a:ext cx="62179" cy="80101"/>
             </a:xfrm>
             <a:prstGeom prst="rect">
@@ -5050,13 +5085,13 @@
         </p:sp>
         <p:sp>
           <p:nvSpPr>
-            <p:cNvPr id="35" name="tx35"/>
+            <p:cNvPr id="36" name="tx36"/>
             <p:cNvSpPr/>
             <p:nvPr/>
           </p:nvSpPr>
           <p:spPr>
             <a:xfrm>
-              <a:off x="2134610" y="5785772"/>
+              <a:off x="2179256" y="3522791"/>
               <a:ext cx="161574" cy="80101"/>
             </a:xfrm>
             <a:prstGeom prst="rect">
@@ -5096,13 +5131,13 @@
         </p:sp>
         <p:sp>
           <p:nvSpPr>
-            <p:cNvPr id="36" name="tx36"/>
+            <p:cNvPr id="37" name="tx37"/>
             <p:cNvSpPr/>
             <p:nvPr/>
           </p:nvSpPr>
           <p:spPr>
             <a:xfrm>
-              <a:off x="3875731" y="5785772"/>
+              <a:off x="3889308" y="3522791"/>
               <a:ext cx="161574" cy="80101"/>
             </a:xfrm>
             <a:prstGeom prst="rect">
@@ -5142,13 +5177,13 @@
         </p:sp>
         <p:sp>
           <p:nvSpPr>
-            <p:cNvPr id="37" name="tx37"/>
+            <p:cNvPr id="38" name="tx38"/>
             <p:cNvSpPr/>
             <p:nvPr/>
           </p:nvSpPr>
           <p:spPr>
             <a:xfrm>
-              <a:off x="5666549" y="5785772"/>
+              <a:off x="5649057" y="3522791"/>
               <a:ext cx="62179" cy="80101"/>
             </a:xfrm>
             <a:prstGeom prst="rect">
@@ -5188,13 +5223,13 @@
         </p:sp>
         <p:sp>
           <p:nvSpPr>
-            <p:cNvPr id="38" name="tx38"/>
+            <p:cNvPr id="39" name="tx39"/>
             <p:cNvSpPr/>
             <p:nvPr/>
           </p:nvSpPr>
           <p:spPr>
             <a:xfrm>
-              <a:off x="7376580" y="5785772"/>
+              <a:off x="7328020" y="3522791"/>
               <a:ext cx="124358" cy="80101"/>
             </a:xfrm>
             <a:prstGeom prst="rect">
@@ -5234,13 +5269,13 @@
         </p:sp>
         <p:sp>
           <p:nvSpPr>
-            <p:cNvPr id="39" name="tx39"/>
+            <p:cNvPr id="40" name="tx40"/>
             <p:cNvSpPr/>
             <p:nvPr/>
           </p:nvSpPr>
           <p:spPr>
             <a:xfrm>
-              <a:off x="1561815" y="5925448"/>
+              <a:off x="1561815" y="3662467"/>
               <a:ext cx="6311097" cy="100218"/>
             </a:xfrm>
             <a:prstGeom prst="rect">
@@ -5280,13 +5315,13 @@
         </p:sp>
         <p:sp>
           <p:nvSpPr>
-            <p:cNvPr id="40" name="tx40"/>
+            <p:cNvPr id="41" name="tx41"/>
             <p:cNvSpPr/>
             <p:nvPr/>
           </p:nvSpPr>
           <p:spPr>
             <a:xfrm rot="-5400000">
-              <a:off x="68446" y="3848213"/>
+              <a:off x="138035" y="2751517"/>
               <a:ext cx="1016904" cy="100218"/>
             </a:xfrm>
             <a:prstGeom prst="rect">
@@ -5326,13 +5361,13 @@
         </p:sp>
         <p:sp>
           <p:nvSpPr>
-            <p:cNvPr id="41" name="tx41"/>
+            <p:cNvPr id="42" name="tx42"/>
             <p:cNvSpPr/>
             <p:nvPr/>
           </p:nvSpPr>
           <p:spPr>
             <a:xfrm>
-              <a:off x="817517" y="1896563"/>
+              <a:off x="887106" y="1966152"/>
               <a:ext cx="6959864" cy="82021"/>
             </a:xfrm>
             <a:prstGeom prst="rect">
@@ -5372,13 +5407,3783 @@
         </p:sp>
         <p:sp>
           <p:nvSpPr>
-            <p:cNvPr id="42" name="tx42"/>
+            <p:cNvPr id="43" name="tx43"/>
             <p:cNvSpPr/>
             <p:nvPr/>
           </p:nvSpPr>
           <p:spPr>
             <a:xfrm>
-              <a:off x="817517" y="1669789"/>
+              <a:off x="887106" y="1739378"/>
+              <a:ext cx="3508461" cy="120152"/>
+            </a:xfrm>
+            <a:prstGeom prst="rect">
+              <a:avLst/>
+            </a:prstGeom>
+            <a:noFill/>
+          </p:spPr>
+          <p:txBody>
+            <a:bodyPr lIns="0" rIns="0" tIns="0" bIns="0" anchorCtr="1" anchor="ctr" wrap="none"/>
+            <a:lstStyle/>
+            <a:p>
+              <a:pPr algn="l" marL="0" marR="0" indent="0">
+                <a:lnSpc>
+                  <a:spcPts val="1320"/>
+                </a:lnSpc>
+                <a:spcBef>
+                  <a:spcPts val="0"/>
+                </a:spcBef>
+                <a:spcAft>
+                  <a:spcPts val="0"/>
+                </a:spcAft>
+              </a:pPr>
+              <a:r>
+                <a:rPr sz="1320">
+                  <a:solidFill>
+                    <a:srgbClr val="000000">
+                      <a:alpha val="100000"/>
+                    </a:srgbClr>
+                  </a:solidFill>
+                  <a:latin typeface="Helvetica"/>
+                  <a:cs typeface="Helvetica"/>
+                </a:rPr>
+                <a:t>AKI (KDIGO) (Sensitivity, Carboplatin AUC ≥ 3)</a:t>
+              </a:r>
+            </a:p>
+          </p:txBody>
+        </p:sp>
+        <p:sp>
+          <p:nvSpPr>
+            <p:cNvPr id="44" name="pl44"/>
+            <p:cNvSpPr/>
+            <p:nvPr/>
+          </p:nvSpPr>
+          <p:spPr>
+            <a:xfrm>
+              <a:off x="887106" y="5444019"/>
+              <a:ext cx="7660515" cy="0"/>
+            </a:xfrm>
+            <a:custGeom>
+              <a:avLst/>
+              <a:pathLst>
+                <a:path w="7660515" h="0">
+                  <a:moveTo>
+                    <a:pt x="0" y="0"/>
+                  </a:moveTo>
+                  <a:lnTo>
+                    <a:pt x="7660515" y="0"/>
+                  </a:lnTo>
+                  <a:lnTo>
+                    <a:pt x="7660515" y="0"/>
+                  </a:lnTo>
+                </a:path>
+              </a:pathLst>
+            </a:custGeom>
+            <a:ln w="6775" cap="flat">
+              <a:solidFill>
+                <a:srgbClr val="EBEBEB">
+                  <a:alpha val="100000"/>
+                </a:srgbClr>
+              </a:solidFill>
+              <a:prstDash val="solid"/>
+              <a:round/>
+            </a:ln>
+          </p:spPr>
+          <p:txBody>
+            <a:bodyPr/>
+            <a:lstStyle/>
+            <a:p/>
+          </p:txBody>
+        </p:sp>
+        <p:sp>
+          <p:nvSpPr>
+            <p:cNvPr id="45" name="pl45"/>
+            <p:cNvSpPr/>
+            <p:nvPr/>
+          </p:nvSpPr>
+          <p:spPr>
+            <a:xfrm>
+              <a:off x="887106" y="5144686"/>
+              <a:ext cx="7660515" cy="0"/>
+            </a:xfrm>
+            <a:custGeom>
+              <a:avLst/>
+              <a:pathLst>
+                <a:path w="7660515" h="0">
+                  <a:moveTo>
+                    <a:pt x="0" y="0"/>
+                  </a:moveTo>
+                  <a:lnTo>
+                    <a:pt x="7660515" y="0"/>
+                  </a:lnTo>
+                  <a:lnTo>
+                    <a:pt x="7660515" y="0"/>
+                  </a:lnTo>
+                </a:path>
+              </a:pathLst>
+            </a:custGeom>
+            <a:ln w="6775" cap="flat">
+              <a:solidFill>
+                <a:srgbClr val="EBEBEB">
+                  <a:alpha val="100000"/>
+                </a:srgbClr>
+              </a:solidFill>
+              <a:prstDash val="solid"/>
+              <a:round/>
+            </a:ln>
+          </p:spPr>
+          <p:txBody>
+            <a:bodyPr/>
+            <a:lstStyle/>
+            <a:p/>
+          </p:txBody>
+        </p:sp>
+        <p:sp>
+          <p:nvSpPr>
+            <p:cNvPr id="46" name="pl46"/>
+            <p:cNvSpPr/>
+            <p:nvPr/>
+          </p:nvSpPr>
+          <p:spPr>
+            <a:xfrm>
+              <a:off x="887106" y="4845352"/>
+              <a:ext cx="7660515" cy="0"/>
+            </a:xfrm>
+            <a:custGeom>
+              <a:avLst/>
+              <a:pathLst>
+                <a:path w="7660515" h="0">
+                  <a:moveTo>
+                    <a:pt x="0" y="0"/>
+                  </a:moveTo>
+                  <a:lnTo>
+                    <a:pt x="7660515" y="0"/>
+                  </a:lnTo>
+                  <a:lnTo>
+                    <a:pt x="7660515" y="0"/>
+                  </a:lnTo>
+                </a:path>
+              </a:pathLst>
+            </a:custGeom>
+            <a:ln w="6775" cap="flat">
+              <a:solidFill>
+                <a:srgbClr val="EBEBEB">
+                  <a:alpha val="100000"/>
+                </a:srgbClr>
+              </a:solidFill>
+              <a:prstDash val="solid"/>
+              <a:round/>
+            </a:ln>
+          </p:spPr>
+          <p:txBody>
+            <a:bodyPr/>
+            <a:lstStyle/>
+            <a:p/>
+          </p:txBody>
+        </p:sp>
+        <p:sp>
+          <p:nvSpPr>
+            <p:cNvPr id="47" name="pl47"/>
+            <p:cNvSpPr/>
+            <p:nvPr/>
+          </p:nvSpPr>
+          <p:spPr>
+            <a:xfrm>
+              <a:off x="887106" y="4546018"/>
+              <a:ext cx="7660515" cy="0"/>
+            </a:xfrm>
+            <a:custGeom>
+              <a:avLst/>
+              <a:pathLst>
+                <a:path w="7660515" h="0">
+                  <a:moveTo>
+                    <a:pt x="0" y="0"/>
+                  </a:moveTo>
+                  <a:lnTo>
+                    <a:pt x="7660515" y="0"/>
+                  </a:lnTo>
+                  <a:lnTo>
+                    <a:pt x="7660515" y="0"/>
+                  </a:lnTo>
+                </a:path>
+              </a:pathLst>
+            </a:custGeom>
+            <a:ln w="6775" cap="flat">
+              <a:solidFill>
+                <a:srgbClr val="EBEBEB">
+                  <a:alpha val="100000"/>
+                </a:srgbClr>
+              </a:solidFill>
+              <a:prstDash val="solid"/>
+              <a:round/>
+            </a:ln>
+          </p:spPr>
+          <p:txBody>
+            <a:bodyPr/>
+            <a:lstStyle/>
+            <a:p/>
+          </p:txBody>
+        </p:sp>
+        <p:sp>
+          <p:nvSpPr>
+            <p:cNvPr id="48" name="pl48"/>
+            <p:cNvSpPr/>
+            <p:nvPr/>
+          </p:nvSpPr>
+          <p:spPr>
+            <a:xfrm>
+              <a:off x="977504" y="4336484"/>
+              <a:ext cx="0" cy="1317069"/>
+            </a:xfrm>
+            <a:custGeom>
+              <a:avLst/>
+              <a:pathLst>
+                <a:path w="0" h="1317069">
+                  <a:moveTo>
+                    <a:pt x="0" y="1317069"/>
+                  </a:moveTo>
+                  <a:lnTo>
+                    <a:pt x="0" y="0"/>
+                  </a:lnTo>
+                  <a:lnTo>
+                    <a:pt x="0" y="0"/>
+                  </a:lnTo>
+                </a:path>
+              </a:pathLst>
+            </a:custGeom>
+            <a:ln w="6775" cap="flat">
+              <a:solidFill>
+                <a:srgbClr val="EBEBEB">
+                  <a:alpha val="100000"/>
+                </a:srgbClr>
+              </a:solidFill>
+              <a:prstDash val="solid"/>
+              <a:round/>
+            </a:ln>
+          </p:spPr>
+          <p:txBody>
+            <a:bodyPr/>
+            <a:lstStyle/>
+            <a:p/>
+          </p:txBody>
+        </p:sp>
+        <p:sp>
+          <p:nvSpPr>
+            <p:cNvPr id="49" name="pl49"/>
+            <p:cNvSpPr/>
+            <p:nvPr/>
+          </p:nvSpPr>
+          <p:spPr>
+            <a:xfrm>
+              <a:off x="1832530" y="4336484"/>
+              <a:ext cx="0" cy="1317069"/>
+            </a:xfrm>
+            <a:custGeom>
+              <a:avLst/>
+              <a:pathLst>
+                <a:path w="0" h="1317069">
+                  <a:moveTo>
+                    <a:pt x="0" y="1317069"/>
+                  </a:moveTo>
+                  <a:lnTo>
+                    <a:pt x="0" y="0"/>
+                  </a:lnTo>
+                  <a:lnTo>
+                    <a:pt x="0" y="0"/>
+                  </a:lnTo>
+                </a:path>
+              </a:pathLst>
+            </a:custGeom>
+            <a:ln w="6775" cap="flat">
+              <a:solidFill>
+                <a:srgbClr val="EBEBEB">
+                  <a:alpha val="100000"/>
+                </a:srgbClr>
+              </a:solidFill>
+              <a:prstDash val="solid"/>
+              <a:round/>
+            </a:ln>
+          </p:spPr>
+          <p:txBody>
+            <a:bodyPr/>
+            <a:lstStyle/>
+            <a:p/>
+          </p:txBody>
+        </p:sp>
+        <p:sp>
+          <p:nvSpPr>
+            <p:cNvPr id="50" name="pl50"/>
+            <p:cNvSpPr/>
+            <p:nvPr/>
+          </p:nvSpPr>
+          <p:spPr>
+            <a:xfrm>
+              <a:off x="2687556" y="4336484"/>
+              <a:ext cx="0" cy="1317069"/>
+            </a:xfrm>
+            <a:custGeom>
+              <a:avLst/>
+              <a:pathLst>
+                <a:path w="0" h="1317069">
+                  <a:moveTo>
+                    <a:pt x="0" y="1317069"/>
+                  </a:moveTo>
+                  <a:lnTo>
+                    <a:pt x="0" y="0"/>
+                  </a:lnTo>
+                  <a:lnTo>
+                    <a:pt x="0" y="0"/>
+                  </a:lnTo>
+                </a:path>
+              </a:pathLst>
+            </a:custGeom>
+            <a:ln w="6775" cap="flat">
+              <a:solidFill>
+                <a:srgbClr val="EBEBEB">
+                  <a:alpha val="100000"/>
+                </a:srgbClr>
+              </a:solidFill>
+              <a:prstDash val="solid"/>
+              <a:round/>
+            </a:ln>
+          </p:spPr>
+          <p:txBody>
+            <a:bodyPr/>
+            <a:lstStyle/>
+            <a:p/>
+          </p:txBody>
+        </p:sp>
+        <p:sp>
+          <p:nvSpPr>
+            <p:cNvPr id="51" name="pl51"/>
+            <p:cNvSpPr/>
+            <p:nvPr/>
+          </p:nvSpPr>
+          <p:spPr>
+            <a:xfrm>
+              <a:off x="3542582" y="4336484"/>
+              <a:ext cx="0" cy="1317069"/>
+            </a:xfrm>
+            <a:custGeom>
+              <a:avLst/>
+              <a:pathLst>
+                <a:path w="0" h="1317069">
+                  <a:moveTo>
+                    <a:pt x="0" y="1317069"/>
+                  </a:moveTo>
+                  <a:lnTo>
+                    <a:pt x="0" y="0"/>
+                  </a:lnTo>
+                  <a:lnTo>
+                    <a:pt x="0" y="0"/>
+                  </a:lnTo>
+                </a:path>
+              </a:pathLst>
+            </a:custGeom>
+            <a:ln w="6775" cap="flat">
+              <a:solidFill>
+                <a:srgbClr val="EBEBEB">
+                  <a:alpha val="100000"/>
+                </a:srgbClr>
+              </a:solidFill>
+              <a:prstDash val="solid"/>
+              <a:round/>
+            </a:ln>
+          </p:spPr>
+          <p:txBody>
+            <a:bodyPr/>
+            <a:lstStyle/>
+            <a:p/>
+          </p:txBody>
+        </p:sp>
+        <p:sp>
+          <p:nvSpPr>
+            <p:cNvPr id="52" name="pl52"/>
+            <p:cNvSpPr/>
+            <p:nvPr/>
+          </p:nvSpPr>
+          <p:spPr>
+            <a:xfrm>
+              <a:off x="4397608" y="4336484"/>
+              <a:ext cx="0" cy="1317069"/>
+            </a:xfrm>
+            <a:custGeom>
+              <a:avLst/>
+              <a:pathLst>
+                <a:path w="0" h="1317069">
+                  <a:moveTo>
+                    <a:pt x="0" y="1317069"/>
+                  </a:moveTo>
+                  <a:lnTo>
+                    <a:pt x="0" y="0"/>
+                  </a:lnTo>
+                  <a:lnTo>
+                    <a:pt x="0" y="0"/>
+                  </a:lnTo>
+                </a:path>
+              </a:pathLst>
+            </a:custGeom>
+            <a:ln w="6775" cap="flat">
+              <a:solidFill>
+                <a:srgbClr val="EBEBEB">
+                  <a:alpha val="100000"/>
+                </a:srgbClr>
+              </a:solidFill>
+              <a:prstDash val="solid"/>
+              <a:round/>
+            </a:ln>
+          </p:spPr>
+          <p:txBody>
+            <a:bodyPr/>
+            <a:lstStyle/>
+            <a:p/>
+          </p:txBody>
+        </p:sp>
+        <p:sp>
+          <p:nvSpPr>
+            <p:cNvPr id="53" name="pl53"/>
+            <p:cNvSpPr/>
+            <p:nvPr/>
+          </p:nvSpPr>
+          <p:spPr>
+            <a:xfrm>
+              <a:off x="5252634" y="4336484"/>
+              <a:ext cx="0" cy="1317069"/>
+            </a:xfrm>
+            <a:custGeom>
+              <a:avLst/>
+              <a:pathLst>
+                <a:path w="0" h="1317069">
+                  <a:moveTo>
+                    <a:pt x="0" y="1317069"/>
+                  </a:moveTo>
+                  <a:lnTo>
+                    <a:pt x="0" y="0"/>
+                  </a:lnTo>
+                  <a:lnTo>
+                    <a:pt x="0" y="0"/>
+                  </a:lnTo>
+                </a:path>
+              </a:pathLst>
+            </a:custGeom>
+            <a:ln w="6775" cap="flat">
+              <a:solidFill>
+                <a:srgbClr val="EBEBEB">
+                  <a:alpha val="100000"/>
+                </a:srgbClr>
+              </a:solidFill>
+              <a:prstDash val="solid"/>
+              <a:round/>
+            </a:ln>
+          </p:spPr>
+          <p:txBody>
+            <a:bodyPr/>
+            <a:lstStyle/>
+            <a:p/>
+          </p:txBody>
+        </p:sp>
+        <p:sp>
+          <p:nvSpPr>
+            <p:cNvPr id="54" name="pl54"/>
+            <p:cNvSpPr/>
+            <p:nvPr/>
+          </p:nvSpPr>
+          <p:spPr>
+            <a:xfrm>
+              <a:off x="6107660" y="4336484"/>
+              <a:ext cx="0" cy="1317069"/>
+            </a:xfrm>
+            <a:custGeom>
+              <a:avLst/>
+              <a:pathLst>
+                <a:path w="0" h="1317069">
+                  <a:moveTo>
+                    <a:pt x="0" y="1317069"/>
+                  </a:moveTo>
+                  <a:lnTo>
+                    <a:pt x="0" y="0"/>
+                  </a:lnTo>
+                  <a:lnTo>
+                    <a:pt x="0" y="0"/>
+                  </a:lnTo>
+                </a:path>
+              </a:pathLst>
+            </a:custGeom>
+            <a:ln w="6775" cap="flat">
+              <a:solidFill>
+                <a:srgbClr val="EBEBEB">
+                  <a:alpha val="100000"/>
+                </a:srgbClr>
+              </a:solidFill>
+              <a:prstDash val="solid"/>
+              <a:round/>
+            </a:ln>
+          </p:spPr>
+          <p:txBody>
+            <a:bodyPr/>
+            <a:lstStyle/>
+            <a:p/>
+          </p:txBody>
+        </p:sp>
+        <p:sp>
+          <p:nvSpPr>
+            <p:cNvPr id="55" name="pl55"/>
+            <p:cNvSpPr/>
+            <p:nvPr/>
+          </p:nvSpPr>
+          <p:spPr>
+            <a:xfrm>
+              <a:off x="6962686" y="4336484"/>
+              <a:ext cx="0" cy="1317069"/>
+            </a:xfrm>
+            <a:custGeom>
+              <a:avLst/>
+              <a:pathLst>
+                <a:path w="0" h="1317069">
+                  <a:moveTo>
+                    <a:pt x="0" y="1317069"/>
+                  </a:moveTo>
+                  <a:lnTo>
+                    <a:pt x="0" y="0"/>
+                  </a:lnTo>
+                  <a:lnTo>
+                    <a:pt x="0" y="0"/>
+                  </a:lnTo>
+                </a:path>
+              </a:pathLst>
+            </a:custGeom>
+            <a:ln w="6775" cap="flat">
+              <a:solidFill>
+                <a:srgbClr val="EBEBEB">
+                  <a:alpha val="100000"/>
+                </a:srgbClr>
+              </a:solidFill>
+              <a:prstDash val="solid"/>
+              <a:round/>
+            </a:ln>
+          </p:spPr>
+          <p:txBody>
+            <a:bodyPr/>
+            <a:lstStyle/>
+            <a:p/>
+          </p:txBody>
+        </p:sp>
+        <p:sp>
+          <p:nvSpPr>
+            <p:cNvPr id="56" name="pl56"/>
+            <p:cNvSpPr/>
+            <p:nvPr/>
+          </p:nvSpPr>
+          <p:spPr>
+            <a:xfrm>
+              <a:off x="7817712" y="4336484"/>
+              <a:ext cx="0" cy="1317069"/>
+            </a:xfrm>
+            <a:custGeom>
+              <a:avLst/>
+              <a:pathLst>
+                <a:path w="0" h="1317069">
+                  <a:moveTo>
+                    <a:pt x="0" y="1317069"/>
+                  </a:moveTo>
+                  <a:lnTo>
+                    <a:pt x="0" y="0"/>
+                  </a:lnTo>
+                  <a:lnTo>
+                    <a:pt x="0" y="0"/>
+                  </a:lnTo>
+                </a:path>
+              </a:pathLst>
+            </a:custGeom>
+            <a:ln w="6775" cap="flat">
+              <a:solidFill>
+                <a:srgbClr val="EBEBEB">
+                  <a:alpha val="100000"/>
+                </a:srgbClr>
+              </a:solidFill>
+              <a:prstDash val="solid"/>
+              <a:round/>
+            </a:ln>
+          </p:spPr>
+          <p:txBody>
+            <a:bodyPr/>
+            <a:lstStyle/>
+            <a:p/>
+          </p:txBody>
+        </p:sp>
+        <p:sp>
+          <p:nvSpPr>
+            <p:cNvPr id="57" name="pl57"/>
+            <p:cNvSpPr/>
+            <p:nvPr/>
+          </p:nvSpPr>
+          <p:spPr>
+            <a:xfrm>
+              <a:off x="887106" y="5593686"/>
+              <a:ext cx="7660515" cy="0"/>
+            </a:xfrm>
+            <a:custGeom>
+              <a:avLst/>
+              <a:pathLst>
+                <a:path w="7660515" h="0">
+                  <a:moveTo>
+                    <a:pt x="0" y="0"/>
+                  </a:moveTo>
+                  <a:lnTo>
+                    <a:pt x="7660515" y="0"/>
+                  </a:lnTo>
+                  <a:lnTo>
+                    <a:pt x="7660515" y="0"/>
+                  </a:lnTo>
+                </a:path>
+              </a:pathLst>
+            </a:custGeom>
+            <a:ln w="13550" cap="flat">
+              <a:solidFill>
+                <a:srgbClr val="EBEBEB">
+                  <a:alpha val="100000"/>
+                </a:srgbClr>
+              </a:solidFill>
+              <a:prstDash val="solid"/>
+              <a:round/>
+            </a:ln>
+          </p:spPr>
+          <p:txBody>
+            <a:bodyPr/>
+            <a:lstStyle/>
+            <a:p/>
+          </p:txBody>
+        </p:sp>
+        <p:sp>
+          <p:nvSpPr>
+            <p:cNvPr id="58" name="pl58"/>
+            <p:cNvSpPr/>
+            <p:nvPr/>
+          </p:nvSpPr>
+          <p:spPr>
+            <a:xfrm>
+              <a:off x="887106" y="5294352"/>
+              <a:ext cx="7660515" cy="0"/>
+            </a:xfrm>
+            <a:custGeom>
+              <a:avLst/>
+              <a:pathLst>
+                <a:path w="7660515" h="0">
+                  <a:moveTo>
+                    <a:pt x="0" y="0"/>
+                  </a:moveTo>
+                  <a:lnTo>
+                    <a:pt x="7660515" y="0"/>
+                  </a:lnTo>
+                  <a:lnTo>
+                    <a:pt x="7660515" y="0"/>
+                  </a:lnTo>
+                </a:path>
+              </a:pathLst>
+            </a:custGeom>
+            <a:ln w="13550" cap="flat">
+              <a:solidFill>
+                <a:srgbClr val="EBEBEB">
+                  <a:alpha val="100000"/>
+                </a:srgbClr>
+              </a:solidFill>
+              <a:prstDash val="solid"/>
+              <a:round/>
+            </a:ln>
+          </p:spPr>
+          <p:txBody>
+            <a:bodyPr/>
+            <a:lstStyle/>
+            <a:p/>
+          </p:txBody>
+        </p:sp>
+        <p:sp>
+          <p:nvSpPr>
+            <p:cNvPr id="59" name="pl59"/>
+            <p:cNvSpPr/>
+            <p:nvPr/>
+          </p:nvSpPr>
+          <p:spPr>
+            <a:xfrm>
+              <a:off x="887106" y="4995019"/>
+              <a:ext cx="7660515" cy="0"/>
+            </a:xfrm>
+            <a:custGeom>
+              <a:avLst/>
+              <a:pathLst>
+                <a:path w="7660515" h="0">
+                  <a:moveTo>
+                    <a:pt x="0" y="0"/>
+                  </a:moveTo>
+                  <a:lnTo>
+                    <a:pt x="7660515" y="0"/>
+                  </a:lnTo>
+                  <a:lnTo>
+                    <a:pt x="7660515" y="0"/>
+                  </a:lnTo>
+                </a:path>
+              </a:pathLst>
+            </a:custGeom>
+            <a:ln w="13550" cap="flat">
+              <a:solidFill>
+                <a:srgbClr val="EBEBEB">
+                  <a:alpha val="100000"/>
+                </a:srgbClr>
+              </a:solidFill>
+              <a:prstDash val="solid"/>
+              <a:round/>
+            </a:ln>
+          </p:spPr>
+          <p:txBody>
+            <a:bodyPr/>
+            <a:lstStyle/>
+            <a:p/>
+          </p:txBody>
+        </p:sp>
+        <p:sp>
+          <p:nvSpPr>
+            <p:cNvPr id="60" name="pl60"/>
+            <p:cNvSpPr/>
+            <p:nvPr/>
+          </p:nvSpPr>
+          <p:spPr>
+            <a:xfrm>
+              <a:off x="887106" y="4695685"/>
+              <a:ext cx="7660515" cy="0"/>
+            </a:xfrm>
+            <a:custGeom>
+              <a:avLst/>
+              <a:pathLst>
+                <a:path w="7660515" h="0">
+                  <a:moveTo>
+                    <a:pt x="0" y="0"/>
+                  </a:moveTo>
+                  <a:lnTo>
+                    <a:pt x="7660515" y="0"/>
+                  </a:lnTo>
+                  <a:lnTo>
+                    <a:pt x="7660515" y="0"/>
+                  </a:lnTo>
+                </a:path>
+              </a:pathLst>
+            </a:custGeom>
+            <a:ln w="13550" cap="flat">
+              <a:solidFill>
+                <a:srgbClr val="EBEBEB">
+                  <a:alpha val="100000"/>
+                </a:srgbClr>
+              </a:solidFill>
+              <a:prstDash val="solid"/>
+              <a:round/>
+            </a:ln>
+          </p:spPr>
+          <p:txBody>
+            <a:bodyPr/>
+            <a:lstStyle/>
+            <a:p/>
+          </p:txBody>
+        </p:sp>
+        <p:sp>
+          <p:nvSpPr>
+            <p:cNvPr id="61" name="pl61"/>
+            <p:cNvSpPr/>
+            <p:nvPr/>
+          </p:nvSpPr>
+          <p:spPr>
+            <a:xfrm>
+              <a:off x="887106" y="4396351"/>
+              <a:ext cx="7660515" cy="0"/>
+            </a:xfrm>
+            <a:custGeom>
+              <a:avLst/>
+              <a:pathLst>
+                <a:path w="7660515" h="0">
+                  <a:moveTo>
+                    <a:pt x="0" y="0"/>
+                  </a:moveTo>
+                  <a:lnTo>
+                    <a:pt x="7660515" y="0"/>
+                  </a:lnTo>
+                  <a:lnTo>
+                    <a:pt x="7660515" y="0"/>
+                  </a:lnTo>
+                </a:path>
+              </a:pathLst>
+            </a:custGeom>
+            <a:ln w="13550" cap="flat">
+              <a:solidFill>
+                <a:srgbClr val="EBEBEB">
+                  <a:alpha val="100000"/>
+                </a:srgbClr>
+              </a:solidFill>
+              <a:prstDash val="solid"/>
+              <a:round/>
+            </a:ln>
+          </p:spPr>
+          <p:txBody>
+            <a:bodyPr/>
+            <a:lstStyle/>
+            <a:p/>
+          </p:txBody>
+        </p:sp>
+        <p:sp>
+          <p:nvSpPr>
+            <p:cNvPr id="62" name="pl62"/>
+            <p:cNvSpPr/>
+            <p:nvPr/>
+          </p:nvSpPr>
+          <p:spPr>
+            <a:xfrm>
+              <a:off x="1405017" y="4336484"/>
+              <a:ext cx="0" cy="1317069"/>
+            </a:xfrm>
+            <a:custGeom>
+              <a:avLst/>
+              <a:pathLst>
+                <a:path w="0" h="1317069">
+                  <a:moveTo>
+                    <a:pt x="0" y="1317069"/>
+                  </a:moveTo>
+                  <a:lnTo>
+                    <a:pt x="0" y="0"/>
+                  </a:lnTo>
+                  <a:lnTo>
+                    <a:pt x="0" y="0"/>
+                  </a:lnTo>
+                </a:path>
+              </a:pathLst>
+            </a:custGeom>
+            <a:ln w="13550" cap="flat">
+              <a:solidFill>
+                <a:srgbClr val="EBEBEB">
+                  <a:alpha val="100000"/>
+                </a:srgbClr>
+              </a:solidFill>
+              <a:prstDash val="solid"/>
+              <a:round/>
+            </a:ln>
+          </p:spPr>
+          <p:txBody>
+            <a:bodyPr/>
+            <a:lstStyle/>
+            <a:p/>
+          </p:txBody>
+        </p:sp>
+        <p:sp>
+          <p:nvSpPr>
+            <p:cNvPr id="63" name="pl63"/>
+            <p:cNvSpPr/>
+            <p:nvPr/>
+          </p:nvSpPr>
+          <p:spPr>
+            <a:xfrm>
+              <a:off x="2260043" y="4336484"/>
+              <a:ext cx="0" cy="1317069"/>
+            </a:xfrm>
+            <a:custGeom>
+              <a:avLst/>
+              <a:pathLst>
+                <a:path w="0" h="1317069">
+                  <a:moveTo>
+                    <a:pt x="0" y="1317069"/>
+                  </a:moveTo>
+                  <a:lnTo>
+                    <a:pt x="0" y="0"/>
+                  </a:lnTo>
+                  <a:lnTo>
+                    <a:pt x="0" y="0"/>
+                  </a:lnTo>
+                </a:path>
+              </a:pathLst>
+            </a:custGeom>
+            <a:ln w="13550" cap="flat">
+              <a:solidFill>
+                <a:srgbClr val="EBEBEB">
+                  <a:alpha val="100000"/>
+                </a:srgbClr>
+              </a:solidFill>
+              <a:prstDash val="solid"/>
+              <a:round/>
+            </a:ln>
+          </p:spPr>
+          <p:txBody>
+            <a:bodyPr/>
+            <a:lstStyle/>
+            <a:p/>
+          </p:txBody>
+        </p:sp>
+        <p:sp>
+          <p:nvSpPr>
+            <p:cNvPr id="64" name="pl64"/>
+            <p:cNvSpPr/>
+            <p:nvPr/>
+          </p:nvSpPr>
+          <p:spPr>
+            <a:xfrm>
+              <a:off x="3115069" y="4336484"/>
+              <a:ext cx="0" cy="1317069"/>
+            </a:xfrm>
+            <a:custGeom>
+              <a:avLst/>
+              <a:pathLst>
+                <a:path w="0" h="1317069">
+                  <a:moveTo>
+                    <a:pt x="0" y="1317069"/>
+                  </a:moveTo>
+                  <a:lnTo>
+                    <a:pt x="0" y="0"/>
+                  </a:lnTo>
+                  <a:lnTo>
+                    <a:pt x="0" y="0"/>
+                  </a:lnTo>
+                </a:path>
+              </a:pathLst>
+            </a:custGeom>
+            <a:ln w="13550" cap="flat">
+              <a:solidFill>
+                <a:srgbClr val="EBEBEB">
+                  <a:alpha val="100000"/>
+                </a:srgbClr>
+              </a:solidFill>
+              <a:prstDash val="solid"/>
+              <a:round/>
+            </a:ln>
+          </p:spPr>
+          <p:txBody>
+            <a:bodyPr/>
+            <a:lstStyle/>
+            <a:p/>
+          </p:txBody>
+        </p:sp>
+        <p:sp>
+          <p:nvSpPr>
+            <p:cNvPr id="65" name="pl65"/>
+            <p:cNvSpPr/>
+            <p:nvPr/>
+          </p:nvSpPr>
+          <p:spPr>
+            <a:xfrm>
+              <a:off x="3970095" y="4336484"/>
+              <a:ext cx="0" cy="1317069"/>
+            </a:xfrm>
+            <a:custGeom>
+              <a:avLst/>
+              <a:pathLst>
+                <a:path w="0" h="1317069">
+                  <a:moveTo>
+                    <a:pt x="0" y="1317069"/>
+                  </a:moveTo>
+                  <a:lnTo>
+                    <a:pt x="0" y="0"/>
+                  </a:lnTo>
+                  <a:lnTo>
+                    <a:pt x="0" y="0"/>
+                  </a:lnTo>
+                </a:path>
+              </a:pathLst>
+            </a:custGeom>
+            <a:ln w="13550" cap="flat">
+              <a:solidFill>
+                <a:srgbClr val="EBEBEB">
+                  <a:alpha val="100000"/>
+                </a:srgbClr>
+              </a:solidFill>
+              <a:prstDash val="solid"/>
+              <a:round/>
+            </a:ln>
+          </p:spPr>
+          <p:txBody>
+            <a:bodyPr/>
+            <a:lstStyle/>
+            <a:p/>
+          </p:txBody>
+        </p:sp>
+        <p:sp>
+          <p:nvSpPr>
+            <p:cNvPr id="66" name="pl66"/>
+            <p:cNvSpPr/>
+            <p:nvPr/>
+          </p:nvSpPr>
+          <p:spPr>
+            <a:xfrm>
+              <a:off x="4825121" y="4336484"/>
+              <a:ext cx="0" cy="1317069"/>
+            </a:xfrm>
+            <a:custGeom>
+              <a:avLst/>
+              <a:pathLst>
+                <a:path w="0" h="1317069">
+                  <a:moveTo>
+                    <a:pt x="0" y="1317069"/>
+                  </a:moveTo>
+                  <a:lnTo>
+                    <a:pt x="0" y="0"/>
+                  </a:lnTo>
+                  <a:lnTo>
+                    <a:pt x="0" y="0"/>
+                  </a:lnTo>
+                </a:path>
+              </a:pathLst>
+            </a:custGeom>
+            <a:ln w="13550" cap="flat">
+              <a:solidFill>
+                <a:srgbClr val="EBEBEB">
+                  <a:alpha val="100000"/>
+                </a:srgbClr>
+              </a:solidFill>
+              <a:prstDash val="solid"/>
+              <a:round/>
+            </a:ln>
+          </p:spPr>
+          <p:txBody>
+            <a:bodyPr/>
+            <a:lstStyle/>
+            <a:p/>
+          </p:txBody>
+        </p:sp>
+        <p:sp>
+          <p:nvSpPr>
+            <p:cNvPr id="67" name="pl67"/>
+            <p:cNvSpPr/>
+            <p:nvPr/>
+          </p:nvSpPr>
+          <p:spPr>
+            <a:xfrm>
+              <a:off x="5680147" y="4336484"/>
+              <a:ext cx="0" cy="1317069"/>
+            </a:xfrm>
+            <a:custGeom>
+              <a:avLst/>
+              <a:pathLst>
+                <a:path w="0" h="1317069">
+                  <a:moveTo>
+                    <a:pt x="0" y="1317069"/>
+                  </a:moveTo>
+                  <a:lnTo>
+                    <a:pt x="0" y="0"/>
+                  </a:lnTo>
+                  <a:lnTo>
+                    <a:pt x="0" y="0"/>
+                  </a:lnTo>
+                </a:path>
+              </a:pathLst>
+            </a:custGeom>
+            <a:ln w="13550" cap="flat">
+              <a:solidFill>
+                <a:srgbClr val="EBEBEB">
+                  <a:alpha val="100000"/>
+                </a:srgbClr>
+              </a:solidFill>
+              <a:prstDash val="solid"/>
+              <a:round/>
+            </a:ln>
+          </p:spPr>
+          <p:txBody>
+            <a:bodyPr/>
+            <a:lstStyle/>
+            <a:p/>
+          </p:txBody>
+        </p:sp>
+        <p:sp>
+          <p:nvSpPr>
+            <p:cNvPr id="68" name="pl68"/>
+            <p:cNvSpPr/>
+            <p:nvPr/>
+          </p:nvSpPr>
+          <p:spPr>
+            <a:xfrm>
+              <a:off x="6535173" y="4336484"/>
+              <a:ext cx="0" cy="1317069"/>
+            </a:xfrm>
+            <a:custGeom>
+              <a:avLst/>
+              <a:pathLst>
+                <a:path w="0" h="1317069">
+                  <a:moveTo>
+                    <a:pt x="0" y="1317069"/>
+                  </a:moveTo>
+                  <a:lnTo>
+                    <a:pt x="0" y="0"/>
+                  </a:lnTo>
+                  <a:lnTo>
+                    <a:pt x="0" y="0"/>
+                  </a:lnTo>
+                </a:path>
+              </a:pathLst>
+            </a:custGeom>
+            <a:ln w="13550" cap="flat">
+              <a:solidFill>
+                <a:srgbClr val="EBEBEB">
+                  <a:alpha val="100000"/>
+                </a:srgbClr>
+              </a:solidFill>
+              <a:prstDash val="solid"/>
+              <a:round/>
+            </a:ln>
+          </p:spPr>
+          <p:txBody>
+            <a:bodyPr/>
+            <a:lstStyle/>
+            <a:p/>
+          </p:txBody>
+        </p:sp>
+        <p:sp>
+          <p:nvSpPr>
+            <p:cNvPr id="69" name="pl69"/>
+            <p:cNvSpPr/>
+            <p:nvPr/>
+          </p:nvSpPr>
+          <p:spPr>
+            <a:xfrm>
+              <a:off x="7390199" y="4336484"/>
+              <a:ext cx="0" cy="1317069"/>
+            </a:xfrm>
+            <a:custGeom>
+              <a:avLst/>
+              <a:pathLst>
+                <a:path w="0" h="1317069">
+                  <a:moveTo>
+                    <a:pt x="0" y="1317069"/>
+                  </a:moveTo>
+                  <a:lnTo>
+                    <a:pt x="0" y="0"/>
+                  </a:lnTo>
+                  <a:lnTo>
+                    <a:pt x="0" y="0"/>
+                  </a:lnTo>
+                </a:path>
+              </a:pathLst>
+            </a:custGeom>
+            <a:ln w="13550" cap="flat">
+              <a:solidFill>
+                <a:srgbClr val="EBEBEB">
+                  <a:alpha val="100000"/>
+                </a:srgbClr>
+              </a:solidFill>
+              <a:prstDash val="solid"/>
+              <a:round/>
+            </a:ln>
+          </p:spPr>
+          <p:txBody>
+            <a:bodyPr/>
+            <a:lstStyle/>
+            <a:p/>
+          </p:txBody>
+        </p:sp>
+        <p:sp>
+          <p:nvSpPr>
+            <p:cNvPr id="70" name="pl70"/>
+            <p:cNvSpPr/>
+            <p:nvPr/>
+          </p:nvSpPr>
+          <p:spPr>
+            <a:xfrm>
+              <a:off x="8245225" y="4336484"/>
+              <a:ext cx="0" cy="1317069"/>
+            </a:xfrm>
+            <a:custGeom>
+              <a:avLst/>
+              <a:pathLst>
+                <a:path w="0" h="1317069">
+                  <a:moveTo>
+                    <a:pt x="0" y="1317069"/>
+                  </a:moveTo>
+                  <a:lnTo>
+                    <a:pt x="0" y="0"/>
+                  </a:lnTo>
+                  <a:lnTo>
+                    <a:pt x="0" y="0"/>
+                  </a:lnTo>
+                </a:path>
+              </a:pathLst>
+            </a:custGeom>
+            <a:ln w="13550" cap="flat">
+              <a:solidFill>
+                <a:srgbClr val="EBEBEB">
+                  <a:alpha val="100000"/>
+                </a:srgbClr>
+              </a:solidFill>
+              <a:prstDash val="solid"/>
+              <a:round/>
+            </a:ln>
+          </p:spPr>
+          <p:txBody>
+            <a:bodyPr/>
+            <a:lstStyle/>
+            <a:p/>
+          </p:txBody>
+        </p:sp>
+        <p:sp>
+          <p:nvSpPr>
+            <p:cNvPr id="71" name="pg71"/>
+            <p:cNvSpPr/>
+            <p:nvPr/>
+          </p:nvSpPr>
+          <p:spPr>
+            <a:xfrm>
+              <a:off x="1235312" y="4336484"/>
+              <a:ext cx="6964104" cy="1212190"/>
+            </a:xfrm>
+            <a:custGeom>
+              <a:avLst/>
+              <a:pathLst>
+                <a:path w="6964104" h="1212190">
+                  <a:moveTo>
+                    <a:pt x="112635" y="0"/>
+                  </a:moveTo>
+                  <a:lnTo>
+                    <a:pt x="140688" y="17197"/>
+                  </a:lnTo>
+                  <a:lnTo>
+                    <a:pt x="211033" y="58870"/>
+                  </a:lnTo>
+                  <a:lnTo>
+                    <a:pt x="281377" y="99143"/>
+                  </a:lnTo>
+                  <a:lnTo>
+                    <a:pt x="351722" y="138062"/>
+                  </a:lnTo>
+                  <a:lnTo>
+                    <a:pt x="422066" y="175673"/>
+                  </a:lnTo>
+                  <a:lnTo>
+                    <a:pt x="492411" y="212021"/>
+                  </a:lnTo>
+                  <a:lnTo>
+                    <a:pt x="562755" y="247146"/>
+                  </a:lnTo>
+                  <a:lnTo>
+                    <a:pt x="633100" y="281092"/>
+                  </a:lnTo>
+                  <a:lnTo>
+                    <a:pt x="703444" y="313896"/>
+                  </a:lnTo>
+                  <a:lnTo>
+                    <a:pt x="773789" y="345598"/>
+                  </a:lnTo>
+                  <a:lnTo>
+                    <a:pt x="844133" y="376235"/>
+                  </a:lnTo>
+                  <a:lnTo>
+                    <a:pt x="914478" y="405842"/>
+                  </a:lnTo>
+                  <a:lnTo>
+                    <a:pt x="984822" y="434454"/>
+                  </a:lnTo>
+                  <a:lnTo>
+                    <a:pt x="1055167" y="462104"/>
+                  </a:lnTo>
+                  <a:lnTo>
+                    <a:pt x="1125511" y="488825"/>
+                  </a:lnTo>
+                  <a:lnTo>
+                    <a:pt x="1195856" y="514648"/>
+                  </a:lnTo>
+                  <a:lnTo>
+                    <a:pt x="1266200" y="539603"/>
+                  </a:lnTo>
+                  <a:lnTo>
+                    <a:pt x="1336545" y="563720"/>
+                  </a:lnTo>
+                  <a:lnTo>
+                    <a:pt x="1406889" y="587026"/>
+                  </a:lnTo>
+                  <a:lnTo>
+                    <a:pt x="1477234" y="609549"/>
+                  </a:lnTo>
+                  <a:lnTo>
+                    <a:pt x="1547578" y="631315"/>
+                  </a:lnTo>
+                  <a:lnTo>
+                    <a:pt x="1617923" y="652349"/>
+                  </a:lnTo>
+                  <a:lnTo>
+                    <a:pt x="1688267" y="672677"/>
+                  </a:lnTo>
+                  <a:lnTo>
+                    <a:pt x="1758612" y="692321"/>
+                  </a:lnTo>
+                  <a:lnTo>
+                    <a:pt x="1828956" y="711305"/>
+                  </a:lnTo>
+                  <a:lnTo>
+                    <a:pt x="1899301" y="729651"/>
+                  </a:lnTo>
+                  <a:lnTo>
+                    <a:pt x="1969645" y="747381"/>
+                  </a:lnTo>
+                  <a:lnTo>
+                    <a:pt x="2039990" y="764514"/>
+                  </a:lnTo>
+                  <a:lnTo>
+                    <a:pt x="2110334" y="781072"/>
+                  </a:lnTo>
+                  <a:lnTo>
+                    <a:pt x="2180679" y="797074"/>
+                  </a:lnTo>
+                  <a:lnTo>
+                    <a:pt x="2251023" y="812537"/>
+                  </a:lnTo>
+                  <a:lnTo>
+                    <a:pt x="2321368" y="827481"/>
+                  </a:lnTo>
+                  <a:lnTo>
+                    <a:pt x="2391712" y="841923"/>
+                  </a:lnTo>
+                  <a:lnTo>
+                    <a:pt x="2462057" y="855880"/>
+                  </a:lnTo>
+                  <a:lnTo>
+                    <a:pt x="2532401" y="869367"/>
+                  </a:lnTo>
+                  <a:lnTo>
+                    <a:pt x="2602746" y="882401"/>
+                  </a:lnTo>
+                  <a:lnTo>
+                    <a:pt x="2673090" y="894997"/>
+                  </a:lnTo>
+                  <a:lnTo>
+                    <a:pt x="2743435" y="907170"/>
+                  </a:lnTo>
+                  <a:lnTo>
+                    <a:pt x="2813779" y="918933"/>
+                  </a:lnTo>
+                  <a:lnTo>
+                    <a:pt x="2884124" y="930302"/>
+                  </a:lnTo>
+                  <a:lnTo>
+                    <a:pt x="2954468" y="941288"/>
+                  </a:lnTo>
+                  <a:lnTo>
+                    <a:pt x="3024813" y="951905"/>
+                  </a:lnTo>
+                  <a:lnTo>
+                    <a:pt x="3095157" y="958011"/>
+                  </a:lnTo>
+                  <a:lnTo>
+                    <a:pt x="3165502" y="958347"/>
+                  </a:lnTo>
+                  <a:lnTo>
+                    <a:pt x="3235846" y="958684"/>
+                  </a:lnTo>
+                  <a:lnTo>
+                    <a:pt x="3306191" y="959020"/>
+                  </a:lnTo>
+                  <a:lnTo>
+                    <a:pt x="3376535" y="959356"/>
+                  </a:lnTo>
+                  <a:lnTo>
+                    <a:pt x="3446880" y="959691"/>
+                  </a:lnTo>
+                  <a:lnTo>
+                    <a:pt x="3517224" y="960026"/>
+                  </a:lnTo>
+                  <a:lnTo>
+                    <a:pt x="3587569" y="960361"/>
+                  </a:lnTo>
+                  <a:lnTo>
+                    <a:pt x="3657913" y="960695"/>
+                  </a:lnTo>
+                  <a:lnTo>
+                    <a:pt x="3728257" y="961029"/>
+                  </a:lnTo>
+                  <a:lnTo>
+                    <a:pt x="3798602" y="961362"/>
+                  </a:lnTo>
+                  <a:lnTo>
+                    <a:pt x="3868946" y="961695"/>
+                  </a:lnTo>
+                  <a:lnTo>
+                    <a:pt x="3939291" y="962028"/>
+                  </a:lnTo>
+                  <a:lnTo>
+                    <a:pt x="4009635" y="962360"/>
+                  </a:lnTo>
+                  <a:lnTo>
+                    <a:pt x="4079980" y="962692"/>
+                  </a:lnTo>
+                  <a:lnTo>
+                    <a:pt x="4150324" y="963024"/>
+                  </a:lnTo>
+                  <a:lnTo>
+                    <a:pt x="4220669" y="963355"/>
+                  </a:lnTo>
+                  <a:lnTo>
+                    <a:pt x="4291013" y="963686"/>
+                  </a:lnTo>
+                  <a:lnTo>
+                    <a:pt x="4361358" y="964016"/>
+                  </a:lnTo>
+                  <a:lnTo>
+                    <a:pt x="4431702" y="964346"/>
+                  </a:lnTo>
+                  <a:lnTo>
+                    <a:pt x="4502047" y="964676"/>
+                  </a:lnTo>
+                  <a:lnTo>
+                    <a:pt x="4572391" y="965005"/>
+                  </a:lnTo>
+                  <a:lnTo>
+                    <a:pt x="4642736" y="965334"/>
+                  </a:lnTo>
+                  <a:lnTo>
+                    <a:pt x="4713080" y="965663"/>
+                  </a:lnTo>
+                  <a:lnTo>
+                    <a:pt x="4783425" y="965991"/>
+                  </a:lnTo>
+                  <a:lnTo>
+                    <a:pt x="4853769" y="966319"/>
+                  </a:lnTo>
+                  <a:lnTo>
+                    <a:pt x="4924114" y="966646"/>
+                  </a:lnTo>
+                  <a:lnTo>
+                    <a:pt x="4994458" y="966974"/>
+                  </a:lnTo>
+                  <a:lnTo>
+                    <a:pt x="5064803" y="967300"/>
+                  </a:lnTo>
+                  <a:lnTo>
+                    <a:pt x="5135147" y="967627"/>
+                  </a:lnTo>
+                  <a:lnTo>
+                    <a:pt x="5205492" y="967953"/>
+                  </a:lnTo>
+                  <a:lnTo>
+                    <a:pt x="5275836" y="968278"/>
+                  </a:lnTo>
+                  <a:lnTo>
+                    <a:pt x="5346181" y="968604"/>
+                  </a:lnTo>
+                  <a:lnTo>
+                    <a:pt x="5416525" y="968929"/>
+                  </a:lnTo>
+                  <a:lnTo>
+                    <a:pt x="5486870" y="969253"/>
+                  </a:lnTo>
+                  <a:lnTo>
+                    <a:pt x="5557214" y="969577"/>
+                  </a:lnTo>
+                  <a:lnTo>
+                    <a:pt x="5627559" y="969901"/>
+                  </a:lnTo>
+                  <a:lnTo>
+                    <a:pt x="5697903" y="970225"/>
+                  </a:lnTo>
+                  <a:lnTo>
+                    <a:pt x="5768248" y="970548"/>
+                  </a:lnTo>
+                  <a:lnTo>
+                    <a:pt x="5838592" y="970871"/>
+                  </a:lnTo>
+                  <a:lnTo>
+                    <a:pt x="5908937" y="971193"/>
+                  </a:lnTo>
+                  <a:lnTo>
+                    <a:pt x="5979281" y="971515"/>
+                  </a:lnTo>
+                  <a:lnTo>
+                    <a:pt x="6049626" y="971837"/>
+                  </a:lnTo>
+                  <a:lnTo>
+                    <a:pt x="6119970" y="972158"/>
+                  </a:lnTo>
+                  <a:lnTo>
+                    <a:pt x="6190315" y="972479"/>
+                  </a:lnTo>
+                  <a:lnTo>
+                    <a:pt x="6260659" y="972799"/>
+                  </a:lnTo>
+                  <a:lnTo>
+                    <a:pt x="6331004" y="973120"/>
+                  </a:lnTo>
+                  <a:lnTo>
+                    <a:pt x="6401348" y="973439"/>
+                  </a:lnTo>
+                  <a:lnTo>
+                    <a:pt x="6471693" y="973759"/>
+                  </a:lnTo>
+                  <a:lnTo>
+                    <a:pt x="6542037" y="974078"/>
+                  </a:lnTo>
+                  <a:lnTo>
+                    <a:pt x="6612382" y="974397"/>
+                  </a:lnTo>
+                  <a:lnTo>
+                    <a:pt x="6682726" y="974715"/>
+                  </a:lnTo>
+                  <a:lnTo>
+                    <a:pt x="6753071" y="975033"/>
+                  </a:lnTo>
+                  <a:lnTo>
+                    <a:pt x="6823415" y="975351"/>
+                  </a:lnTo>
+                  <a:lnTo>
+                    <a:pt x="6893760" y="975668"/>
+                  </a:lnTo>
+                  <a:lnTo>
+                    <a:pt x="6964104" y="975985"/>
+                  </a:lnTo>
+                  <a:lnTo>
+                    <a:pt x="6964104" y="1212190"/>
+                  </a:lnTo>
+                  <a:lnTo>
+                    <a:pt x="6893760" y="1210625"/>
+                  </a:lnTo>
+                  <a:lnTo>
+                    <a:pt x="6823415" y="1209005"/>
+                  </a:lnTo>
+                  <a:lnTo>
+                    <a:pt x="6753071" y="1207329"/>
+                  </a:lnTo>
+                  <a:lnTo>
+                    <a:pt x="6682726" y="1205595"/>
+                  </a:lnTo>
+                  <a:lnTo>
+                    <a:pt x="6612382" y="1203800"/>
+                  </a:lnTo>
+                  <a:lnTo>
+                    <a:pt x="6542037" y="1201943"/>
+                  </a:lnTo>
+                  <a:lnTo>
+                    <a:pt x="6471693" y="1200021"/>
+                  </a:lnTo>
+                  <a:lnTo>
+                    <a:pt x="6401348" y="1198033"/>
+                  </a:lnTo>
+                  <a:lnTo>
+                    <a:pt x="6331004" y="1195975"/>
+                  </a:lnTo>
+                  <a:lnTo>
+                    <a:pt x="6260659" y="1193846"/>
+                  </a:lnTo>
+                  <a:lnTo>
+                    <a:pt x="6190315" y="1191642"/>
+                  </a:lnTo>
+                  <a:lnTo>
+                    <a:pt x="6119970" y="1189362"/>
+                  </a:lnTo>
+                  <a:lnTo>
+                    <a:pt x="6049626" y="1187003"/>
+                  </a:lnTo>
+                  <a:lnTo>
+                    <a:pt x="5979281" y="1184562"/>
+                  </a:lnTo>
+                  <a:lnTo>
+                    <a:pt x="5908937" y="1182036"/>
+                  </a:lnTo>
+                  <a:lnTo>
+                    <a:pt x="5838592" y="1179422"/>
+                  </a:lnTo>
+                  <a:lnTo>
+                    <a:pt x="5768248" y="1176717"/>
+                  </a:lnTo>
+                  <a:lnTo>
+                    <a:pt x="5697903" y="1173918"/>
+                  </a:lnTo>
+                  <a:lnTo>
+                    <a:pt x="5627559" y="1171022"/>
+                  </a:lnTo>
+                  <a:lnTo>
+                    <a:pt x="5557214" y="1168025"/>
+                  </a:lnTo>
+                  <a:lnTo>
+                    <a:pt x="5486870" y="1164924"/>
+                  </a:lnTo>
+                  <a:lnTo>
+                    <a:pt x="5416525" y="1161715"/>
+                  </a:lnTo>
+                  <a:lnTo>
+                    <a:pt x="5346181" y="1158394"/>
+                  </a:lnTo>
+                  <a:lnTo>
+                    <a:pt x="5275836" y="1154958"/>
+                  </a:lnTo>
+                  <a:lnTo>
+                    <a:pt x="5205492" y="1151402"/>
+                  </a:lnTo>
+                  <a:lnTo>
+                    <a:pt x="5135147" y="1147723"/>
+                  </a:lnTo>
+                  <a:lnTo>
+                    <a:pt x="5064803" y="1143915"/>
+                  </a:lnTo>
+                  <a:lnTo>
+                    <a:pt x="4994458" y="1139976"/>
+                  </a:lnTo>
+                  <a:lnTo>
+                    <a:pt x="4924114" y="1135899"/>
+                  </a:lnTo>
+                  <a:lnTo>
+                    <a:pt x="4853769" y="1131681"/>
+                  </a:lnTo>
+                  <a:lnTo>
+                    <a:pt x="4783425" y="1127316"/>
+                  </a:lnTo>
+                  <a:lnTo>
+                    <a:pt x="4713080" y="1122799"/>
+                  </a:lnTo>
+                  <a:lnTo>
+                    <a:pt x="4642736" y="1118125"/>
+                  </a:lnTo>
+                  <a:lnTo>
+                    <a:pt x="4572391" y="1113288"/>
+                  </a:lnTo>
+                  <a:lnTo>
+                    <a:pt x="4502047" y="1108283"/>
+                  </a:lnTo>
+                  <a:lnTo>
+                    <a:pt x="4431702" y="1103105"/>
+                  </a:lnTo>
+                  <a:lnTo>
+                    <a:pt x="4361358" y="1097746"/>
+                  </a:lnTo>
+                  <a:lnTo>
+                    <a:pt x="4291013" y="1092200"/>
+                  </a:lnTo>
+                  <a:lnTo>
+                    <a:pt x="4220669" y="1086462"/>
+                  </a:lnTo>
+                  <a:lnTo>
+                    <a:pt x="4150324" y="1080525"/>
+                  </a:lnTo>
+                  <a:lnTo>
+                    <a:pt x="4079980" y="1074381"/>
+                  </a:lnTo>
+                  <a:lnTo>
+                    <a:pt x="4009635" y="1068023"/>
+                  </a:lnTo>
+                  <a:lnTo>
+                    <a:pt x="3939291" y="1061444"/>
+                  </a:lnTo>
+                  <a:lnTo>
+                    <a:pt x="3868946" y="1054636"/>
+                  </a:lnTo>
+                  <a:lnTo>
+                    <a:pt x="3798602" y="1047592"/>
+                  </a:lnTo>
+                  <a:lnTo>
+                    <a:pt x="3728257" y="1040302"/>
+                  </a:lnTo>
+                  <a:lnTo>
+                    <a:pt x="3657913" y="1032759"/>
+                  </a:lnTo>
+                  <a:lnTo>
+                    <a:pt x="3587569" y="1024954"/>
+                  </a:lnTo>
+                  <a:lnTo>
+                    <a:pt x="3517224" y="1016878"/>
+                  </a:lnTo>
+                  <a:lnTo>
+                    <a:pt x="3446880" y="1008520"/>
+                  </a:lnTo>
+                  <a:lnTo>
+                    <a:pt x="3376535" y="999872"/>
+                  </a:lnTo>
+                  <a:lnTo>
+                    <a:pt x="3306191" y="990923"/>
+                  </a:lnTo>
+                  <a:lnTo>
+                    <a:pt x="3235846" y="981663"/>
+                  </a:lnTo>
+                  <a:lnTo>
+                    <a:pt x="3165502" y="972081"/>
+                  </a:lnTo>
+                  <a:lnTo>
+                    <a:pt x="3095157" y="962165"/>
+                  </a:lnTo>
+                  <a:lnTo>
+                    <a:pt x="3024813" y="957673"/>
+                  </a:lnTo>
+                  <a:lnTo>
+                    <a:pt x="2954468" y="957336"/>
+                  </a:lnTo>
+                  <a:lnTo>
+                    <a:pt x="2884124" y="956998"/>
+                  </a:lnTo>
+                  <a:lnTo>
+                    <a:pt x="2813779" y="956659"/>
+                  </a:lnTo>
+                  <a:lnTo>
+                    <a:pt x="2743435" y="956321"/>
+                  </a:lnTo>
+                  <a:lnTo>
+                    <a:pt x="2673090" y="955981"/>
+                  </a:lnTo>
+                  <a:lnTo>
+                    <a:pt x="2602746" y="955642"/>
+                  </a:lnTo>
+                  <a:lnTo>
+                    <a:pt x="2532401" y="955302"/>
+                  </a:lnTo>
+                  <a:lnTo>
+                    <a:pt x="2462057" y="954962"/>
+                  </a:lnTo>
+                  <a:lnTo>
+                    <a:pt x="2391712" y="954621"/>
+                  </a:lnTo>
+                  <a:lnTo>
+                    <a:pt x="2321368" y="954280"/>
+                  </a:lnTo>
+                  <a:lnTo>
+                    <a:pt x="2251023" y="953939"/>
+                  </a:lnTo>
+                  <a:lnTo>
+                    <a:pt x="2180679" y="953597"/>
+                  </a:lnTo>
+                  <a:lnTo>
+                    <a:pt x="2110334" y="953255"/>
+                  </a:lnTo>
+                  <a:lnTo>
+                    <a:pt x="2039990" y="952912"/>
+                  </a:lnTo>
+                  <a:lnTo>
+                    <a:pt x="1969645" y="952569"/>
+                  </a:lnTo>
+                  <a:lnTo>
+                    <a:pt x="1899301" y="952226"/>
+                  </a:lnTo>
+                  <a:lnTo>
+                    <a:pt x="1828956" y="951882"/>
+                  </a:lnTo>
+                  <a:lnTo>
+                    <a:pt x="1758612" y="951538"/>
+                  </a:lnTo>
+                  <a:lnTo>
+                    <a:pt x="1688267" y="951193"/>
+                  </a:lnTo>
+                  <a:lnTo>
+                    <a:pt x="1617923" y="950848"/>
+                  </a:lnTo>
+                  <a:lnTo>
+                    <a:pt x="1547578" y="950503"/>
+                  </a:lnTo>
+                  <a:lnTo>
+                    <a:pt x="1477234" y="950157"/>
+                  </a:lnTo>
+                  <a:lnTo>
+                    <a:pt x="1406889" y="949811"/>
+                  </a:lnTo>
+                  <a:lnTo>
+                    <a:pt x="1336545" y="949465"/>
+                  </a:lnTo>
+                  <a:lnTo>
+                    <a:pt x="1266200" y="949118"/>
+                  </a:lnTo>
+                  <a:lnTo>
+                    <a:pt x="1195856" y="948771"/>
+                  </a:lnTo>
+                  <a:lnTo>
+                    <a:pt x="1125511" y="948423"/>
+                  </a:lnTo>
+                  <a:lnTo>
+                    <a:pt x="1055167" y="948075"/>
+                  </a:lnTo>
+                  <a:lnTo>
+                    <a:pt x="984822" y="947727"/>
+                  </a:lnTo>
+                  <a:lnTo>
+                    <a:pt x="914478" y="947378"/>
+                  </a:lnTo>
+                  <a:lnTo>
+                    <a:pt x="844133" y="947028"/>
+                  </a:lnTo>
+                  <a:lnTo>
+                    <a:pt x="773789" y="946679"/>
+                  </a:lnTo>
+                  <a:lnTo>
+                    <a:pt x="703444" y="946329"/>
+                  </a:lnTo>
+                  <a:lnTo>
+                    <a:pt x="633100" y="945978"/>
+                  </a:lnTo>
+                  <a:lnTo>
+                    <a:pt x="562755" y="945628"/>
+                  </a:lnTo>
+                  <a:lnTo>
+                    <a:pt x="492411" y="945277"/>
+                  </a:lnTo>
+                  <a:lnTo>
+                    <a:pt x="422066" y="944925"/>
+                  </a:lnTo>
+                  <a:lnTo>
+                    <a:pt x="351722" y="944573"/>
+                  </a:lnTo>
+                  <a:lnTo>
+                    <a:pt x="281377" y="944221"/>
+                  </a:lnTo>
+                  <a:lnTo>
+                    <a:pt x="211033" y="943868"/>
+                  </a:lnTo>
+                  <a:lnTo>
+                    <a:pt x="140688" y="943515"/>
+                  </a:lnTo>
+                  <a:lnTo>
+                    <a:pt x="70344" y="943161"/>
+                  </a:lnTo>
+                  <a:lnTo>
+                    <a:pt x="0" y="942807"/>
+                  </a:lnTo>
+                  <a:close/>
+                </a:path>
+              </a:pathLst>
+            </a:custGeom>
+            <a:solidFill>
+              <a:srgbClr val="FF8C00">
+                <a:alpha val="20000"/>
+              </a:srgbClr>
+            </a:solidFill>
+          </p:spPr>
+          <p:txBody>
+            <a:bodyPr/>
+            <a:lstStyle/>
+            <a:p/>
+          </p:txBody>
+        </p:sp>
+        <p:sp>
+          <p:nvSpPr>
+            <p:cNvPr id="72" name="pl72"/>
+            <p:cNvSpPr/>
+            <p:nvPr/>
+          </p:nvSpPr>
+          <p:spPr>
+            <a:xfrm>
+              <a:off x="1347947" y="4336484"/>
+              <a:ext cx="6851469" cy="975985"/>
+            </a:xfrm>
+            <a:custGeom>
+              <a:avLst/>
+              <a:pathLst>
+                <a:path w="6851469" h="975985">
+                  <a:moveTo>
+                    <a:pt x="0" y="0"/>
+                  </a:moveTo>
+                  <a:lnTo>
+                    <a:pt x="28053" y="17197"/>
+                  </a:lnTo>
+                  <a:lnTo>
+                    <a:pt x="98398" y="58870"/>
+                  </a:lnTo>
+                  <a:lnTo>
+                    <a:pt x="168742" y="99143"/>
+                  </a:lnTo>
+                  <a:lnTo>
+                    <a:pt x="239087" y="138062"/>
+                  </a:lnTo>
+                  <a:lnTo>
+                    <a:pt x="309431" y="175673"/>
+                  </a:lnTo>
+                  <a:lnTo>
+                    <a:pt x="379776" y="212021"/>
+                  </a:lnTo>
+                  <a:lnTo>
+                    <a:pt x="450120" y="247146"/>
+                  </a:lnTo>
+                  <a:lnTo>
+                    <a:pt x="520465" y="281092"/>
+                  </a:lnTo>
+                  <a:lnTo>
+                    <a:pt x="590809" y="313896"/>
+                  </a:lnTo>
+                  <a:lnTo>
+                    <a:pt x="661154" y="345598"/>
+                  </a:lnTo>
+                  <a:lnTo>
+                    <a:pt x="731498" y="376235"/>
+                  </a:lnTo>
+                  <a:lnTo>
+                    <a:pt x="801843" y="405842"/>
+                  </a:lnTo>
+                  <a:lnTo>
+                    <a:pt x="872187" y="434454"/>
+                  </a:lnTo>
+                  <a:lnTo>
+                    <a:pt x="942532" y="462104"/>
+                  </a:lnTo>
+                  <a:lnTo>
+                    <a:pt x="1012876" y="488825"/>
+                  </a:lnTo>
+                  <a:lnTo>
+                    <a:pt x="1083221" y="514648"/>
+                  </a:lnTo>
+                  <a:lnTo>
+                    <a:pt x="1153565" y="539603"/>
+                  </a:lnTo>
+                  <a:lnTo>
+                    <a:pt x="1223909" y="563720"/>
+                  </a:lnTo>
+                  <a:lnTo>
+                    <a:pt x="1294254" y="587026"/>
+                  </a:lnTo>
+                  <a:lnTo>
+                    <a:pt x="1364598" y="609549"/>
+                  </a:lnTo>
+                  <a:lnTo>
+                    <a:pt x="1434943" y="631315"/>
+                  </a:lnTo>
+                  <a:lnTo>
+                    <a:pt x="1505287" y="652349"/>
+                  </a:lnTo>
+                  <a:lnTo>
+                    <a:pt x="1575632" y="672677"/>
+                  </a:lnTo>
+                  <a:lnTo>
+                    <a:pt x="1645976" y="692321"/>
+                  </a:lnTo>
+                  <a:lnTo>
+                    <a:pt x="1716321" y="711305"/>
+                  </a:lnTo>
+                  <a:lnTo>
+                    <a:pt x="1786665" y="729651"/>
+                  </a:lnTo>
+                  <a:lnTo>
+                    <a:pt x="1857010" y="747381"/>
+                  </a:lnTo>
+                  <a:lnTo>
+                    <a:pt x="1927354" y="764514"/>
+                  </a:lnTo>
+                  <a:lnTo>
+                    <a:pt x="1997699" y="781072"/>
+                  </a:lnTo>
+                  <a:lnTo>
+                    <a:pt x="2068043" y="797074"/>
+                  </a:lnTo>
+                  <a:lnTo>
+                    <a:pt x="2138388" y="812537"/>
+                  </a:lnTo>
+                  <a:lnTo>
+                    <a:pt x="2208732" y="827481"/>
+                  </a:lnTo>
+                  <a:lnTo>
+                    <a:pt x="2279077" y="841923"/>
+                  </a:lnTo>
+                  <a:lnTo>
+                    <a:pt x="2349421" y="855880"/>
+                  </a:lnTo>
+                  <a:lnTo>
+                    <a:pt x="2419766" y="869367"/>
+                  </a:lnTo>
+                  <a:lnTo>
+                    <a:pt x="2490110" y="882401"/>
+                  </a:lnTo>
+                  <a:lnTo>
+                    <a:pt x="2560455" y="894997"/>
+                  </a:lnTo>
+                  <a:lnTo>
+                    <a:pt x="2630799" y="907170"/>
+                  </a:lnTo>
+                  <a:lnTo>
+                    <a:pt x="2701144" y="918933"/>
+                  </a:lnTo>
+                  <a:lnTo>
+                    <a:pt x="2771488" y="930302"/>
+                  </a:lnTo>
+                  <a:lnTo>
+                    <a:pt x="2841833" y="941288"/>
+                  </a:lnTo>
+                  <a:lnTo>
+                    <a:pt x="2912177" y="951905"/>
+                  </a:lnTo>
+                  <a:lnTo>
+                    <a:pt x="2982522" y="958011"/>
+                  </a:lnTo>
+                  <a:lnTo>
+                    <a:pt x="3052866" y="958347"/>
+                  </a:lnTo>
+                  <a:lnTo>
+                    <a:pt x="3123211" y="958684"/>
+                  </a:lnTo>
+                  <a:lnTo>
+                    <a:pt x="3193555" y="959020"/>
+                  </a:lnTo>
+                  <a:lnTo>
+                    <a:pt x="3263900" y="959356"/>
+                  </a:lnTo>
+                  <a:lnTo>
+                    <a:pt x="3334244" y="959691"/>
+                  </a:lnTo>
+                  <a:lnTo>
+                    <a:pt x="3404589" y="960026"/>
+                  </a:lnTo>
+                  <a:lnTo>
+                    <a:pt x="3474933" y="960361"/>
+                  </a:lnTo>
+                  <a:lnTo>
+                    <a:pt x="3545278" y="960695"/>
+                  </a:lnTo>
+                  <a:lnTo>
+                    <a:pt x="3615622" y="961029"/>
+                  </a:lnTo>
+                  <a:lnTo>
+                    <a:pt x="3685967" y="961362"/>
+                  </a:lnTo>
+                  <a:lnTo>
+                    <a:pt x="3756311" y="961695"/>
+                  </a:lnTo>
+                  <a:lnTo>
+                    <a:pt x="3826656" y="962028"/>
+                  </a:lnTo>
+                  <a:lnTo>
+                    <a:pt x="3897000" y="962360"/>
+                  </a:lnTo>
+                  <a:lnTo>
+                    <a:pt x="3967345" y="962692"/>
+                  </a:lnTo>
+                  <a:lnTo>
+                    <a:pt x="4037689" y="963024"/>
+                  </a:lnTo>
+                  <a:lnTo>
+                    <a:pt x="4108034" y="963355"/>
+                  </a:lnTo>
+                  <a:lnTo>
+                    <a:pt x="4178378" y="963686"/>
+                  </a:lnTo>
+                  <a:lnTo>
+                    <a:pt x="4248723" y="964016"/>
+                  </a:lnTo>
+                  <a:lnTo>
+                    <a:pt x="4319067" y="964346"/>
+                  </a:lnTo>
+                  <a:lnTo>
+                    <a:pt x="4389412" y="964676"/>
+                  </a:lnTo>
+                  <a:lnTo>
+                    <a:pt x="4459756" y="965005"/>
+                  </a:lnTo>
+                  <a:lnTo>
+                    <a:pt x="4530101" y="965334"/>
+                  </a:lnTo>
+                  <a:lnTo>
+                    <a:pt x="4600445" y="965663"/>
+                  </a:lnTo>
+                  <a:lnTo>
+                    <a:pt x="4670790" y="965991"/>
+                  </a:lnTo>
+                  <a:lnTo>
+                    <a:pt x="4741134" y="966319"/>
+                  </a:lnTo>
+                  <a:lnTo>
+                    <a:pt x="4811479" y="966646"/>
+                  </a:lnTo>
+                  <a:lnTo>
+                    <a:pt x="4881823" y="966974"/>
+                  </a:lnTo>
+                  <a:lnTo>
+                    <a:pt x="4952167" y="967300"/>
+                  </a:lnTo>
+                  <a:lnTo>
+                    <a:pt x="5022512" y="967627"/>
+                  </a:lnTo>
+                  <a:lnTo>
+                    <a:pt x="5092856" y="967953"/>
+                  </a:lnTo>
+                  <a:lnTo>
+                    <a:pt x="5163201" y="968278"/>
+                  </a:lnTo>
+                  <a:lnTo>
+                    <a:pt x="5233545" y="968604"/>
+                  </a:lnTo>
+                  <a:lnTo>
+                    <a:pt x="5303890" y="968929"/>
+                  </a:lnTo>
+                  <a:lnTo>
+                    <a:pt x="5374234" y="969253"/>
+                  </a:lnTo>
+                  <a:lnTo>
+                    <a:pt x="5444579" y="969577"/>
+                  </a:lnTo>
+                  <a:lnTo>
+                    <a:pt x="5514923" y="969901"/>
+                  </a:lnTo>
+                  <a:lnTo>
+                    <a:pt x="5585268" y="970225"/>
+                  </a:lnTo>
+                  <a:lnTo>
+                    <a:pt x="5655612" y="970548"/>
+                  </a:lnTo>
+                  <a:lnTo>
+                    <a:pt x="5725957" y="970871"/>
+                  </a:lnTo>
+                  <a:lnTo>
+                    <a:pt x="5796301" y="971193"/>
+                  </a:lnTo>
+                  <a:lnTo>
+                    <a:pt x="5866646" y="971515"/>
+                  </a:lnTo>
+                  <a:lnTo>
+                    <a:pt x="5936990" y="971837"/>
+                  </a:lnTo>
+                  <a:lnTo>
+                    <a:pt x="6007335" y="972158"/>
+                  </a:lnTo>
+                  <a:lnTo>
+                    <a:pt x="6077679" y="972479"/>
+                  </a:lnTo>
+                  <a:lnTo>
+                    <a:pt x="6148024" y="972799"/>
+                  </a:lnTo>
+                  <a:lnTo>
+                    <a:pt x="6218368" y="973120"/>
+                  </a:lnTo>
+                  <a:lnTo>
+                    <a:pt x="6288713" y="973439"/>
+                  </a:lnTo>
+                  <a:lnTo>
+                    <a:pt x="6359057" y="973759"/>
+                  </a:lnTo>
+                  <a:lnTo>
+                    <a:pt x="6429402" y="974078"/>
+                  </a:lnTo>
+                  <a:lnTo>
+                    <a:pt x="6499746" y="974397"/>
+                  </a:lnTo>
+                  <a:lnTo>
+                    <a:pt x="6570091" y="974715"/>
+                  </a:lnTo>
+                  <a:lnTo>
+                    <a:pt x="6640435" y="975033"/>
+                  </a:lnTo>
+                  <a:lnTo>
+                    <a:pt x="6710780" y="975351"/>
+                  </a:lnTo>
+                  <a:lnTo>
+                    <a:pt x="6781124" y="975668"/>
+                  </a:lnTo>
+                  <a:lnTo>
+                    <a:pt x="6851469" y="975985"/>
+                  </a:lnTo>
+                </a:path>
+              </a:pathLst>
+            </a:custGeom>
+          </p:spPr>
+          <p:txBody>
+            <a:bodyPr/>
+            <a:lstStyle/>
+            <a:p/>
+          </p:txBody>
+        </p:sp>
+        <p:sp>
+          <p:nvSpPr>
+            <p:cNvPr id="73" name="pl73"/>
+            <p:cNvSpPr/>
+            <p:nvPr/>
+          </p:nvSpPr>
+          <p:spPr>
+            <a:xfrm>
+              <a:off x="1235312" y="5279292"/>
+              <a:ext cx="6964104" cy="269382"/>
+            </a:xfrm>
+            <a:custGeom>
+              <a:avLst/>
+              <a:pathLst>
+                <a:path w="6964104" h="269382">
+                  <a:moveTo>
+                    <a:pt x="6964104" y="269382"/>
+                  </a:moveTo>
+                  <a:lnTo>
+                    <a:pt x="6893760" y="267817"/>
+                  </a:lnTo>
+                  <a:lnTo>
+                    <a:pt x="6823415" y="266197"/>
+                  </a:lnTo>
+                  <a:lnTo>
+                    <a:pt x="6753071" y="264521"/>
+                  </a:lnTo>
+                  <a:lnTo>
+                    <a:pt x="6682726" y="262787"/>
+                  </a:lnTo>
+                  <a:lnTo>
+                    <a:pt x="6612382" y="260992"/>
+                  </a:lnTo>
+                  <a:lnTo>
+                    <a:pt x="6542037" y="259135"/>
+                  </a:lnTo>
+                  <a:lnTo>
+                    <a:pt x="6471693" y="257213"/>
+                  </a:lnTo>
+                  <a:lnTo>
+                    <a:pt x="6401348" y="255225"/>
+                  </a:lnTo>
+                  <a:lnTo>
+                    <a:pt x="6331004" y="253167"/>
+                  </a:lnTo>
+                  <a:lnTo>
+                    <a:pt x="6260659" y="251038"/>
+                  </a:lnTo>
+                  <a:lnTo>
+                    <a:pt x="6190315" y="248835"/>
+                  </a:lnTo>
+                  <a:lnTo>
+                    <a:pt x="6119970" y="246555"/>
+                  </a:lnTo>
+                  <a:lnTo>
+                    <a:pt x="6049626" y="244196"/>
+                  </a:lnTo>
+                  <a:lnTo>
+                    <a:pt x="5979281" y="241754"/>
+                  </a:lnTo>
+                  <a:lnTo>
+                    <a:pt x="5908937" y="239228"/>
+                  </a:lnTo>
+                  <a:lnTo>
+                    <a:pt x="5838592" y="236614"/>
+                  </a:lnTo>
+                  <a:lnTo>
+                    <a:pt x="5768248" y="233909"/>
+                  </a:lnTo>
+                  <a:lnTo>
+                    <a:pt x="5697903" y="231110"/>
+                  </a:lnTo>
+                  <a:lnTo>
+                    <a:pt x="5627559" y="228214"/>
+                  </a:lnTo>
+                  <a:lnTo>
+                    <a:pt x="5557214" y="225217"/>
+                  </a:lnTo>
+                  <a:lnTo>
+                    <a:pt x="5486870" y="222116"/>
+                  </a:lnTo>
+                  <a:lnTo>
+                    <a:pt x="5416525" y="218907"/>
+                  </a:lnTo>
+                  <a:lnTo>
+                    <a:pt x="5346181" y="215586"/>
+                  </a:lnTo>
+                  <a:lnTo>
+                    <a:pt x="5275836" y="212150"/>
+                  </a:lnTo>
+                  <a:lnTo>
+                    <a:pt x="5205492" y="208594"/>
+                  </a:lnTo>
+                  <a:lnTo>
+                    <a:pt x="5135147" y="204915"/>
+                  </a:lnTo>
+                  <a:lnTo>
+                    <a:pt x="5064803" y="201108"/>
+                  </a:lnTo>
+                  <a:lnTo>
+                    <a:pt x="4994458" y="197168"/>
+                  </a:lnTo>
+                  <a:lnTo>
+                    <a:pt x="4924114" y="193092"/>
+                  </a:lnTo>
+                  <a:lnTo>
+                    <a:pt x="4853769" y="188873"/>
+                  </a:lnTo>
+                  <a:lnTo>
+                    <a:pt x="4783425" y="184508"/>
+                  </a:lnTo>
+                  <a:lnTo>
+                    <a:pt x="4713080" y="179991"/>
+                  </a:lnTo>
+                  <a:lnTo>
+                    <a:pt x="4642736" y="175317"/>
+                  </a:lnTo>
+                  <a:lnTo>
+                    <a:pt x="4572391" y="170481"/>
+                  </a:lnTo>
+                  <a:lnTo>
+                    <a:pt x="4502047" y="165476"/>
+                  </a:lnTo>
+                  <a:lnTo>
+                    <a:pt x="4431702" y="160297"/>
+                  </a:lnTo>
+                  <a:lnTo>
+                    <a:pt x="4361358" y="154938"/>
+                  </a:lnTo>
+                  <a:lnTo>
+                    <a:pt x="4291013" y="149393"/>
+                  </a:lnTo>
+                  <a:lnTo>
+                    <a:pt x="4220669" y="143655"/>
+                  </a:lnTo>
+                  <a:lnTo>
+                    <a:pt x="4150324" y="137717"/>
+                  </a:lnTo>
+                  <a:lnTo>
+                    <a:pt x="4079980" y="131573"/>
+                  </a:lnTo>
+                  <a:lnTo>
+                    <a:pt x="4009635" y="125215"/>
+                  </a:lnTo>
+                  <a:lnTo>
+                    <a:pt x="3939291" y="118636"/>
+                  </a:lnTo>
+                  <a:lnTo>
+                    <a:pt x="3868946" y="111829"/>
+                  </a:lnTo>
+                  <a:lnTo>
+                    <a:pt x="3798602" y="104784"/>
+                  </a:lnTo>
+                  <a:lnTo>
+                    <a:pt x="3728257" y="97495"/>
+                  </a:lnTo>
+                  <a:lnTo>
+                    <a:pt x="3657913" y="89952"/>
+                  </a:lnTo>
+                  <a:lnTo>
+                    <a:pt x="3587569" y="82147"/>
+                  </a:lnTo>
+                  <a:lnTo>
+                    <a:pt x="3517224" y="74070"/>
+                  </a:lnTo>
+                  <a:lnTo>
+                    <a:pt x="3446880" y="65712"/>
+                  </a:lnTo>
+                  <a:lnTo>
+                    <a:pt x="3376535" y="57064"/>
+                  </a:lnTo>
+                  <a:lnTo>
+                    <a:pt x="3306191" y="48115"/>
+                  </a:lnTo>
+                  <a:lnTo>
+                    <a:pt x="3235846" y="38855"/>
+                  </a:lnTo>
+                  <a:lnTo>
+                    <a:pt x="3165502" y="29273"/>
+                  </a:lnTo>
+                  <a:lnTo>
+                    <a:pt x="3095157" y="19358"/>
+                  </a:lnTo>
+                  <a:lnTo>
+                    <a:pt x="3024813" y="14866"/>
+                  </a:lnTo>
+                  <a:lnTo>
+                    <a:pt x="2954468" y="14528"/>
+                  </a:lnTo>
+                  <a:lnTo>
+                    <a:pt x="2884124" y="14190"/>
+                  </a:lnTo>
+                  <a:lnTo>
+                    <a:pt x="2813779" y="13852"/>
+                  </a:lnTo>
+                  <a:lnTo>
+                    <a:pt x="2743435" y="13513"/>
+                  </a:lnTo>
+                  <a:lnTo>
+                    <a:pt x="2673090" y="13174"/>
+                  </a:lnTo>
+                  <a:lnTo>
+                    <a:pt x="2602746" y="12834"/>
+                  </a:lnTo>
+                  <a:lnTo>
+                    <a:pt x="2532401" y="12494"/>
+                  </a:lnTo>
+                  <a:lnTo>
+                    <a:pt x="2462057" y="12154"/>
+                  </a:lnTo>
+                  <a:lnTo>
+                    <a:pt x="2391712" y="11813"/>
+                  </a:lnTo>
+                  <a:lnTo>
+                    <a:pt x="2321368" y="11472"/>
+                  </a:lnTo>
+                  <a:lnTo>
+                    <a:pt x="2251023" y="11131"/>
+                  </a:lnTo>
+                  <a:lnTo>
+                    <a:pt x="2180679" y="10789"/>
+                  </a:lnTo>
+                  <a:lnTo>
+                    <a:pt x="2110334" y="10447"/>
+                  </a:lnTo>
+                  <a:lnTo>
+                    <a:pt x="2039990" y="10104"/>
+                  </a:lnTo>
+                  <a:lnTo>
+                    <a:pt x="1969645" y="9761"/>
+                  </a:lnTo>
+                  <a:lnTo>
+                    <a:pt x="1899301" y="9418"/>
+                  </a:lnTo>
+                  <a:lnTo>
+                    <a:pt x="1828956" y="9074"/>
+                  </a:lnTo>
+                  <a:lnTo>
+                    <a:pt x="1758612" y="8730"/>
+                  </a:lnTo>
+                  <a:lnTo>
+                    <a:pt x="1688267" y="8386"/>
+                  </a:lnTo>
+                  <a:lnTo>
+                    <a:pt x="1617923" y="8041"/>
+                  </a:lnTo>
+                  <a:lnTo>
+                    <a:pt x="1547578" y="7695"/>
+                  </a:lnTo>
+                  <a:lnTo>
+                    <a:pt x="1477234" y="7350"/>
+                  </a:lnTo>
+                  <a:lnTo>
+                    <a:pt x="1406889" y="7004"/>
+                  </a:lnTo>
+                  <a:lnTo>
+                    <a:pt x="1336545" y="6657"/>
+                  </a:lnTo>
+                  <a:lnTo>
+                    <a:pt x="1266200" y="6310"/>
+                  </a:lnTo>
+                  <a:lnTo>
+                    <a:pt x="1195856" y="5963"/>
+                  </a:lnTo>
+                  <a:lnTo>
+                    <a:pt x="1125511" y="5615"/>
+                  </a:lnTo>
+                  <a:lnTo>
+                    <a:pt x="1055167" y="5267"/>
+                  </a:lnTo>
+                  <a:lnTo>
+                    <a:pt x="984822" y="4919"/>
+                  </a:lnTo>
+                  <a:lnTo>
+                    <a:pt x="914478" y="4570"/>
+                  </a:lnTo>
+                  <a:lnTo>
+                    <a:pt x="844133" y="4221"/>
+                  </a:lnTo>
+                  <a:lnTo>
+                    <a:pt x="773789" y="3871"/>
+                  </a:lnTo>
+                  <a:lnTo>
+                    <a:pt x="703444" y="3521"/>
+                  </a:lnTo>
+                  <a:lnTo>
+                    <a:pt x="633100" y="3171"/>
+                  </a:lnTo>
+                  <a:lnTo>
+                    <a:pt x="562755" y="2820"/>
+                  </a:lnTo>
+                  <a:lnTo>
+                    <a:pt x="492411" y="2469"/>
+                  </a:lnTo>
+                  <a:lnTo>
+                    <a:pt x="422066" y="2117"/>
+                  </a:lnTo>
+                  <a:lnTo>
+                    <a:pt x="351722" y="1765"/>
+                  </a:lnTo>
+                  <a:lnTo>
+                    <a:pt x="281377" y="1413"/>
+                  </a:lnTo>
+                  <a:lnTo>
+                    <a:pt x="211033" y="1060"/>
+                  </a:lnTo>
+                  <a:lnTo>
+                    <a:pt x="140688" y="707"/>
+                  </a:lnTo>
+                  <a:lnTo>
+                    <a:pt x="70344" y="353"/>
+                  </a:lnTo>
+                  <a:lnTo>
+                    <a:pt x="0" y="0"/>
+                  </a:lnTo>
+                </a:path>
+              </a:pathLst>
+            </a:custGeom>
+          </p:spPr>
+          <p:txBody>
+            <a:bodyPr/>
+            <a:lstStyle/>
+            <a:p/>
+          </p:txBody>
+        </p:sp>
+        <p:sp>
+          <p:nvSpPr>
+            <p:cNvPr id="74" name="pl74"/>
+            <p:cNvSpPr/>
+            <p:nvPr/>
+          </p:nvSpPr>
+          <p:spPr>
+            <a:xfrm>
+              <a:off x="1235312" y="4947592"/>
+              <a:ext cx="6964104" cy="533585"/>
+            </a:xfrm>
+            <a:custGeom>
+              <a:avLst/>
+              <a:pathLst>
+                <a:path w="6964104" h="533585">
+                  <a:moveTo>
+                    <a:pt x="0" y="0"/>
+                  </a:moveTo>
+                  <a:lnTo>
+                    <a:pt x="70344" y="11307"/>
+                  </a:lnTo>
+                  <a:lnTo>
+                    <a:pt x="140688" y="22416"/>
+                  </a:lnTo>
+                  <a:lnTo>
+                    <a:pt x="211033" y="33331"/>
+                  </a:lnTo>
+                  <a:lnTo>
+                    <a:pt x="281377" y="44055"/>
+                  </a:lnTo>
+                  <a:lnTo>
+                    <a:pt x="351722" y="54591"/>
+                  </a:lnTo>
+                  <a:lnTo>
+                    <a:pt x="422066" y="64943"/>
+                  </a:lnTo>
+                  <a:lnTo>
+                    <a:pt x="492411" y="75113"/>
+                  </a:lnTo>
+                  <a:lnTo>
+                    <a:pt x="562755" y="85106"/>
+                  </a:lnTo>
+                  <a:lnTo>
+                    <a:pt x="633100" y="94924"/>
+                  </a:lnTo>
+                  <a:lnTo>
+                    <a:pt x="703444" y="104570"/>
+                  </a:lnTo>
+                  <a:lnTo>
+                    <a:pt x="773789" y="114047"/>
+                  </a:lnTo>
+                  <a:lnTo>
+                    <a:pt x="844133" y="123358"/>
+                  </a:lnTo>
+                  <a:lnTo>
+                    <a:pt x="914478" y="132506"/>
+                  </a:lnTo>
+                  <a:lnTo>
+                    <a:pt x="984822" y="141494"/>
+                  </a:lnTo>
+                  <a:lnTo>
+                    <a:pt x="1055167" y="150325"/>
+                  </a:lnTo>
+                  <a:lnTo>
+                    <a:pt x="1125511" y="159002"/>
+                  </a:lnTo>
+                  <a:lnTo>
+                    <a:pt x="1195856" y="167526"/>
+                  </a:lnTo>
+                  <a:lnTo>
+                    <a:pt x="1266200" y="175901"/>
+                  </a:lnTo>
+                  <a:lnTo>
+                    <a:pt x="1336545" y="184130"/>
+                  </a:lnTo>
+                  <a:lnTo>
+                    <a:pt x="1406889" y="192215"/>
+                  </a:lnTo>
+                  <a:lnTo>
+                    <a:pt x="1477234" y="200158"/>
+                  </a:lnTo>
+                  <a:lnTo>
+                    <a:pt x="1547578" y="207962"/>
+                  </a:lnTo>
+                  <a:lnTo>
+                    <a:pt x="1617923" y="215630"/>
+                  </a:lnTo>
+                  <a:lnTo>
+                    <a:pt x="1688267" y="223164"/>
+                  </a:lnTo>
+                  <a:lnTo>
+                    <a:pt x="1758612" y="230565"/>
+                  </a:lnTo>
+                  <a:lnTo>
+                    <a:pt x="1828956" y="237837"/>
+                  </a:lnTo>
+                  <a:lnTo>
+                    <a:pt x="1899301" y="244982"/>
+                  </a:lnTo>
+                  <a:lnTo>
+                    <a:pt x="1969645" y="252002"/>
+                  </a:lnTo>
+                  <a:lnTo>
+                    <a:pt x="2039990" y="258899"/>
+                  </a:lnTo>
+                  <a:lnTo>
+                    <a:pt x="2110334" y="265675"/>
+                  </a:lnTo>
+                  <a:lnTo>
+                    <a:pt x="2180679" y="272333"/>
+                  </a:lnTo>
+                  <a:lnTo>
+                    <a:pt x="2251023" y="278874"/>
+                  </a:lnTo>
+                  <a:lnTo>
+                    <a:pt x="2321368" y="285300"/>
+                  </a:lnTo>
+                  <a:lnTo>
+                    <a:pt x="2391712" y="291615"/>
+                  </a:lnTo>
+                  <a:lnTo>
+                    <a:pt x="2462057" y="297818"/>
+                  </a:lnTo>
+                  <a:lnTo>
+                    <a:pt x="2532401" y="303913"/>
+                  </a:lnTo>
+                  <a:lnTo>
+                    <a:pt x="2602746" y="309902"/>
+                  </a:lnTo>
+                  <a:lnTo>
+                    <a:pt x="2673090" y="315785"/>
+                  </a:lnTo>
+                  <a:lnTo>
+                    <a:pt x="2743435" y="321566"/>
+                  </a:lnTo>
+                  <a:lnTo>
+                    <a:pt x="2813779" y="327246"/>
+                  </a:lnTo>
+                  <a:lnTo>
+                    <a:pt x="2884124" y="332826"/>
+                  </a:lnTo>
+                  <a:lnTo>
+                    <a:pt x="2954468" y="338308"/>
+                  </a:lnTo>
+                  <a:lnTo>
+                    <a:pt x="3024813" y="343695"/>
+                  </a:lnTo>
+                  <a:lnTo>
+                    <a:pt x="3095157" y="348987"/>
+                  </a:lnTo>
+                  <a:lnTo>
+                    <a:pt x="3165502" y="354186"/>
+                  </a:lnTo>
+                  <a:lnTo>
+                    <a:pt x="3235846" y="359295"/>
+                  </a:lnTo>
+                  <a:lnTo>
+                    <a:pt x="3306191" y="364314"/>
+                  </a:lnTo>
+                  <a:lnTo>
+                    <a:pt x="3376535" y="369246"/>
+                  </a:lnTo>
+                  <a:lnTo>
+                    <a:pt x="3446880" y="374091"/>
+                  </a:lnTo>
+                  <a:lnTo>
+                    <a:pt x="3517224" y="378851"/>
+                  </a:lnTo>
+                  <a:lnTo>
+                    <a:pt x="3587569" y="383528"/>
+                  </a:lnTo>
+                  <a:lnTo>
+                    <a:pt x="3657913" y="388123"/>
+                  </a:lnTo>
+                  <a:lnTo>
+                    <a:pt x="3728257" y="392638"/>
+                  </a:lnTo>
+                  <a:lnTo>
+                    <a:pt x="3798602" y="397073"/>
+                  </a:lnTo>
+                  <a:lnTo>
+                    <a:pt x="3868946" y="401431"/>
+                  </a:lnTo>
+                  <a:lnTo>
+                    <a:pt x="3939291" y="405713"/>
+                  </a:lnTo>
+                  <a:lnTo>
+                    <a:pt x="4009635" y="409920"/>
+                  </a:lnTo>
+                  <a:lnTo>
+                    <a:pt x="4079980" y="414053"/>
+                  </a:lnTo>
+                  <a:lnTo>
+                    <a:pt x="4150324" y="418114"/>
+                  </a:lnTo>
+                  <a:lnTo>
+                    <a:pt x="4220669" y="422104"/>
+                  </a:lnTo>
+                  <a:lnTo>
+                    <a:pt x="4291013" y="426024"/>
+                  </a:lnTo>
+                  <a:lnTo>
+                    <a:pt x="4361358" y="429875"/>
+                  </a:lnTo>
+                  <a:lnTo>
+                    <a:pt x="4431702" y="433659"/>
+                  </a:lnTo>
+                  <a:lnTo>
+                    <a:pt x="4502047" y="437377"/>
+                  </a:lnTo>
+                  <a:lnTo>
+                    <a:pt x="4572391" y="441030"/>
+                  </a:lnTo>
+                  <a:lnTo>
+                    <a:pt x="4642736" y="444619"/>
+                  </a:lnTo>
+                  <a:lnTo>
+                    <a:pt x="4713080" y="448145"/>
+                  </a:lnTo>
+                  <a:lnTo>
+                    <a:pt x="4783425" y="451609"/>
+                  </a:lnTo>
+                  <a:lnTo>
+                    <a:pt x="4853769" y="455013"/>
+                  </a:lnTo>
+                  <a:lnTo>
+                    <a:pt x="4924114" y="458357"/>
+                  </a:lnTo>
+                  <a:lnTo>
+                    <a:pt x="4994458" y="461642"/>
+                  </a:lnTo>
+                  <a:lnTo>
+                    <a:pt x="5064803" y="464870"/>
+                  </a:lnTo>
+                  <a:lnTo>
+                    <a:pt x="5135147" y="468042"/>
+                  </a:lnTo>
+                  <a:lnTo>
+                    <a:pt x="5205492" y="471158"/>
+                  </a:lnTo>
+                  <a:lnTo>
+                    <a:pt x="5275836" y="474219"/>
+                  </a:lnTo>
+                  <a:lnTo>
+                    <a:pt x="5346181" y="477227"/>
+                  </a:lnTo>
+                  <a:lnTo>
+                    <a:pt x="5416525" y="480183"/>
+                  </a:lnTo>
+                  <a:lnTo>
+                    <a:pt x="5486870" y="483086"/>
+                  </a:lnTo>
+                  <a:lnTo>
+                    <a:pt x="5557214" y="485939"/>
+                  </a:lnTo>
+                  <a:lnTo>
+                    <a:pt x="5627559" y="488742"/>
+                  </a:lnTo>
+                  <a:lnTo>
+                    <a:pt x="5697903" y="491496"/>
+                  </a:lnTo>
+                  <a:lnTo>
+                    <a:pt x="5768248" y="494201"/>
+                  </a:lnTo>
+                  <a:lnTo>
+                    <a:pt x="5838592" y="496859"/>
+                  </a:lnTo>
+                  <a:lnTo>
+                    <a:pt x="5908937" y="499471"/>
+                  </a:lnTo>
+                  <a:lnTo>
+                    <a:pt x="5979281" y="502037"/>
+                  </a:lnTo>
+                  <a:lnTo>
+                    <a:pt x="6049626" y="504558"/>
+                  </a:lnTo>
+                  <a:lnTo>
+                    <a:pt x="6119970" y="507035"/>
+                  </a:lnTo>
+                  <a:lnTo>
+                    <a:pt x="6190315" y="509469"/>
+                  </a:lnTo>
+                  <a:lnTo>
+                    <a:pt x="6260659" y="511860"/>
+                  </a:lnTo>
+                  <a:lnTo>
+                    <a:pt x="6331004" y="514209"/>
+                  </a:lnTo>
+                  <a:lnTo>
+                    <a:pt x="6401348" y="516517"/>
+                  </a:lnTo>
+                  <a:lnTo>
+                    <a:pt x="6471693" y="518785"/>
+                  </a:lnTo>
+                  <a:lnTo>
+                    <a:pt x="6542037" y="521013"/>
+                  </a:lnTo>
+                  <a:lnTo>
+                    <a:pt x="6612382" y="523202"/>
+                  </a:lnTo>
+                  <a:lnTo>
+                    <a:pt x="6682726" y="525353"/>
+                  </a:lnTo>
+                  <a:lnTo>
+                    <a:pt x="6753071" y="527466"/>
+                  </a:lnTo>
+                  <a:lnTo>
+                    <a:pt x="6823415" y="529542"/>
+                  </a:lnTo>
+                  <a:lnTo>
+                    <a:pt x="6893760" y="531581"/>
+                  </a:lnTo>
+                  <a:lnTo>
+                    <a:pt x="6964104" y="533585"/>
+                  </a:lnTo>
+                </a:path>
+              </a:pathLst>
+            </a:custGeom>
+            <a:ln w="27101" cap="flat">
+              <a:solidFill>
+                <a:srgbClr val="FF8C00">
+                  <a:alpha val="100000"/>
+                </a:srgbClr>
+              </a:solidFill>
+              <a:prstDash val="solid"/>
+              <a:round/>
+            </a:ln>
+          </p:spPr>
+          <p:txBody>
+            <a:bodyPr/>
+            <a:lstStyle/>
+            <a:p/>
+          </p:txBody>
+        </p:sp>
+        <p:sp>
+          <p:nvSpPr>
+            <p:cNvPr id="75" name="pl75"/>
+            <p:cNvSpPr/>
+            <p:nvPr/>
+          </p:nvSpPr>
+          <p:spPr>
+            <a:xfrm>
+              <a:off x="887106" y="5294352"/>
+              <a:ext cx="7660515" cy="0"/>
+            </a:xfrm>
+            <a:custGeom>
+              <a:avLst/>
+              <a:pathLst>
+                <a:path w="7660515" h="0">
+                  <a:moveTo>
+                    <a:pt x="0" y="0"/>
+                  </a:moveTo>
+                  <a:lnTo>
+                    <a:pt x="7660515" y="0"/>
+                  </a:lnTo>
+                  <a:lnTo>
+                    <a:pt x="7660515" y="0"/>
+                  </a:lnTo>
+                </a:path>
+              </a:pathLst>
+            </a:custGeom>
+            <a:ln w="13550" cap="flat">
+              <a:solidFill>
+                <a:srgbClr val="7F7F7F">
+                  <a:alpha val="100000"/>
+                </a:srgbClr>
+              </a:solidFill>
+              <a:prstDash val="dash"/>
+              <a:round/>
+            </a:ln>
+          </p:spPr>
+          <p:txBody>
+            <a:bodyPr/>
+            <a:lstStyle/>
+            <a:p/>
+          </p:txBody>
+        </p:sp>
+        <p:sp>
+          <p:nvSpPr>
+            <p:cNvPr id="76" name="pl76"/>
+            <p:cNvSpPr/>
+            <p:nvPr/>
+          </p:nvSpPr>
+          <p:spPr>
+            <a:xfrm>
+              <a:off x="4300713" y="4336484"/>
+              <a:ext cx="0" cy="1317069"/>
+            </a:xfrm>
+            <a:custGeom>
+              <a:avLst/>
+              <a:pathLst>
+                <a:path w="0" h="1317069">
+                  <a:moveTo>
+                    <a:pt x="0" y="1317069"/>
+                  </a:moveTo>
+                  <a:lnTo>
+                    <a:pt x="0" y="0"/>
+                  </a:lnTo>
+                  <a:lnTo>
+                    <a:pt x="0" y="0"/>
+                  </a:lnTo>
+                </a:path>
+              </a:pathLst>
+            </a:custGeom>
+            <a:ln w="13550" cap="flat">
+              <a:solidFill>
+                <a:srgbClr val="666666">
+                  <a:alpha val="100000"/>
+                </a:srgbClr>
+              </a:solidFill>
+              <a:prstDash val="dot"/>
+              <a:round/>
+            </a:ln>
+          </p:spPr>
+          <p:txBody>
+            <a:bodyPr/>
+            <a:lstStyle/>
+            <a:p/>
+          </p:txBody>
+        </p:sp>
+        <p:sp>
+          <p:nvSpPr>
+            <p:cNvPr id="77" name="pl77"/>
+            <p:cNvSpPr/>
+            <p:nvPr/>
+          </p:nvSpPr>
+          <p:spPr>
+            <a:xfrm>
+              <a:off x="3103710" y="4336484"/>
+              <a:ext cx="0" cy="1317069"/>
+            </a:xfrm>
+            <a:custGeom>
+              <a:avLst/>
+              <a:pathLst>
+                <a:path w="0" h="1317069">
+                  <a:moveTo>
+                    <a:pt x="0" y="1317069"/>
+                  </a:moveTo>
+                  <a:lnTo>
+                    <a:pt x="0" y="0"/>
+                  </a:lnTo>
+                  <a:lnTo>
+                    <a:pt x="0" y="0"/>
+                  </a:lnTo>
+                </a:path>
+              </a:pathLst>
+            </a:custGeom>
+            <a:ln w="13550" cap="flat">
+              <a:solidFill>
+                <a:srgbClr val="4682B4">
+                  <a:alpha val="69803"/>
+                </a:srgbClr>
+              </a:solidFill>
+              <a:prstDash val="dash"/>
+              <a:round/>
+            </a:ln>
+          </p:spPr>
+          <p:txBody>
+            <a:bodyPr/>
+            <a:lstStyle/>
+            <a:p/>
+          </p:txBody>
+        </p:sp>
+        <p:sp>
+          <p:nvSpPr>
+            <p:cNvPr id="78" name="pl78"/>
+            <p:cNvSpPr/>
+            <p:nvPr/>
+          </p:nvSpPr>
+          <p:spPr>
+            <a:xfrm>
+              <a:off x="5504283" y="4336484"/>
+              <a:ext cx="0" cy="1317069"/>
+            </a:xfrm>
+            <a:custGeom>
+              <a:avLst/>
+              <a:pathLst>
+                <a:path w="0" h="1317069">
+                  <a:moveTo>
+                    <a:pt x="0" y="1317069"/>
+                  </a:moveTo>
+                  <a:lnTo>
+                    <a:pt x="0" y="0"/>
+                  </a:lnTo>
+                  <a:lnTo>
+                    <a:pt x="0" y="0"/>
+                  </a:lnTo>
+                </a:path>
+              </a:pathLst>
+            </a:custGeom>
+            <a:ln w="13550" cap="flat">
+              <a:solidFill>
+                <a:srgbClr val="4682B4">
+                  <a:alpha val="69803"/>
+                </a:srgbClr>
+              </a:solidFill>
+              <a:prstDash val="dash"/>
+              <a:round/>
+            </a:ln>
+          </p:spPr>
+          <p:txBody>
+            <a:bodyPr/>
+            <a:lstStyle/>
+            <a:p/>
+          </p:txBody>
+        </p:sp>
+        <p:sp>
+          <p:nvSpPr>
+            <p:cNvPr id="79" name="tx79"/>
+            <p:cNvSpPr/>
+            <p:nvPr/>
+          </p:nvSpPr>
+          <p:spPr>
+            <a:xfrm>
+              <a:off x="762297" y="5553636"/>
+              <a:ext cx="62179" cy="80101"/>
+            </a:xfrm>
+            <a:prstGeom prst="rect">
+              <a:avLst/>
+            </a:prstGeom>
+            <a:noFill/>
+          </p:spPr>
+          <p:txBody>
+            <a:bodyPr lIns="0" rIns="0" tIns="0" bIns="0" anchorCtr="1" anchor="ctr" wrap="none"/>
+            <a:lstStyle/>
+            <a:p>
+              <a:pPr algn="l" marL="0" marR="0" indent="0">
+                <a:lnSpc>
+                  <a:spcPts val="880"/>
+                </a:lnSpc>
+                <a:spcBef>
+                  <a:spcPts val="0"/>
+                </a:spcBef>
+                <a:spcAft>
+                  <a:spcPts val="0"/>
+                </a:spcAft>
+              </a:pPr>
+              <a:r>
+                <a:rPr sz="880">
+                  <a:solidFill>
+                    <a:srgbClr val="4D4D4D">
+                      <a:alpha val="100000"/>
+                    </a:srgbClr>
+                  </a:solidFill>
+                  <a:latin typeface="Helvetica"/>
+                  <a:cs typeface="Helvetica"/>
+                </a:rPr>
+                <a:t>0</a:t>
+              </a:r>
+            </a:p>
+          </p:txBody>
+        </p:sp>
+        <p:sp>
+          <p:nvSpPr>
+            <p:cNvPr id="80" name="tx80"/>
+            <p:cNvSpPr/>
+            <p:nvPr/>
+          </p:nvSpPr>
+          <p:spPr>
+            <a:xfrm>
+              <a:off x="762297" y="5254302"/>
+              <a:ext cx="62179" cy="80101"/>
+            </a:xfrm>
+            <a:prstGeom prst="rect">
+              <a:avLst/>
+            </a:prstGeom>
+            <a:noFill/>
+          </p:spPr>
+          <p:txBody>
+            <a:bodyPr lIns="0" rIns="0" tIns="0" bIns="0" anchorCtr="1" anchor="ctr" wrap="none"/>
+            <a:lstStyle/>
+            <a:p>
+              <a:pPr algn="l" marL="0" marR="0" indent="0">
+                <a:lnSpc>
+                  <a:spcPts val="880"/>
+                </a:lnSpc>
+                <a:spcBef>
+                  <a:spcPts val="0"/>
+                </a:spcBef>
+                <a:spcAft>
+                  <a:spcPts val="0"/>
+                </a:spcAft>
+              </a:pPr>
+              <a:r>
+                <a:rPr sz="880">
+                  <a:solidFill>
+                    <a:srgbClr val="4D4D4D">
+                      <a:alpha val="100000"/>
+                    </a:srgbClr>
+                  </a:solidFill>
+                  <a:latin typeface="Helvetica"/>
+                  <a:cs typeface="Helvetica"/>
+                </a:rPr>
+                <a:t>1</a:t>
+              </a:r>
+            </a:p>
+          </p:txBody>
+        </p:sp>
+        <p:sp>
+          <p:nvSpPr>
+            <p:cNvPr id="81" name="tx81"/>
+            <p:cNvSpPr/>
+            <p:nvPr/>
+          </p:nvSpPr>
+          <p:spPr>
+            <a:xfrm>
+              <a:off x="762297" y="4954968"/>
+              <a:ext cx="62179" cy="80101"/>
+            </a:xfrm>
+            <a:prstGeom prst="rect">
+              <a:avLst/>
+            </a:prstGeom>
+            <a:noFill/>
+          </p:spPr>
+          <p:txBody>
+            <a:bodyPr lIns="0" rIns="0" tIns="0" bIns="0" anchorCtr="1" anchor="ctr" wrap="none"/>
+            <a:lstStyle/>
+            <a:p>
+              <a:pPr algn="l" marL="0" marR="0" indent="0">
+                <a:lnSpc>
+                  <a:spcPts val="880"/>
+                </a:lnSpc>
+                <a:spcBef>
+                  <a:spcPts val="0"/>
+                </a:spcBef>
+                <a:spcAft>
+                  <a:spcPts val="0"/>
+                </a:spcAft>
+              </a:pPr>
+              <a:r>
+                <a:rPr sz="880">
+                  <a:solidFill>
+                    <a:srgbClr val="4D4D4D">
+                      <a:alpha val="100000"/>
+                    </a:srgbClr>
+                  </a:solidFill>
+                  <a:latin typeface="Helvetica"/>
+                  <a:cs typeface="Helvetica"/>
+                </a:rPr>
+                <a:t>2</a:t>
+              </a:r>
+            </a:p>
+          </p:txBody>
+        </p:sp>
+        <p:sp>
+          <p:nvSpPr>
+            <p:cNvPr id="82" name="tx82"/>
+            <p:cNvSpPr/>
+            <p:nvPr/>
+          </p:nvSpPr>
+          <p:spPr>
+            <a:xfrm>
+              <a:off x="762297" y="4655634"/>
+              <a:ext cx="62179" cy="80101"/>
+            </a:xfrm>
+            <a:prstGeom prst="rect">
+              <a:avLst/>
+            </a:prstGeom>
+            <a:noFill/>
+          </p:spPr>
+          <p:txBody>
+            <a:bodyPr lIns="0" rIns="0" tIns="0" bIns="0" anchorCtr="1" anchor="ctr" wrap="none"/>
+            <a:lstStyle/>
+            <a:p>
+              <a:pPr algn="l" marL="0" marR="0" indent="0">
+                <a:lnSpc>
+                  <a:spcPts val="880"/>
+                </a:lnSpc>
+                <a:spcBef>
+                  <a:spcPts val="0"/>
+                </a:spcBef>
+                <a:spcAft>
+                  <a:spcPts val="0"/>
+                </a:spcAft>
+              </a:pPr>
+              <a:r>
+                <a:rPr sz="880">
+                  <a:solidFill>
+                    <a:srgbClr val="4D4D4D">
+                      <a:alpha val="100000"/>
+                    </a:srgbClr>
+                  </a:solidFill>
+                  <a:latin typeface="Helvetica"/>
+                  <a:cs typeface="Helvetica"/>
+                </a:rPr>
+                <a:t>3</a:t>
+              </a:r>
+            </a:p>
+          </p:txBody>
+        </p:sp>
+        <p:sp>
+          <p:nvSpPr>
+            <p:cNvPr id="83" name="tx83"/>
+            <p:cNvSpPr/>
+            <p:nvPr/>
+          </p:nvSpPr>
+          <p:spPr>
+            <a:xfrm>
+              <a:off x="762297" y="4356300"/>
+              <a:ext cx="62179" cy="80101"/>
+            </a:xfrm>
+            <a:prstGeom prst="rect">
+              <a:avLst/>
+            </a:prstGeom>
+            <a:noFill/>
+          </p:spPr>
+          <p:txBody>
+            <a:bodyPr lIns="0" rIns="0" tIns="0" bIns="0" anchorCtr="1" anchor="ctr" wrap="none"/>
+            <a:lstStyle/>
+            <a:p>
+              <a:pPr algn="l" marL="0" marR="0" indent="0">
+                <a:lnSpc>
+                  <a:spcPts val="880"/>
+                </a:lnSpc>
+                <a:spcBef>
+                  <a:spcPts val="0"/>
+                </a:spcBef>
+                <a:spcAft>
+                  <a:spcPts val="0"/>
+                </a:spcAft>
+              </a:pPr>
+              <a:r>
+                <a:rPr sz="880">
+                  <a:solidFill>
+                    <a:srgbClr val="4D4D4D">
+                      <a:alpha val="100000"/>
+                    </a:srgbClr>
+                  </a:solidFill>
+                  <a:latin typeface="Helvetica"/>
+                  <a:cs typeface="Helvetica"/>
+                </a:rPr>
+                <a:t>4</a:t>
+              </a:r>
+            </a:p>
+          </p:txBody>
+        </p:sp>
+        <p:sp>
+          <p:nvSpPr>
+            <p:cNvPr id="84" name="tx84"/>
+            <p:cNvSpPr/>
+            <p:nvPr/>
+          </p:nvSpPr>
+          <p:spPr>
+            <a:xfrm>
+              <a:off x="1324230" y="5716183"/>
+              <a:ext cx="161574" cy="80101"/>
+            </a:xfrm>
+            <a:prstGeom prst="rect">
+              <a:avLst/>
+            </a:prstGeom>
+            <a:noFill/>
+          </p:spPr>
+          <p:txBody>
+            <a:bodyPr lIns="0" rIns="0" tIns="0" bIns="0" anchorCtr="1" anchor="ctr" wrap="none"/>
+            <a:lstStyle/>
+            <a:p>
+              <a:pPr algn="l" marL="0" marR="0" indent="0">
+                <a:lnSpc>
+                  <a:spcPts val="880"/>
+                </a:lnSpc>
+                <a:spcBef>
+                  <a:spcPts val="0"/>
+                </a:spcBef>
+                <a:spcAft>
+                  <a:spcPts val="0"/>
+                </a:spcAft>
+              </a:pPr>
+              <a:r>
+                <a:rPr sz="880">
+                  <a:solidFill>
+                    <a:srgbClr val="4D4D4D">
+                      <a:alpha val="100000"/>
+                    </a:srgbClr>
+                  </a:solidFill>
+                  <a:latin typeface="Helvetica"/>
+                  <a:cs typeface="Helvetica"/>
+                </a:rPr>
+                <a:t>-50</a:t>
+              </a:r>
+            </a:p>
+          </p:txBody>
+        </p:sp>
+        <p:sp>
+          <p:nvSpPr>
+            <p:cNvPr id="85" name="tx85"/>
+            <p:cNvSpPr/>
+            <p:nvPr/>
+          </p:nvSpPr>
+          <p:spPr>
+            <a:xfrm>
+              <a:off x="2179256" y="5716183"/>
+              <a:ext cx="161574" cy="80101"/>
+            </a:xfrm>
+            <a:prstGeom prst="rect">
+              <a:avLst/>
+            </a:prstGeom>
+            <a:noFill/>
+          </p:spPr>
+          <p:txBody>
+            <a:bodyPr lIns="0" rIns="0" tIns="0" bIns="0" anchorCtr="1" anchor="ctr" wrap="none"/>
+            <a:lstStyle/>
+            <a:p>
+              <a:pPr algn="l" marL="0" marR="0" indent="0">
+                <a:lnSpc>
+                  <a:spcPts val="880"/>
+                </a:lnSpc>
+                <a:spcBef>
+                  <a:spcPts val="0"/>
+                </a:spcBef>
+                <a:spcAft>
+                  <a:spcPts val="0"/>
+                </a:spcAft>
+              </a:pPr>
+              <a:r>
+                <a:rPr sz="880">
+                  <a:solidFill>
+                    <a:srgbClr val="4D4D4D">
+                      <a:alpha val="100000"/>
+                    </a:srgbClr>
+                  </a:solidFill>
+                  <a:latin typeface="Helvetica"/>
+                  <a:cs typeface="Helvetica"/>
+                </a:rPr>
+                <a:t>-40</a:t>
+              </a:r>
+            </a:p>
+          </p:txBody>
+        </p:sp>
+        <p:sp>
+          <p:nvSpPr>
+            <p:cNvPr id="86" name="tx86"/>
+            <p:cNvSpPr/>
+            <p:nvPr/>
+          </p:nvSpPr>
+          <p:spPr>
+            <a:xfrm>
+              <a:off x="3034282" y="5716183"/>
+              <a:ext cx="161574" cy="80101"/>
+            </a:xfrm>
+            <a:prstGeom prst="rect">
+              <a:avLst/>
+            </a:prstGeom>
+            <a:noFill/>
+          </p:spPr>
+          <p:txBody>
+            <a:bodyPr lIns="0" rIns="0" tIns="0" bIns="0" anchorCtr="1" anchor="ctr" wrap="none"/>
+            <a:lstStyle/>
+            <a:p>
+              <a:pPr algn="l" marL="0" marR="0" indent="0">
+                <a:lnSpc>
+                  <a:spcPts val="880"/>
+                </a:lnSpc>
+                <a:spcBef>
+                  <a:spcPts val="0"/>
+                </a:spcBef>
+                <a:spcAft>
+                  <a:spcPts val="0"/>
+                </a:spcAft>
+              </a:pPr>
+              <a:r>
+                <a:rPr sz="880">
+                  <a:solidFill>
+                    <a:srgbClr val="4D4D4D">
+                      <a:alpha val="100000"/>
+                    </a:srgbClr>
+                  </a:solidFill>
+                  <a:latin typeface="Helvetica"/>
+                  <a:cs typeface="Helvetica"/>
+                </a:rPr>
+                <a:t>-30</a:t>
+              </a:r>
+            </a:p>
+          </p:txBody>
+        </p:sp>
+        <p:sp>
+          <p:nvSpPr>
+            <p:cNvPr id="87" name="tx87"/>
+            <p:cNvSpPr/>
+            <p:nvPr/>
+          </p:nvSpPr>
+          <p:spPr>
+            <a:xfrm>
+              <a:off x="3889308" y="5716183"/>
+              <a:ext cx="161574" cy="80101"/>
+            </a:xfrm>
+            <a:prstGeom prst="rect">
+              <a:avLst/>
+            </a:prstGeom>
+            <a:noFill/>
+          </p:spPr>
+          <p:txBody>
+            <a:bodyPr lIns="0" rIns="0" tIns="0" bIns="0" anchorCtr="1" anchor="ctr" wrap="none"/>
+            <a:lstStyle/>
+            <a:p>
+              <a:pPr algn="l" marL="0" marR="0" indent="0">
+                <a:lnSpc>
+                  <a:spcPts val="880"/>
+                </a:lnSpc>
+                <a:spcBef>
+                  <a:spcPts val="0"/>
+                </a:spcBef>
+                <a:spcAft>
+                  <a:spcPts val="0"/>
+                </a:spcAft>
+              </a:pPr>
+              <a:r>
+                <a:rPr sz="880">
+                  <a:solidFill>
+                    <a:srgbClr val="4D4D4D">
+                      <a:alpha val="100000"/>
+                    </a:srgbClr>
+                  </a:solidFill>
+                  <a:latin typeface="Helvetica"/>
+                  <a:cs typeface="Helvetica"/>
+                </a:rPr>
+                <a:t>-20</a:t>
+              </a:r>
+            </a:p>
+          </p:txBody>
+        </p:sp>
+        <p:sp>
+          <p:nvSpPr>
+            <p:cNvPr id="88" name="tx88"/>
+            <p:cNvSpPr/>
+            <p:nvPr/>
+          </p:nvSpPr>
+          <p:spPr>
+            <a:xfrm>
+              <a:off x="4744334" y="5716183"/>
+              <a:ext cx="161574" cy="80101"/>
+            </a:xfrm>
+            <a:prstGeom prst="rect">
+              <a:avLst/>
+            </a:prstGeom>
+            <a:noFill/>
+          </p:spPr>
+          <p:txBody>
+            <a:bodyPr lIns="0" rIns="0" tIns="0" bIns="0" anchorCtr="1" anchor="ctr" wrap="none"/>
+            <a:lstStyle/>
+            <a:p>
+              <a:pPr algn="l" marL="0" marR="0" indent="0">
+                <a:lnSpc>
+                  <a:spcPts val="880"/>
+                </a:lnSpc>
+                <a:spcBef>
+                  <a:spcPts val="0"/>
+                </a:spcBef>
+                <a:spcAft>
+                  <a:spcPts val="0"/>
+                </a:spcAft>
+              </a:pPr>
+              <a:r>
+                <a:rPr sz="880">
+                  <a:solidFill>
+                    <a:srgbClr val="4D4D4D">
+                      <a:alpha val="100000"/>
+                    </a:srgbClr>
+                  </a:solidFill>
+                  <a:latin typeface="Helvetica"/>
+                  <a:cs typeface="Helvetica"/>
+                </a:rPr>
+                <a:t>-10</a:t>
+              </a:r>
+            </a:p>
+          </p:txBody>
+        </p:sp>
+        <p:sp>
+          <p:nvSpPr>
+            <p:cNvPr id="89" name="tx89"/>
+            <p:cNvSpPr/>
+            <p:nvPr/>
+          </p:nvSpPr>
+          <p:spPr>
+            <a:xfrm>
+              <a:off x="5649057" y="5716183"/>
+              <a:ext cx="62179" cy="80101"/>
+            </a:xfrm>
+            <a:prstGeom prst="rect">
+              <a:avLst/>
+            </a:prstGeom>
+            <a:noFill/>
+          </p:spPr>
+          <p:txBody>
+            <a:bodyPr lIns="0" rIns="0" tIns="0" bIns="0" anchorCtr="1" anchor="ctr" wrap="none"/>
+            <a:lstStyle/>
+            <a:p>
+              <a:pPr algn="l" marL="0" marR="0" indent="0">
+                <a:lnSpc>
+                  <a:spcPts val="880"/>
+                </a:lnSpc>
+                <a:spcBef>
+                  <a:spcPts val="0"/>
+                </a:spcBef>
+                <a:spcAft>
+                  <a:spcPts val="0"/>
+                </a:spcAft>
+              </a:pPr>
+              <a:r>
+                <a:rPr sz="880">
+                  <a:solidFill>
+                    <a:srgbClr val="4D4D4D">
+                      <a:alpha val="100000"/>
+                    </a:srgbClr>
+                  </a:solidFill>
+                  <a:latin typeface="Helvetica"/>
+                  <a:cs typeface="Helvetica"/>
+                </a:rPr>
+                <a:t>0</a:t>
+              </a:r>
+            </a:p>
+          </p:txBody>
+        </p:sp>
+        <p:sp>
+          <p:nvSpPr>
+            <p:cNvPr id="90" name="tx90"/>
+            <p:cNvSpPr/>
+            <p:nvPr/>
+          </p:nvSpPr>
+          <p:spPr>
+            <a:xfrm>
+              <a:off x="6472994" y="5716183"/>
+              <a:ext cx="124358" cy="80101"/>
+            </a:xfrm>
+            <a:prstGeom prst="rect">
+              <a:avLst/>
+            </a:prstGeom>
+            <a:noFill/>
+          </p:spPr>
+          <p:txBody>
+            <a:bodyPr lIns="0" rIns="0" tIns="0" bIns="0" anchorCtr="1" anchor="ctr" wrap="none"/>
+            <a:lstStyle/>
+            <a:p>
+              <a:pPr algn="l" marL="0" marR="0" indent="0">
+                <a:lnSpc>
+                  <a:spcPts val="880"/>
+                </a:lnSpc>
+                <a:spcBef>
+                  <a:spcPts val="0"/>
+                </a:spcBef>
+                <a:spcAft>
+                  <a:spcPts val="0"/>
+                </a:spcAft>
+              </a:pPr>
+              <a:r>
+                <a:rPr sz="880">
+                  <a:solidFill>
+                    <a:srgbClr val="4D4D4D">
+                      <a:alpha val="100000"/>
+                    </a:srgbClr>
+                  </a:solidFill>
+                  <a:latin typeface="Helvetica"/>
+                  <a:cs typeface="Helvetica"/>
+                </a:rPr>
+                <a:t>10</a:t>
+              </a:r>
+            </a:p>
+          </p:txBody>
+        </p:sp>
+        <p:sp>
+          <p:nvSpPr>
+            <p:cNvPr id="91" name="tx91"/>
+            <p:cNvSpPr/>
+            <p:nvPr/>
+          </p:nvSpPr>
+          <p:spPr>
+            <a:xfrm>
+              <a:off x="7328020" y="5716183"/>
+              <a:ext cx="124358" cy="80101"/>
+            </a:xfrm>
+            <a:prstGeom prst="rect">
+              <a:avLst/>
+            </a:prstGeom>
+            <a:noFill/>
+          </p:spPr>
+          <p:txBody>
+            <a:bodyPr lIns="0" rIns="0" tIns="0" bIns="0" anchorCtr="1" anchor="ctr" wrap="none"/>
+            <a:lstStyle/>
+            <a:p>
+              <a:pPr algn="l" marL="0" marR="0" indent="0">
+                <a:lnSpc>
+                  <a:spcPts val="880"/>
+                </a:lnSpc>
+                <a:spcBef>
+                  <a:spcPts val="0"/>
+                </a:spcBef>
+                <a:spcAft>
+                  <a:spcPts val="0"/>
+                </a:spcAft>
+              </a:pPr>
+              <a:r>
+                <a:rPr sz="880">
+                  <a:solidFill>
+                    <a:srgbClr val="4D4D4D">
+                      <a:alpha val="100000"/>
+                    </a:srgbClr>
+                  </a:solidFill>
+                  <a:latin typeface="Helvetica"/>
+                  <a:cs typeface="Helvetica"/>
+                </a:rPr>
+                <a:t>20</a:t>
+              </a:r>
+            </a:p>
+          </p:txBody>
+        </p:sp>
+        <p:sp>
+          <p:nvSpPr>
+            <p:cNvPr id="92" name="tx92"/>
+            <p:cNvSpPr/>
+            <p:nvPr/>
+          </p:nvSpPr>
+          <p:spPr>
+            <a:xfrm>
+              <a:off x="8183046" y="5716183"/>
+              <a:ext cx="124358" cy="80101"/>
+            </a:xfrm>
+            <a:prstGeom prst="rect">
+              <a:avLst/>
+            </a:prstGeom>
+            <a:noFill/>
+          </p:spPr>
+          <p:txBody>
+            <a:bodyPr lIns="0" rIns="0" tIns="0" bIns="0" anchorCtr="1" anchor="ctr" wrap="none"/>
+            <a:lstStyle/>
+            <a:p>
+              <a:pPr algn="l" marL="0" marR="0" indent="0">
+                <a:lnSpc>
+                  <a:spcPts val="880"/>
+                </a:lnSpc>
+                <a:spcBef>
+                  <a:spcPts val="0"/>
+                </a:spcBef>
+                <a:spcAft>
+                  <a:spcPts val="0"/>
+                </a:spcAft>
+              </a:pPr>
+              <a:r>
+                <a:rPr sz="880">
+                  <a:solidFill>
+                    <a:srgbClr val="4D4D4D">
+                      <a:alpha val="100000"/>
+                    </a:srgbClr>
+                  </a:solidFill>
+                  <a:latin typeface="Helvetica"/>
+                  <a:cs typeface="Helvetica"/>
+                </a:rPr>
+                <a:t>30</a:t>
+              </a:r>
+            </a:p>
+          </p:txBody>
+        </p:sp>
+        <p:sp>
+          <p:nvSpPr>
+            <p:cNvPr id="93" name="tx93"/>
+            <p:cNvSpPr/>
+            <p:nvPr/>
+          </p:nvSpPr>
+          <p:spPr>
+            <a:xfrm>
+              <a:off x="1561815" y="5855859"/>
+              <a:ext cx="6311097" cy="100218"/>
+            </a:xfrm>
+            <a:prstGeom prst="rect">
+              <a:avLst/>
+            </a:prstGeom>
+            <a:noFill/>
+          </p:spPr>
+          <p:txBody>
+            <a:bodyPr lIns="0" rIns="0" tIns="0" bIns="0" anchorCtr="1" anchor="ctr" wrap="none"/>
+            <a:lstStyle/>
+            <a:p>
+              <a:pPr algn="l" marL="0" marR="0" indent="0">
+                <a:lnSpc>
+                  <a:spcPts val="1100"/>
+                </a:lnSpc>
+                <a:spcBef>
+                  <a:spcPts val="0"/>
+                </a:spcBef>
+                <a:spcAft>
+                  <a:spcPts val="0"/>
+                </a:spcAft>
+              </a:pPr>
+              <a:r>
+                <a:rPr sz="1100">
+                  <a:solidFill>
+                    <a:srgbClr val="000000">
+                      <a:alpha val="100000"/>
+                    </a:srgbClr>
+                  </a:solidFill>
+                  <a:latin typeface="Helvetica"/>
+                  <a:cs typeface="Helvetica"/>
+                </a:rPr>
+                <a:t>Sensitivity eGFR Difference (%): 100 × (CKD-EPI 2012 CysC − CKD-EPI 2021 Cr) / CKD-EPI 2021 Cr</a:t>
+              </a:r>
+            </a:p>
+          </p:txBody>
+        </p:sp>
+        <p:sp>
+          <p:nvSpPr>
+            <p:cNvPr id="94" name="tx94"/>
+            <p:cNvSpPr/>
+            <p:nvPr/>
+          </p:nvSpPr>
+          <p:spPr>
+            <a:xfrm rot="-5400000">
+              <a:off x="138035" y="4944909"/>
+              <a:ext cx="1016904" cy="100218"/>
+            </a:xfrm>
+            <a:prstGeom prst="rect">
+              <a:avLst/>
+            </a:prstGeom>
+            <a:noFill/>
+          </p:spPr>
+          <p:txBody>
+            <a:bodyPr lIns="0" rIns="0" tIns="0" bIns="0" anchorCtr="1" anchor="ctr" wrap="none"/>
+            <a:lstStyle/>
+            <a:p>
+              <a:pPr algn="l" marL="0" marR="0" indent="0">
+                <a:lnSpc>
+                  <a:spcPts val="1100"/>
+                </a:lnSpc>
+                <a:spcBef>
+                  <a:spcPts val="0"/>
+                </a:spcBef>
+                <a:spcAft>
+                  <a:spcPts val="0"/>
+                </a:spcAft>
+              </a:pPr>
+              <a:r>
+                <a:rPr sz="1100">
+                  <a:solidFill>
+                    <a:srgbClr val="000000">
+                      <a:alpha val="100000"/>
+                    </a:srgbClr>
+                  </a:solidFill>
+                  <a:latin typeface="Helvetica"/>
+                  <a:cs typeface="Helvetica"/>
+                </a:rPr>
+                <a:t>subHR (95% CI)</a:t>
+              </a:r>
+            </a:p>
+          </p:txBody>
+        </p:sp>
+        <p:sp>
+          <p:nvSpPr>
+            <p:cNvPr id="95" name="tx95"/>
+            <p:cNvSpPr/>
+            <p:nvPr/>
+          </p:nvSpPr>
+          <p:spPr>
+            <a:xfrm>
+              <a:off x="887106" y="4159544"/>
+              <a:ext cx="6959864" cy="82021"/>
+            </a:xfrm>
+            <a:prstGeom prst="rect">
+              <a:avLst/>
+            </a:prstGeom>
+            <a:noFill/>
+          </p:spPr>
+          <p:txBody>
+            <a:bodyPr lIns="0" rIns="0" tIns="0" bIns="0" anchorCtr="1" anchor="ctr" wrap="none"/>
+            <a:lstStyle/>
+            <a:p>
+              <a:pPr algn="l" marL="0" marR="0" indent="0">
+                <a:lnSpc>
+                  <a:spcPts val="900"/>
+                </a:lnSpc>
+                <a:spcBef>
+                  <a:spcPts val="0"/>
+                </a:spcBef>
+                <a:spcAft>
+                  <a:spcPts val="0"/>
+                </a:spcAft>
+              </a:pPr>
+              <a:r>
+                <a:rPr sz="900">
+                  <a:solidFill>
+                    <a:srgbClr val="404040">
+                      <a:alpha val="100000"/>
+                    </a:srgbClr>
+                  </a:solidFill>
+                  <a:latin typeface="Helvetica"/>
+                  <a:cs typeface="Helvetica"/>
+                </a:rPr>
+                <a:t>subHR per 10 % decline: 1.24 (1.01-1.52), p_Bonf = 0.218 (n = 6)  |  per IQR decline (Δ = 28.1 %): 1.83 (1.04-3.21)  |  IQR: [-30.1, -2.1] %</a:t>
+              </a:r>
+            </a:p>
+          </p:txBody>
+        </p:sp>
+        <p:sp>
+          <p:nvSpPr>
+            <p:cNvPr id="96" name="tx96"/>
+            <p:cNvSpPr/>
+            <p:nvPr/>
+          </p:nvSpPr>
+          <p:spPr>
+            <a:xfrm>
+              <a:off x="887106" y="3932770"/>
               <a:ext cx="3508461" cy="120152"/>
             </a:xfrm>
             <a:prstGeom prst="rect">
